--- a/ppt/RakeshKunchala_X25176862_water-treatment-utility.pptx
+++ b/ppt/RakeshKunchala_X25176862_water-treatment-utility.pptx
@@ -1163,7 +1163,7 @@
           <a:bodyPr wrap="square" rtlCol="0" anchor="t"/>
           <a:lstStyle/>
           <a:p>
-            <a:pPr algn="l" indent="0" marL="0">
+            <a:pPr indent="0" marL="0">
               <a:buNone/>
             </a:pPr>
             <a:r>
@@ -1314,7 +1314,7 @@
               <a:buNone/>
             </a:pPr>
             <a:r>
-              <a:rPr lang="en-US" sz="1400" b="1" dirty="0">
+              <a:rPr lang="en-US" sz="1350" b="1" dirty="0">
                 <a:solidFill>
                   <a:srgbClr val="E4A63C"/>
                 </a:solidFill>
@@ -1324,7 +1324,7 @@
               </a:rPr>
               <a:t>Pressure &lt; 2 bar (min)</a:t>
             </a:r>
-            <a:endParaRPr lang="en-US" sz="1400" dirty="0"/>
+            <a:endParaRPr lang="en-US" sz="1350" dirty="0"/>
           </a:p>
         </p:txBody>
       </p:sp>
@@ -1380,7 +1380,7 @@
               <a:buNone/>
             </a:pPr>
             <a:r>
-              <a:rPr lang="en-US" sz="1400" b="1" dirty="0">
+              <a:rPr lang="en-US" sz="1350" b="1" dirty="0">
                 <a:solidFill>
                   <a:srgbClr val="E4A63C"/>
                 </a:solidFill>
@@ -1390,7 +1390,7 @@
               </a:rPr>
               <a:t>Chlorine &lt; 0.2 ppm</a:t>
             </a:r>
-            <a:endParaRPr lang="en-US" sz="1400" dirty="0"/>
+            <a:endParaRPr lang="en-US" sz="1350" dirty="0"/>
           </a:p>
         </p:txBody>
       </p:sp>
@@ -1446,7 +1446,7 @@
               <a:buNone/>
             </a:pPr>
             <a:r>
-              <a:rPr lang="en-US" sz="1400" b="1" dirty="0">
+              <a:rPr lang="en-US" sz="1350" b="1" dirty="0">
                 <a:solidFill>
                   <a:srgbClr val="E4A63C"/>
                 </a:solidFill>
@@ -1456,7 +1456,7 @@
               </a:rPr>
               <a:t>10 s window score</a:t>
             </a:r>
-            <a:endParaRPr lang="en-US" sz="1400" dirty="0"/>
+            <a:endParaRPr lang="en-US" sz="1350" dirty="0"/>
           </a:p>
         </p:txBody>
       </p:sp>
@@ -1578,12 +1578,12 @@
         </p:nvSpPr>
         <p:spPr>
           <a:xfrm>
-            <a:off x="640080" y="2468880"/>
-            <a:ext cx="1572768" cy="1371600"/>
+            <a:off x="640080" y="1874520"/>
+            <a:ext cx="2286000" cy="1280160"/>
           </a:xfrm>
           <a:prstGeom prst="roundRect">
             <a:avLst>
-              <a:gd name="adj" fmla="val 6667"/>
+              <a:gd name="adj" fmla="val 7143"/>
             </a:avLst>
           </a:prstGeom>
           <a:solidFill>
@@ -1605,8 +1605,8 @@
         </p:nvSpPr>
         <p:spPr>
           <a:xfrm>
-            <a:off x="1325880" y="2670048"/>
-            <a:ext cx="201168" cy="201168"/>
+            <a:off x="1691640" y="2039112"/>
+            <a:ext cx="182880" cy="182880"/>
           </a:xfrm>
           <a:prstGeom prst="ellipse">
             <a:avLst/>
@@ -1625,8 +1625,8 @@
         </p:nvSpPr>
         <p:spPr>
           <a:xfrm>
-            <a:off x="594360" y="2926080"/>
-            <a:ext cx="1664208" cy="411480"/>
+            <a:off x="612648" y="2258568"/>
+            <a:ext cx="2340864" cy="365760"/>
           </a:xfrm>
           <a:prstGeom prst="rect">
             <a:avLst/>
@@ -1664,8 +1664,8 @@
         </p:nvSpPr>
         <p:spPr>
           <a:xfrm>
-            <a:off x="621792" y="3310128"/>
-            <a:ext cx="1609344" cy="457200"/>
+            <a:off x="640080" y="2606040"/>
+            <a:ext cx="2286000" cy="411480"/>
           </a:xfrm>
           <a:prstGeom prst="rect">
             <a:avLst/>
@@ -1703,8 +1703,8 @@
         </p:nvSpPr>
         <p:spPr>
           <a:xfrm>
-            <a:off x="2231136" y="3154680"/>
-            <a:ext cx="258409" cy="0"/>
+            <a:off x="2944368" y="2514600"/>
+            <a:ext cx="1975104" cy="0"/>
           </a:xfrm>
           <a:prstGeom prst="line">
             <a:avLst/>
@@ -1715,6 +1715,7 @@
               <a:srgbClr val="4FAAB6"/>
             </a:solidFill>
             <a:prstDash val="solid"/>
+            <a:headEnd type="none"/>
             <a:tailEnd type="triangle"/>
           </a:ln>
         </p:spPr>
@@ -1727,12 +1728,12 @@
         </p:nvSpPr>
         <p:spPr>
           <a:xfrm>
-            <a:off x="2507833" y="2468880"/>
-            <a:ext cx="1572768" cy="1371600"/>
+            <a:off x="4937760" y="1874520"/>
+            <a:ext cx="2286000" cy="1280160"/>
           </a:xfrm>
           <a:prstGeom prst="roundRect">
             <a:avLst>
-              <a:gd name="adj" fmla="val 6667"/>
+              <a:gd name="adj" fmla="val 7143"/>
             </a:avLst>
           </a:prstGeom>
           <a:solidFill>
@@ -1754,8 +1755,8 @@
         </p:nvSpPr>
         <p:spPr>
           <a:xfrm>
-            <a:off x="3193633" y="2670048"/>
-            <a:ext cx="201168" cy="201168"/>
+            <a:off x="5989320" y="2039112"/>
+            <a:ext cx="182880" cy="182880"/>
           </a:xfrm>
           <a:prstGeom prst="ellipse">
             <a:avLst/>
@@ -1774,8 +1775,8 @@
         </p:nvSpPr>
         <p:spPr>
           <a:xfrm>
-            <a:off x="2462113" y="2926080"/>
-            <a:ext cx="1664208" cy="411480"/>
+            <a:off x="4910328" y="2258568"/>
+            <a:ext cx="2340864" cy="365760"/>
           </a:xfrm>
           <a:prstGeom prst="rect">
             <a:avLst/>
@@ -1813,8 +1814,8 @@
         </p:nvSpPr>
         <p:spPr>
           <a:xfrm>
-            <a:off x="2489545" y="3310128"/>
-            <a:ext cx="1609344" cy="457200"/>
+            <a:off x="4937760" y="2606040"/>
+            <a:ext cx="2286000" cy="411480"/>
           </a:xfrm>
           <a:prstGeom prst="rect">
             <a:avLst/>
@@ -1852,8 +1853,8 @@
         </p:nvSpPr>
         <p:spPr>
           <a:xfrm>
-            <a:off x="4098889" y="3154680"/>
-            <a:ext cx="258409" cy="0"/>
+            <a:off x="7242048" y="2514600"/>
+            <a:ext cx="1975104" cy="0"/>
           </a:xfrm>
           <a:prstGeom prst="line">
             <a:avLst/>
@@ -1864,6 +1865,7 @@
               <a:srgbClr val="4FAAB6"/>
             </a:solidFill>
             <a:prstDash val="solid"/>
+            <a:headEnd type="none"/>
             <a:tailEnd type="triangle"/>
           </a:ln>
         </p:spPr>
@@ -1876,12 +1878,12 @@
         </p:nvSpPr>
         <p:spPr>
           <a:xfrm>
-            <a:off x="4375587" y="2468880"/>
-            <a:ext cx="1572768" cy="1371600"/>
+            <a:off x="9235440" y="1874520"/>
+            <a:ext cx="2286000" cy="1280160"/>
           </a:xfrm>
           <a:prstGeom prst="roundRect">
             <a:avLst>
-              <a:gd name="adj" fmla="val 6667"/>
+              <a:gd name="adj" fmla="val 7143"/>
             </a:avLst>
           </a:prstGeom>
           <a:solidFill>
@@ -1903,8 +1905,8 @@
         </p:nvSpPr>
         <p:spPr>
           <a:xfrm>
-            <a:off x="5061387" y="2670048"/>
-            <a:ext cx="201168" cy="201168"/>
+            <a:off x="10287000" y="2039112"/>
+            <a:ext cx="182880" cy="182880"/>
           </a:xfrm>
           <a:prstGeom prst="ellipse">
             <a:avLst/>
@@ -1923,8 +1925,8 @@
         </p:nvSpPr>
         <p:spPr>
           <a:xfrm>
-            <a:off x="4329867" y="2926080"/>
-            <a:ext cx="1664208" cy="411480"/>
+            <a:off x="9208008" y="2258568"/>
+            <a:ext cx="2340864" cy="365760"/>
           </a:xfrm>
           <a:prstGeom prst="rect">
             <a:avLst/>
@@ -1962,8 +1964,8 @@
         </p:nvSpPr>
         <p:spPr>
           <a:xfrm>
-            <a:off x="4357299" y="3310128"/>
-            <a:ext cx="1609344" cy="457200"/>
+            <a:off x="9235440" y="2606040"/>
+            <a:ext cx="2286000" cy="411480"/>
           </a:xfrm>
           <a:prstGeom prst="rect">
             <a:avLst/>
@@ -2001,36 +2003,12 @@
         </p:nvSpPr>
         <p:spPr>
           <a:xfrm>
-            <a:off x="5966643" y="3154680"/>
-            <a:ext cx="258409" cy="0"/>
-          </a:xfrm>
-          <a:prstGeom prst="line">
-            <a:avLst/>
-          </a:prstGeom>
-          <a:noFill/>
-          <a:ln w="25400">
-            <a:solidFill>
-              <a:srgbClr val="4FAAB6"/>
-            </a:solidFill>
-            <a:prstDash val="solid"/>
-            <a:tailEnd type="triangle"/>
-          </a:ln>
-        </p:spPr>
-      </p:sp>
-      <p:sp>
-        <p:nvSpPr>
-          <p:cNvPr id="18" name="Shape 16"/>
-          <p:cNvSpPr/>
-          <p:nvPr/>
-        </p:nvSpPr>
-        <p:spPr>
-          <a:xfrm>
-            <a:off x="6243340" y="2468880"/>
-            <a:ext cx="1572768" cy="1371600"/>
+            <a:off x="9235440" y="3520440"/>
+            <a:ext cx="2286000" cy="1280160"/>
           </a:xfrm>
           <a:prstGeom prst="roundRect">
             <a:avLst>
-              <a:gd name="adj" fmla="val 6667"/>
+              <a:gd name="adj" fmla="val 7143"/>
             </a:avLst>
           </a:prstGeom>
           <a:solidFill>
@@ -2046,14 +2024,14 @@
       </p:sp>
       <p:sp>
         <p:nvSpPr>
-          <p:cNvPr id="19" name="Shape 17"/>
-          <p:cNvSpPr/>
-          <p:nvPr/>
-        </p:nvSpPr>
-        <p:spPr>
-          <a:xfrm>
-            <a:off x="6929140" y="2670048"/>
-            <a:ext cx="201168" cy="201168"/>
+          <p:cNvPr id="18" name="Shape 16"/>
+          <p:cNvSpPr/>
+          <p:nvPr/>
+        </p:nvSpPr>
+        <p:spPr>
+          <a:xfrm>
+            <a:off x="10287000" y="3685032"/>
+            <a:ext cx="182880" cy="182880"/>
           </a:xfrm>
           <a:prstGeom prst="ellipse">
             <a:avLst/>
@@ -2066,14 +2044,14 @@
       </p:sp>
       <p:sp>
         <p:nvSpPr>
-          <p:cNvPr id="20" name="Text 18"/>
-          <p:cNvSpPr/>
-          <p:nvPr/>
-        </p:nvSpPr>
-        <p:spPr>
-          <a:xfrm>
-            <a:off x="6197620" y="2926080"/>
-            <a:ext cx="1664208" cy="411480"/>
+          <p:cNvPr id="19" name="Text 17"/>
+          <p:cNvSpPr/>
+          <p:nvPr/>
+        </p:nvSpPr>
+        <p:spPr>
+          <a:xfrm>
+            <a:off x="9208008" y="3904488"/>
+            <a:ext cx="2340864" cy="365760"/>
           </a:xfrm>
           <a:prstGeom prst="rect">
             <a:avLst/>
@@ -2105,14 +2083,14 @@
       </p:sp>
       <p:sp>
         <p:nvSpPr>
-          <p:cNvPr id="21" name="Text 19"/>
-          <p:cNvSpPr/>
-          <p:nvPr/>
-        </p:nvSpPr>
-        <p:spPr>
-          <a:xfrm>
-            <a:off x="6225052" y="3310128"/>
-            <a:ext cx="1609344" cy="457200"/>
+          <p:cNvPr id="20" name="Text 18"/>
+          <p:cNvSpPr/>
+          <p:nvPr/>
+        </p:nvSpPr>
+        <p:spPr>
+          <a:xfrm>
+            <a:off x="9235440" y="4251960"/>
+            <a:ext cx="2286000" cy="411480"/>
           </a:xfrm>
           <a:prstGeom prst="rect">
             <a:avLst/>
@@ -2144,14 +2122,14 @@
       </p:sp>
       <p:sp>
         <p:nvSpPr>
-          <p:cNvPr id="22" name="Shape 20"/>
-          <p:cNvSpPr/>
-          <p:nvPr/>
-        </p:nvSpPr>
-        <p:spPr>
-          <a:xfrm>
-            <a:off x="7834396" y="3154680"/>
-            <a:ext cx="258409" cy="0"/>
+          <p:cNvPr id="21" name="Shape 19"/>
+          <p:cNvSpPr/>
+          <p:nvPr/>
+        </p:nvSpPr>
+        <p:spPr>
+          <a:xfrm>
+            <a:off x="7242048" y="4160520"/>
+            <a:ext cx="1975104" cy="0"/>
           </a:xfrm>
           <a:prstGeom prst="line">
             <a:avLst/>
@@ -2162,24 +2140,25 @@
               <a:srgbClr val="4FAAB6"/>
             </a:solidFill>
             <a:prstDash val="solid"/>
-            <a:tailEnd type="triangle"/>
+            <a:headEnd type="triangle"/>
+            <a:tailEnd type="oval"/>
           </a:ln>
         </p:spPr>
       </p:sp>
       <p:sp>
         <p:nvSpPr>
-          <p:cNvPr id="23" name="Shape 21"/>
-          <p:cNvSpPr/>
-          <p:nvPr/>
-        </p:nvSpPr>
-        <p:spPr>
-          <a:xfrm>
-            <a:off x="8111094" y="2468880"/>
-            <a:ext cx="1572768" cy="1371600"/>
+          <p:cNvPr id="22" name="Shape 20"/>
+          <p:cNvSpPr/>
+          <p:nvPr/>
+        </p:nvSpPr>
+        <p:spPr>
+          <a:xfrm>
+            <a:off x="4937760" y="3520440"/>
+            <a:ext cx="2286000" cy="1280160"/>
           </a:xfrm>
           <a:prstGeom prst="roundRect">
             <a:avLst>
-              <a:gd name="adj" fmla="val 6667"/>
+              <a:gd name="adj" fmla="val 7143"/>
             </a:avLst>
           </a:prstGeom>
           <a:solidFill>
@@ -2195,14 +2174,14 @@
       </p:sp>
       <p:sp>
         <p:nvSpPr>
-          <p:cNvPr id="24" name="Shape 22"/>
-          <p:cNvSpPr/>
-          <p:nvPr/>
-        </p:nvSpPr>
-        <p:spPr>
-          <a:xfrm>
-            <a:off x="8796894" y="2670048"/>
-            <a:ext cx="201168" cy="201168"/>
+          <p:cNvPr id="23" name="Shape 21"/>
+          <p:cNvSpPr/>
+          <p:nvPr/>
+        </p:nvSpPr>
+        <p:spPr>
+          <a:xfrm>
+            <a:off x="5989320" y="3685032"/>
+            <a:ext cx="182880" cy="182880"/>
           </a:xfrm>
           <a:prstGeom prst="ellipse">
             <a:avLst/>
@@ -2215,14 +2194,14 @@
       </p:sp>
       <p:sp>
         <p:nvSpPr>
-          <p:cNvPr id="25" name="Text 23"/>
-          <p:cNvSpPr/>
-          <p:nvPr/>
-        </p:nvSpPr>
-        <p:spPr>
-          <a:xfrm>
-            <a:off x="8065374" y="2926080"/>
-            <a:ext cx="1664208" cy="411480"/>
+          <p:cNvPr id="24" name="Text 22"/>
+          <p:cNvSpPr/>
+          <p:nvPr/>
+        </p:nvSpPr>
+        <p:spPr>
+          <a:xfrm>
+            <a:off x="4910328" y="3904488"/>
+            <a:ext cx="2340864" cy="365760"/>
           </a:xfrm>
           <a:prstGeom prst="rect">
             <a:avLst/>
@@ -2254,14 +2233,14 @@
       </p:sp>
       <p:sp>
         <p:nvSpPr>
-          <p:cNvPr id="26" name="Text 24"/>
-          <p:cNvSpPr/>
-          <p:nvPr/>
-        </p:nvSpPr>
-        <p:spPr>
-          <a:xfrm>
-            <a:off x="8092806" y="3310128"/>
-            <a:ext cx="1609344" cy="457200"/>
+          <p:cNvPr id="25" name="Text 23"/>
+          <p:cNvSpPr/>
+          <p:nvPr/>
+        </p:nvSpPr>
+        <p:spPr>
+          <a:xfrm>
+            <a:off x="4937760" y="4251960"/>
+            <a:ext cx="2286000" cy="411480"/>
           </a:xfrm>
           <a:prstGeom prst="rect">
             <a:avLst/>
@@ -2293,14 +2272,14 @@
       </p:sp>
       <p:sp>
         <p:nvSpPr>
-          <p:cNvPr id="27" name="Shape 25"/>
-          <p:cNvSpPr/>
-          <p:nvPr/>
-        </p:nvSpPr>
-        <p:spPr>
-          <a:xfrm>
-            <a:off x="9702150" y="3154680"/>
-            <a:ext cx="258409" cy="0"/>
+          <p:cNvPr id="26" name="Shape 24"/>
+          <p:cNvSpPr/>
+          <p:nvPr/>
+        </p:nvSpPr>
+        <p:spPr>
+          <a:xfrm>
+            <a:off x="2944368" y="4160520"/>
+            <a:ext cx="1975104" cy="0"/>
           </a:xfrm>
           <a:prstGeom prst="line">
             <a:avLst/>
@@ -2311,24 +2290,25 @@
               <a:srgbClr val="4FAAB6"/>
             </a:solidFill>
             <a:prstDash val="solid"/>
-            <a:tailEnd type="triangle"/>
+            <a:headEnd type="triangle"/>
+            <a:tailEnd type="oval"/>
           </a:ln>
         </p:spPr>
       </p:sp>
       <p:sp>
         <p:nvSpPr>
-          <p:cNvPr id="28" name="Shape 26"/>
-          <p:cNvSpPr/>
-          <p:nvPr/>
-        </p:nvSpPr>
-        <p:spPr>
-          <a:xfrm>
-            <a:off x="9978847" y="2468880"/>
-            <a:ext cx="1572768" cy="1371600"/>
+          <p:cNvPr id="27" name="Shape 25"/>
+          <p:cNvSpPr/>
+          <p:nvPr/>
+        </p:nvSpPr>
+        <p:spPr>
+          <a:xfrm>
+            <a:off x="640080" y="3520440"/>
+            <a:ext cx="2286000" cy="1280160"/>
           </a:xfrm>
           <a:prstGeom prst="roundRect">
             <a:avLst>
-              <a:gd name="adj" fmla="val 6667"/>
+              <a:gd name="adj" fmla="val 7143"/>
             </a:avLst>
           </a:prstGeom>
           <a:solidFill>
@@ -2344,14 +2324,14 @@
       </p:sp>
       <p:sp>
         <p:nvSpPr>
-          <p:cNvPr id="29" name="Shape 27"/>
-          <p:cNvSpPr/>
-          <p:nvPr/>
-        </p:nvSpPr>
-        <p:spPr>
-          <a:xfrm>
-            <a:off x="10664647" y="2670048"/>
-            <a:ext cx="201168" cy="201168"/>
+          <p:cNvPr id="28" name="Shape 26"/>
+          <p:cNvSpPr/>
+          <p:nvPr/>
+        </p:nvSpPr>
+        <p:spPr>
+          <a:xfrm>
+            <a:off x="1691640" y="3685032"/>
+            <a:ext cx="182880" cy="182880"/>
           </a:xfrm>
           <a:prstGeom prst="ellipse">
             <a:avLst/>
@@ -2364,14 +2344,14 @@
       </p:sp>
       <p:sp>
         <p:nvSpPr>
-          <p:cNvPr id="30" name="Text 28"/>
-          <p:cNvSpPr/>
-          <p:nvPr/>
-        </p:nvSpPr>
-        <p:spPr>
-          <a:xfrm>
-            <a:off x="9933127" y="2926080"/>
-            <a:ext cx="1664208" cy="411480"/>
+          <p:cNvPr id="29" name="Text 27"/>
+          <p:cNvSpPr/>
+          <p:nvPr/>
+        </p:nvSpPr>
+        <p:spPr>
+          <a:xfrm>
+            <a:off x="612648" y="3904488"/>
+            <a:ext cx="2340864" cy="365760"/>
           </a:xfrm>
           <a:prstGeom prst="rect">
             <a:avLst/>
@@ -2403,14 +2383,14 @@
       </p:sp>
       <p:sp>
         <p:nvSpPr>
-          <p:cNvPr id="31" name="Text 29"/>
-          <p:cNvSpPr/>
-          <p:nvPr/>
-        </p:nvSpPr>
-        <p:spPr>
-          <a:xfrm>
-            <a:off x="9960559" y="3310128"/>
-            <a:ext cx="1609344" cy="457200"/>
+          <p:cNvPr id="30" name="Text 28"/>
+          <p:cNvSpPr/>
+          <p:nvPr/>
+        </p:nvSpPr>
+        <p:spPr>
+          <a:xfrm>
+            <a:off x="640080" y="4251960"/>
+            <a:ext cx="2286000" cy="411480"/>
           </a:xfrm>
           <a:prstGeom prst="rect">
             <a:avLst/>
@@ -2442,92 +2422,38 @@
       </p:sp>
       <p:sp>
         <p:nvSpPr>
+          <p:cNvPr id="31" name="Shape 29"/>
+          <p:cNvSpPr/>
+          <p:nvPr/>
+        </p:nvSpPr>
+        <p:spPr>
+          <a:xfrm>
+            <a:off x="10378440" y="3154680"/>
+            <a:ext cx="0" cy="365760"/>
+          </a:xfrm>
+          <a:prstGeom prst="line">
+            <a:avLst/>
+          </a:prstGeom>
+          <a:noFill/>
+          <a:ln w="25400">
+            <a:solidFill>
+              <a:srgbClr val="4FAAB6"/>
+            </a:solidFill>
+            <a:prstDash val="solid"/>
+            <a:tailEnd type="triangle"/>
+          </a:ln>
+        </p:spPr>
+      </p:sp>
+      <p:sp>
+        <p:nvSpPr>
           <p:cNvPr id="32" name="Text 30"/>
           <p:cNvSpPr/>
           <p:nvPr/>
         </p:nvSpPr>
         <p:spPr>
           <a:xfrm>
-            <a:off x="640080" y="3977640"/>
-            <a:ext cx="3440521" cy="274320"/>
-          </a:xfrm>
-          <a:prstGeom prst="rect">
-            <a:avLst/>
-          </a:prstGeom>
-          <a:noFill/>
-          <a:ln/>
-        </p:spPr>
-        <p:txBody>
-          <a:bodyPr wrap="square" rtlCol="0" anchor="ctr"/>
-          <a:lstStyle/>
-          <a:p>
-            <a:pPr algn="ctr" indent="0" marL="0">
-              <a:buNone/>
-            </a:pPr>
-            <a:r>
-              <a:rPr lang="en-US" sz="1100" b="1" spc="200" kern="0" dirty="0">
-                <a:solidFill>
-                  <a:srgbClr val="4FAAB6"/>
-                </a:solidFill>
-                <a:latin typeface="Calibri" pitchFamily="34" charset="0"/>
-                <a:ea typeface="Calibri" pitchFamily="34" charset="-122"/>
-                <a:cs typeface="Calibri" pitchFamily="34" charset="-120"/>
-              </a:rPr>
-              <a:t>EDGE</a:t>
-            </a:r>
-            <a:endParaRPr lang="en-US" sz="1100" dirty="0"/>
-          </a:p>
-        </p:txBody>
-      </p:sp>
-      <p:sp>
-        <p:nvSpPr>
-          <p:cNvPr id="33" name="Text 31"/>
-          <p:cNvSpPr/>
-          <p:nvPr/>
-        </p:nvSpPr>
-        <p:spPr>
-          <a:xfrm>
-            <a:off x="4375587" y="3977640"/>
-            <a:ext cx="7176028" cy="274320"/>
-          </a:xfrm>
-          <a:prstGeom prst="rect">
-            <a:avLst/>
-          </a:prstGeom>
-          <a:noFill/>
-          <a:ln/>
-        </p:spPr>
-        <p:txBody>
-          <a:bodyPr wrap="square" rtlCol="0" anchor="ctr"/>
-          <a:lstStyle/>
-          <a:p>
-            <a:pPr algn="ctr" indent="0" marL="0">
-              <a:buNone/>
-            </a:pPr>
-            <a:r>
-              <a:rPr lang="en-US" sz="1100" b="1" spc="200" kern="0" dirty="0">
-                <a:solidFill>
-                  <a:srgbClr val="0F6E7C"/>
-                </a:solidFill>
-                <a:latin typeface="Calibri" pitchFamily="34" charset="0"/>
-                <a:ea typeface="Calibri" pitchFamily="34" charset="-122"/>
-                <a:cs typeface="Calibri" pitchFamily="34" charset="-120"/>
-              </a:rPr>
-              <a:t>CLOUD</a:t>
-            </a:r>
-            <a:endParaRPr lang="en-US" sz="1100" dirty="0"/>
-          </a:p>
-        </p:txBody>
-      </p:sp>
-      <p:sp>
-        <p:nvSpPr>
-          <p:cNvPr id="34" name="Text 32"/>
-          <p:cNvSpPr/>
-          <p:nvPr/>
-        </p:nvSpPr>
-        <p:spPr>
-          <a:xfrm>
-            <a:off x="640080" y="5212080"/>
-            <a:ext cx="10972800" cy="640080"/>
+            <a:off x="640080" y="5257800"/>
+            <a:ext cx="10972800" cy="731520"/>
           </a:xfrm>
           <a:prstGeom prst="rect">
             <a:avLst/>
@@ -2675,8 +2601,35 @@
         </p:nvSpPr>
         <p:spPr>
           <a:xfrm>
-            <a:off x="731520" y="1965960"/>
-            <a:ext cx="685800" cy="685800"/>
+            <a:off x="640080" y="1874520"/>
+            <a:ext cx="3502152" cy="3657600"/>
+          </a:xfrm>
+          <a:prstGeom prst="roundRect">
+            <a:avLst>
+              <a:gd name="adj" fmla="val 2611"/>
+            </a:avLst>
+          </a:prstGeom>
+          <a:solidFill>
+            <a:srgbClr val="EDF6F7"/>
+          </a:solidFill>
+          <a:ln w="15240">
+            <a:solidFill>
+              <a:srgbClr val="1E8FA0"/>
+            </a:solidFill>
+            <a:prstDash val="solid"/>
+          </a:ln>
+        </p:spPr>
+      </p:sp>
+      <p:sp>
+        <p:nvSpPr>
+          <p:cNvPr id="5" name="Shape 3"/>
+          <p:cNvSpPr/>
+          <p:nvPr/>
+        </p:nvSpPr>
+        <p:spPr>
+          <a:xfrm>
+            <a:off x="914400" y="2194560"/>
+            <a:ext cx="640080" cy="640080"/>
           </a:xfrm>
           <a:prstGeom prst="ellipse">
             <a:avLst/>
@@ -2689,14 +2642,14 @@
       </p:sp>
       <p:sp>
         <p:nvSpPr>
-          <p:cNvPr id="5" name="Text 3"/>
-          <p:cNvSpPr/>
-          <p:nvPr/>
-        </p:nvSpPr>
-        <p:spPr>
-          <a:xfrm>
-            <a:off x="731520" y="1965960"/>
-            <a:ext cx="685800" cy="685800"/>
+          <p:cNvPr id="6" name="Text 4"/>
+          <p:cNvSpPr/>
+          <p:nvPr/>
+        </p:nvSpPr>
+        <p:spPr>
+          <a:xfrm>
+            <a:off x="914400" y="2194560"/>
+            <a:ext cx="640080" cy="640080"/>
           </a:xfrm>
           <a:prstGeom prst="rect">
             <a:avLst/>
@@ -2712,7 +2665,7 @@
               <a:buNone/>
             </a:pPr>
             <a:r>
-              <a:rPr lang="en-US" sz="2600" b="1" dirty="0">
+              <a:rPr lang="en-US" sz="2400" b="1" dirty="0">
                 <a:solidFill>
                   <a:srgbClr val="FFFFFF"/>
                 </a:solidFill>
@@ -2722,20 +2675,20 @@
               </a:rPr>
               <a:t>1</a:t>
             </a:r>
-            <a:endParaRPr lang="en-US" sz="2600" dirty="0"/>
-          </a:p>
-        </p:txBody>
-      </p:sp>
-      <p:sp>
-        <p:nvSpPr>
-          <p:cNvPr id="6" name="Text 4"/>
-          <p:cNvSpPr/>
-          <p:nvPr/>
-        </p:nvSpPr>
-        <p:spPr>
-          <a:xfrm>
-            <a:off x="1691640" y="1920240"/>
-            <a:ext cx="9875520" cy="411480"/>
+            <a:endParaRPr lang="en-US" sz="2400" dirty="0"/>
+          </a:p>
+        </p:txBody>
+      </p:sp>
+      <p:sp>
+        <p:nvSpPr>
+          <p:cNvPr id="7" name="Text 5"/>
+          <p:cNvSpPr/>
+          <p:nvPr/>
+        </p:nvSpPr>
+        <p:spPr>
+          <a:xfrm>
+            <a:off x="914400" y="3017520"/>
+            <a:ext cx="2953512" cy="822960"/>
           </a:xfrm>
           <a:prstGeom prst="rect">
             <a:avLst/>
@@ -2751,7 +2704,7 @@
               <a:buNone/>
             </a:pPr>
             <a:r>
-              <a:rPr lang="en-US" sz="1800" b="1" dirty="0">
+              <a:rPr lang="en-US" sz="1700" b="1" dirty="0">
                 <a:solidFill>
                   <a:srgbClr val="0F2E33"/>
                 </a:solidFill>
@@ -2759,22 +2712,22 @@
                 <a:ea typeface="Calibri" pitchFamily="34" charset="-122"/>
                 <a:cs typeface="Calibri" pitchFamily="34" charset="-120"/>
               </a:rPr>
-              <a:t>Pipeline health, all green</a:t>
-            </a:r>
-            <a:endParaRPr lang="en-US" sz="1800" dirty="0"/>
-          </a:p>
-        </p:txBody>
-      </p:sp>
-      <p:sp>
-        <p:nvSpPr>
-          <p:cNvPr id="7" name="Text 5"/>
-          <p:cNvSpPr/>
-          <p:nvPr/>
-        </p:nvSpPr>
-        <p:spPr>
-          <a:xfrm>
-            <a:off x="1691640" y="2340864"/>
-            <a:ext cx="9875520" cy="640080"/>
+              <a:t>A reading-by-plant matrix</a:t>
+            </a:r>
+            <a:endParaRPr lang="en-US" sz="1700" dirty="0"/>
+          </a:p>
+        </p:txBody>
+      </p:sp>
+      <p:sp>
+        <p:nvSpPr>
+          <p:cNvPr id="8" name="Text 6"/>
+          <p:cNvSpPr/>
+          <p:nvPr/>
+        </p:nvSpPr>
+        <p:spPr>
+          <a:xfrm>
+            <a:off x="914400" y="3794760"/>
+            <a:ext cx="2953512" cy="1554480"/>
           </a:xfrm>
           <a:prstGeom prst="rect">
             <a:avLst/>
@@ -2787,10 +2740,13 @@
           <a:lstStyle/>
           <a:p>
             <a:pPr indent="0" marL="0">
+              <a:lnSpc>
+                <a:spcPct val="105000"/>
+              </a:lnSpc>
               <a:buNone/>
             </a:pPr>
             <a:r>
-              <a:rPr lang="en-US" sz="1350" dirty="0">
+              <a:rPr lang="en-US" sz="1300" dirty="0">
                 <a:solidFill>
                   <a:srgbClr val="567478"/>
                 </a:solidFill>
@@ -2798,22 +2754,49 @@
                 <a:ea typeface="Calibri" pitchFamily="34" charset="-122"/>
                 <a:cs typeface="Calibri" pitchFamily="34" charset="-120"/>
               </a:rPr>
-              <a:t>Gateway, queue, Lambda and end-to-end pipeline all healthy on the live deployment.</a:t>
-            </a:r>
-            <a:endParaRPr lang="en-US" sz="1350" dirty="0"/>
-          </a:p>
-        </p:txBody>
-      </p:sp>
-      <p:sp>
-        <p:nvSpPr>
-          <p:cNvPr id="8" name="Shape 6"/>
-          <p:cNvSpPr/>
-          <p:nvPr/>
-        </p:nvSpPr>
-        <p:spPr>
-          <a:xfrm>
-            <a:off x="731520" y="3383280"/>
-            <a:ext cx="685800" cy="685800"/>
+              <a:t>Turbidity, pH, chlorine, flow and pressure for both plants, with compliance strips showing each against its drinking-water limit.</a:t>
+            </a:r>
+            <a:endParaRPr lang="en-US" sz="1300" dirty="0"/>
+          </a:p>
+        </p:txBody>
+      </p:sp>
+      <p:sp>
+        <p:nvSpPr>
+          <p:cNvPr id="9" name="Shape 7"/>
+          <p:cNvSpPr/>
+          <p:nvPr/>
+        </p:nvSpPr>
+        <p:spPr>
+          <a:xfrm>
+            <a:off x="4416552" y="1874520"/>
+            <a:ext cx="3502152" cy="3657600"/>
+          </a:xfrm>
+          <a:prstGeom prst="roundRect">
+            <a:avLst>
+              <a:gd name="adj" fmla="val 2611"/>
+            </a:avLst>
+          </a:prstGeom>
+          <a:solidFill>
+            <a:srgbClr val="EDF6F7"/>
+          </a:solidFill>
+          <a:ln w="15240">
+            <a:solidFill>
+              <a:srgbClr val="1E8FA0"/>
+            </a:solidFill>
+            <a:prstDash val="solid"/>
+          </a:ln>
+        </p:spPr>
+      </p:sp>
+      <p:sp>
+        <p:nvSpPr>
+          <p:cNvPr id="10" name="Shape 8"/>
+          <p:cNvSpPr/>
+          <p:nvPr/>
+        </p:nvSpPr>
+        <p:spPr>
+          <a:xfrm>
+            <a:off x="4690872" y="2194560"/>
+            <a:ext cx="640080" cy="640080"/>
           </a:xfrm>
           <a:prstGeom prst="ellipse">
             <a:avLst/>
@@ -2826,14 +2809,14 @@
       </p:sp>
       <p:sp>
         <p:nvSpPr>
-          <p:cNvPr id="9" name="Text 7"/>
-          <p:cNvSpPr/>
-          <p:nvPr/>
-        </p:nvSpPr>
-        <p:spPr>
-          <a:xfrm>
-            <a:off x="731520" y="3383280"/>
-            <a:ext cx="685800" cy="685800"/>
+          <p:cNvPr id="11" name="Text 9"/>
+          <p:cNvSpPr/>
+          <p:nvPr/>
+        </p:nvSpPr>
+        <p:spPr>
+          <a:xfrm>
+            <a:off x="4690872" y="2194560"/>
+            <a:ext cx="640080" cy="640080"/>
           </a:xfrm>
           <a:prstGeom prst="rect">
             <a:avLst/>
@@ -2849,7 +2832,7 @@
               <a:buNone/>
             </a:pPr>
             <a:r>
-              <a:rPr lang="en-US" sz="2600" b="1" dirty="0">
+              <a:rPr lang="en-US" sz="2400" b="1" dirty="0">
                 <a:solidFill>
                   <a:srgbClr val="FFFFFF"/>
                 </a:solidFill>
@@ -2859,20 +2842,20 @@
               </a:rPr>
               <a:t>2</a:t>
             </a:r>
-            <a:endParaRPr lang="en-US" sz="2600" dirty="0"/>
-          </a:p>
-        </p:txBody>
-      </p:sp>
-      <p:sp>
-        <p:nvSpPr>
-          <p:cNvPr id="10" name="Text 8"/>
-          <p:cNvSpPr/>
-          <p:nvPr/>
-        </p:nvSpPr>
-        <p:spPr>
-          <a:xfrm>
-            <a:off x="1691640" y="3337560"/>
-            <a:ext cx="9875520" cy="411480"/>
+            <a:endParaRPr lang="en-US" sz="2400" dirty="0"/>
+          </a:p>
+        </p:txBody>
+      </p:sp>
+      <p:sp>
+        <p:nvSpPr>
+          <p:cNvPr id="12" name="Text 10"/>
+          <p:cNvSpPr/>
+          <p:nvPr/>
+        </p:nvSpPr>
+        <p:spPr>
+          <a:xfrm>
+            <a:off x="4690872" y="3017520"/>
+            <a:ext cx="2953512" cy="822960"/>
           </a:xfrm>
           <a:prstGeom prst="rect">
             <a:avLst/>
@@ -2888,7 +2871,7 @@
               <a:buNone/>
             </a:pPr>
             <a:r>
-              <a:rPr lang="en-US" sz="1800" b="1" dirty="0">
+              <a:rPr lang="en-US" sz="1700" b="1" dirty="0">
                 <a:solidFill>
                   <a:srgbClr val="0F2E33"/>
                 </a:solidFill>
@@ -2896,22 +2879,22 @@
                 <a:ea typeface="Calibri" pitchFamily="34" charset="-122"/>
                 <a:cs typeface="Calibri" pitchFamily="34" charset="-120"/>
               </a:rPr>
-              <a:t>Live compliance board</a:t>
-            </a:r>
-            <a:endParaRPr lang="en-US" sz="1800" dirty="0"/>
-          </a:p>
-        </p:txBody>
-      </p:sp>
-      <p:sp>
-        <p:nvSpPr>
-          <p:cNvPr id="11" name="Text 9"/>
-          <p:cNvSpPr/>
-          <p:nvPr/>
-        </p:nvSpPr>
-        <p:spPr>
-          <a:xfrm>
-            <a:off x="1691640" y="3758184"/>
-            <a:ext cx="9875520" cy="640080"/>
+              <a:t>A brief pressure dip cannot hide</a:t>
+            </a:r>
+            <a:endParaRPr lang="en-US" sz="1700" dirty="0"/>
+          </a:p>
+        </p:txBody>
+      </p:sp>
+      <p:sp>
+        <p:nvSpPr>
+          <p:cNvPr id="13" name="Text 11"/>
+          <p:cNvSpPr/>
+          <p:nvPr/>
+        </p:nvSpPr>
+        <p:spPr>
+          <a:xfrm>
+            <a:off x="4690872" y="3794760"/>
+            <a:ext cx="2953512" cy="1554480"/>
           </a:xfrm>
           <a:prstGeom prst="rect">
             <a:avLst/>
@@ -2924,10 +2907,13 @@
           <a:lstStyle/>
           <a:p>
             <a:pPr indent="0" marL="0">
+              <a:lnSpc>
+                <a:spcPct val="105000"/>
+              </a:lnSpc>
               <a:buNone/>
             </a:pPr>
             <a:r>
-              <a:rPr lang="en-US" sz="1350" dirty="0">
+              <a:rPr lang="en-US" sz="1300" dirty="0">
                 <a:solidFill>
                   <a:srgbClr val="567478"/>
                 </a:solidFill>
@@ -2935,22 +2921,49 @@
                 <a:ea typeface="Calibri" pitchFamily="34" charset="-122"/>
                 <a:cs typeface="Calibri" pitchFamily="34" charset="-120"/>
               </a:rPr>
-              <a:t>A reading-by-plant matrix, compliance strips and cross-plant trends across two plants.</a:t>
-            </a:r>
-            <a:endParaRPr lang="en-US" sz="1350" dirty="0"/>
-          </a:p>
-        </p:txBody>
-      </p:sp>
-      <p:sp>
-        <p:nvSpPr>
-          <p:cNvPr id="12" name="Shape 10"/>
-          <p:cNvSpPr/>
-          <p:nvPr/>
-        </p:nvSpPr>
-        <p:spPr>
-          <a:xfrm>
-            <a:off x="731520" y="4800600"/>
-            <a:ext cx="685800" cy="685800"/>
+              <a:t>The low-pressure rule reads the window minimum, not the average, so a momentary drop below 2 bar is flagged even when the mean looks healthy.</a:t>
+            </a:r>
+            <a:endParaRPr lang="en-US" sz="1300" dirty="0"/>
+          </a:p>
+        </p:txBody>
+      </p:sp>
+      <p:sp>
+        <p:nvSpPr>
+          <p:cNvPr id="14" name="Shape 12"/>
+          <p:cNvSpPr/>
+          <p:nvPr/>
+        </p:nvSpPr>
+        <p:spPr>
+          <a:xfrm>
+            <a:off x="8193024" y="1874520"/>
+            <a:ext cx="3502152" cy="3657600"/>
+          </a:xfrm>
+          <a:prstGeom prst="roundRect">
+            <a:avLst>
+              <a:gd name="adj" fmla="val 2611"/>
+            </a:avLst>
+          </a:prstGeom>
+          <a:solidFill>
+            <a:srgbClr val="EDF6F7"/>
+          </a:solidFill>
+          <a:ln w="15240">
+            <a:solidFill>
+              <a:srgbClr val="1E8FA0"/>
+            </a:solidFill>
+            <a:prstDash val="solid"/>
+          </a:ln>
+        </p:spPr>
+      </p:sp>
+      <p:sp>
+        <p:nvSpPr>
+          <p:cNvPr id="15" name="Shape 13"/>
+          <p:cNvSpPr/>
+          <p:nvPr/>
+        </p:nvSpPr>
+        <p:spPr>
+          <a:xfrm>
+            <a:off x="8467344" y="2194560"/>
+            <a:ext cx="640080" cy="640080"/>
           </a:xfrm>
           <a:prstGeom prst="ellipse">
             <a:avLst/>
@@ -2963,14 +2976,14 @@
       </p:sp>
       <p:sp>
         <p:nvSpPr>
-          <p:cNvPr id="13" name="Text 11"/>
-          <p:cNvSpPr/>
-          <p:nvPr/>
-        </p:nvSpPr>
-        <p:spPr>
-          <a:xfrm>
-            <a:off x="731520" y="4800600"/>
-            <a:ext cx="685800" cy="685800"/>
+          <p:cNvPr id="16" name="Text 14"/>
+          <p:cNvSpPr/>
+          <p:nvPr/>
+        </p:nvSpPr>
+        <p:spPr>
+          <a:xfrm>
+            <a:off x="8467344" y="2194560"/>
+            <a:ext cx="640080" cy="640080"/>
           </a:xfrm>
           <a:prstGeom prst="rect">
             <a:avLst/>
@@ -2986,7 +2999,7 @@
               <a:buNone/>
             </a:pPr>
             <a:r>
-              <a:rPr lang="en-US" sz="2600" b="1" dirty="0">
+              <a:rPr lang="en-US" sz="2400" b="1" dirty="0">
                 <a:solidFill>
                   <a:srgbClr val="FFFFFF"/>
                 </a:solidFill>
@@ -2996,20 +3009,20 @@
               </a:rPr>
               <a:t>3</a:t>
             </a:r>
-            <a:endParaRPr lang="en-US" sz="2600" dirty="0"/>
-          </a:p>
-        </p:txBody>
-      </p:sp>
-      <p:sp>
-        <p:nvSpPr>
-          <p:cNvPr id="14" name="Text 12"/>
-          <p:cNvSpPr/>
-          <p:nvPr/>
-        </p:nvSpPr>
-        <p:spPr>
-          <a:xfrm>
-            <a:off x="1691640" y="4754880"/>
-            <a:ext cx="9875520" cy="411480"/>
+            <a:endParaRPr lang="en-US" sz="2400" dirty="0"/>
+          </a:p>
+        </p:txBody>
+      </p:sp>
+      <p:sp>
+        <p:nvSpPr>
+          <p:cNvPr id="17" name="Text 15"/>
+          <p:cNvSpPr/>
+          <p:nvPr/>
+        </p:nvSpPr>
+        <p:spPr>
+          <a:xfrm>
+            <a:off x="8467344" y="3017520"/>
+            <a:ext cx="2953512" cy="822960"/>
           </a:xfrm>
           <a:prstGeom prst="rect">
             <a:avLst/>
@@ -3025,7 +3038,7 @@
               <a:buNone/>
             </a:pPr>
             <a:r>
-              <a:rPr lang="en-US" sz="1800" b="1" dirty="0">
+              <a:rPr lang="en-US" sz="1700" b="1" dirty="0">
                 <a:solidFill>
                   <a:srgbClr val="0F2E33"/>
                 </a:solidFill>
@@ -3033,22 +3046,22 @@
                 <a:ea typeface="Calibri" pitchFamily="34" charset="-122"/>
                 <a:cs typeface="Calibri" pitchFamily="34" charset="-120"/>
               </a:rPr>
-              <a:t>Tested and scales</a:t>
-            </a:r>
-            <a:endParaRPr lang="en-US" sz="1800" dirty="0"/>
-          </a:p>
-        </p:txBody>
-      </p:sp>
-      <p:sp>
-        <p:nvSpPr>
-          <p:cNvPr id="15" name="Text 13"/>
-          <p:cNvSpPr/>
-          <p:nvPr/>
-        </p:nvSpPr>
-        <p:spPr>
-          <a:xfrm>
-            <a:off x="1691640" y="5175504"/>
-            <a:ext cx="9875520" cy="640080"/>
+              <a:t>Cross-plant trends, live</a:t>
+            </a:r>
+            <a:endParaRPr lang="en-US" sz="1700" dirty="0"/>
+          </a:p>
+        </p:txBody>
+      </p:sp>
+      <p:sp>
+        <p:nvSpPr>
+          <p:cNvPr id="18" name="Text 16"/>
+          <p:cNvSpPr/>
+          <p:nvPr/>
+        </p:nvSpPr>
+        <p:spPr>
+          <a:xfrm>
+            <a:off x="8467344" y="3794760"/>
+            <a:ext cx="2953512" cy="1554480"/>
           </a:xfrm>
           <a:prstGeom prst="rect">
             <a:avLst/>
@@ -3061,10 +3074,13 @@
           <a:lstStyle/>
           <a:p>
             <a:pPr indent="0" marL="0">
+              <a:lnSpc>
+                <a:spcPct val="105000"/>
+              </a:lnSpc>
               <a:buNone/>
             </a:pPr>
             <a:r>
-              <a:rPr lang="en-US" sz="1350" dirty="0">
+              <a:rPr lang="en-US" sz="1300" dirty="0">
                 <a:solidFill>
                   <a:srgbClr val="567478"/>
                 </a:solidFill>
@@ -3072,15 +3088,15 @@
                 <a:ea typeface="Calibri" pitchFamily="34" charset="-122"/>
                 <a:cs typeface="Calibri" pitchFamily="34" charset="-120"/>
               </a:rPr>
-              <a:t>115 automated tests pass across sensors, fog, processor and dashboard; a 2,000-message burst absorbed and drained.</a:t>
-            </a:r>
-            <a:endParaRPr lang="en-US" sz="1350" dirty="0"/>
-          </a:p>
-        </p:txBody>
-      </p:sp>
-      <p:sp>
-        <p:nvSpPr>
-          <p:cNvPr id="16" name="Text 14"/>
+              <a:t>The trend charts run both plants side by side, so an under-chlorination drift is visible as it develops.</a:t>
+            </a:r>
+            <a:endParaRPr lang="en-US" sz="1300" dirty="0"/>
+          </a:p>
+        </p:txBody>
+      </p:sp>
+      <p:sp>
+        <p:nvSpPr>
+          <p:cNvPr id="19" name="Text 17"/>
           <p:cNvSpPr/>
           <p:nvPr/>
         </p:nvSpPr>
@@ -3157,24 +3173,24 @@
         </p:nvSpPr>
         <p:spPr>
           <a:xfrm>
-            <a:off x="640080" y="640080"/>
-            <a:ext cx="10972800" cy="640080"/>
-          </a:xfrm>
-          <a:prstGeom prst="rect">
-            <a:avLst/>
-          </a:prstGeom>
-          <a:noFill/>
-          <a:ln/>
-        </p:spPr>
-        <p:txBody>
-          <a:bodyPr wrap="square" rtlCol="0" anchor="ctr"/>
+            <a:off x="640080" y="594360"/>
+            <a:ext cx="10972800" cy="822960"/>
+          </a:xfrm>
+          <a:prstGeom prst="rect">
+            <a:avLst/>
+          </a:prstGeom>
+          <a:noFill/>
+          <a:ln/>
+        </p:spPr>
+        <p:txBody>
+          <a:bodyPr wrap="square" rtlCol="0" anchor="t"/>
           <a:lstStyle/>
           <a:p>
             <a:pPr indent="0" marL="0">
               <a:buNone/>
             </a:pPr>
             <a:r>
-              <a:rPr lang="en-US" sz="3000" b="1" dirty="0">
+              <a:rPr lang="en-US" sz="2800" b="1" dirty="0">
                 <a:solidFill>
                   <a:srgbClr val="FFFFFF"/>
                 </a:solidFill>
@@ -3184,7 +3200,7 @@
               </a:rPr>
               <a:t>Hardest Part — proving the queue drains under a burst</a:t>
             </a:r>
-            <a:endParaRPr lang="en-US" sz="3000" dirty="0"/>
+            <a:endParaRPr lang="en-US" sz="2800" dirty="0"/>
           </a:p>
         </p:txBody>
       </p:sp>

--- a/ppt/RakeshKunchala_X25176862_water-treatment-utility.pptx
+++ b/ppt/RakeshKunchala_X25176862_water-treatment-utility.pptx
@@ -3147,7 +3147,7 @@
     <p:bg>
       <p:bgPr>
         <a:solidFill>
-          <a:srgbClr val="0E2E34"/>
+          <a:srgbClr val="FFFFFF"/>
         </a:solidFill>
       </p:bgPr>
     </p:bg>
@@ -3173,7 +3173,7 @@
         </p:nvSpPr>
         <p:spPr>
           <a:xfrm>
-            <a:off x="640080" y="594360"/>
+            <a:off x="640080" y="502920"/>
             <a:ext cx="10972800" cy="822960"/>
           </a:xfrm>
           <a:prstGeom prst="rect">
@@ -3192,7 +3192,7 @@
             <a:r>
               <a:rPr lang="en-US" sz="2800" b="1" dirty="0">
                 <a:solidFill>
-                  <a:srgbClr val="FFFFFF"/>
+                  <a:srgbClr val="0F2E33"/>
                 </a:solidFill>
                 <a:latin typeface="Century Schoolbook" pitchFamily="34" charset="0"/>
                 <a:ea typeface="Century Schoolbook" pitchFamily="34" charset="-122"/>
@@ -3221,9 +3221,9 @@
             </a:avLst>
           </a:prstGeom>
           <a:solidFill>
-            <a:srgbClr val="173F45"/>
-          </a:solidFill>
-          <a:ln w="15875">
+            <a:srgbClr val="EDF6F7"/>
+          </a:solidFill>
+          <a:ln w="19050">
             <a:solidFill>
               <a:srgbClr val="E4A63C"/>
             </a:solidFill>
@@ -3300,7 +3300,7 @@
             <a:r>
               <a:rPr lang="en-US" sz="1300" dirty="0">
                 <a:solidFill>
-                  <a:srgbClr val="CEE7EB"/>
+                  <a:srgbClr val="0F2E33"/>
                 </a:solidFill>
                 <a:latin typeface="Calibri" pitchFamily="34" charset="0"/>
                 <a:ea typeface="Calibri" pitchFamily="34" charset="-122"/>
@@ -3329,11 +3329,11 @@
             </a:avLst>
           </a:prstGeom>
           <a:solidFill>
-            <a:srgbClr val="173F45"/>
-          </a:solidFill>
-          <a:ln w="15875">
+            <a:srgbClr val="EDF6F7"/>
+          </a:solidFill>
+          <a:ln w="19050">
             <a:solidFill>
-              <a:srgbClr val="4FAAB6"/>
+              <a:srgbClr val="1E8FA0"/>
             </a:solidFill>
             <a:prstDash val="solid"/>
           </a:ln>
@@ -3366,7 +3366,7 @@
             <a:r>
               <a:rPr lang="en-US" sz="1900" b="1" dirty="0">
                 <a:solidFill>
-                  <a:srgbClr val="4FAAB6"/>
+                  <a:srgbClr val="1E8FA0"/>
                 </a:solidFill>
                 <a:latin typeface="Century Schoolbook" pitchFamily="34" charset="0"/>
                 <a:ea typeface="Century Schoolbook" pitchFamily="34" charset="-122"/>
@@ -3408,7 +3408,7 @@
             <a:r>
               <a:rPr lang="en-US" sz="1300" dirty="0">
                 <a:solidFill>
-                  <a:srgbClr val="CEE7EB"/>
+                  <a:srgbClr val="0F2E33"/>
                 </a:solidFill>
                 <a:latin typeface="Calibri" pitchFamily="34" charset="0"/>
                 <a:ea typeface="Calibri" pitchFamily="34" charset="-122"/>

--- a/ppt/RakeshKunchala_X25176862_water-treatment-utility.pptx
+++ b/ppt/RakeshKunchala_X25176862_water-treatment-utility.pptx
@@ -1578,12 +1578,12 @@
         </p:nvSpPr>
         <p:spPr>
           <a:xfrm>
-            <a:off x="640080" y="1874520"/>
-            <a:ext cx="2286000" cy="1280160"/>
+            <a:off x="640080" y="2468880"/>
+            <a:ext cx="1572768" cy="1371600"/>
           </a:xfrm>
           <a:prstGeom prst="roundRect">
             <a:avLst>
-              <a:gd name="adj" fmla="val 7143"/>
+              <a:gd name="adj" fmla="val 6667"/>
             </a:avLst>
           </a:prstGeom>
           <a:solidFill>
@@ -1605,7 +1605,7 @@
         </p:nvSpPr>
         <p:spPr>
           <a:xfrm>
-            <a:off x="1691640" y="2039112"/>
+            <a:off x="1335024" y="2633472"/>
             <a:ext cx="182880" cy="182880"/>
           </a:xfrm>
           <a:prstGeom prst="ellipse">
@@ -1625,8 +1625,8 @@
         </p:nvSpPr>
         <p:spPr>
           <a:xfrm>
-            <a:off x="612648" y="2258568"/>
-            <a:ext cx="2340864" cy="365760"/>
+            <a:off x="612648" y="2852928"/>
+            <a:ext cx="1627632" cy="365760"/>
           </a:xfrm>
           <a:prstGeom prst="rect">
             <a:avLst/>
@@ -1664,8 +1664,8 @@
         </p:nvSpPr>
         <p:spPr>
           <a:xfrm>
-            <a:off x="640080" y="2606040"/>
-            <a:ext cx="2286000" cy="411480"/>
+            <a:off x="640080" y="3200400"/>
+            <a:ext cx="1572768" cy="411480"/>
           </a:xfrm>
           <a:prstGeom prst="rect">
             <a:avLst/>
@@ -1703,733 +1703,8 @@
         </p:nvSpPr>
         <p:spPr>
           <a:xfrm>
-            <a:off x="2944368" y="2514600"/>
-            <a:ext cx="1975104" cy="0"/>
-          </a:xfrm>
-          <a:prstGeom prst="line">
-            <a:avLst/>
-          </a:prstGeom>
-          <a:noFill/>
-          <a:ln w="25400">
-            <a:solidFill>
-              <a:srgbClr val="4FAAB6"/>
-            </a:solidFill>
-            <a:prstDash val="solid"/>
-            <a:headEnd type="none"/>
-            <a:tailEnd type="triangle"/>
-          </a:ln>
-        </p:spPr>
-      </p:sp>
-      <p:sp>
-        <p:nvSpPr>
-          <p:cNvPr id="8" name="Shape 6"/>
-          <p:cNvSpPr/>
-          <p:nvPr/>
-        </p:nvSpPr>
-        <p:spPr>
-          <a:xfrm>
-            <a:off x="4937760" y="1874520"/>
-            <a:ext cx="2286000" cy="1280160"/>
-          </a:xfrm>
-          <a:prstGeom prst="roundRect">
-            <a:avLst>
-              <a:gd name="adj" fmla="val 7143"/>
-            </a:avLst>
-          </a:prstGeom>
-          <a:solidFill>
-            <a:srgbClr val="EDF6F7"/>
-          </a:solidFill>
-          <a:ln w="19050">
-            <a:solidFill>
-              <a:srgbClr val="4FAAB6"/>
-            </a:solidFill>
-            <a:prstDash val="solid"/>
-          </a:ln>
-        </p:spPr>
-      </p:sp>
-      <p:sp>
-        <p:nvSpPr>
-          <p:cNvPr id="9" name="Shape 7"/>
-          <p:cNvSpPr/>
-          <p:nvPr/>
-        </p:nvSpPr>
-        <p:spPr>
-          <a:xfrm>
-            <a:off x="5989320" y="2039112"/>
-            <a:ext cx="182880" cy="182880"/>
-          </a:xfrm>
-          <a:prstGeom prst="ellipse">
-            <a:avLst/>
-          </a:prstGeom>
-          <a:solidFill>
-            <a:srgbClr val="4FAAB6"/>
-          </a:solidFill>
-          <a:ln/>
-        </p:spPr>
-      </p:sp>
-      <p:sp>
-        <p:nvSpPr>
-          <p:cNvPr id="10" name="Text 8"/>
-          <p:cNvSpPr/>
-          <p:nvPr/>
-        </p:nvSpPr>
-        <p:spPr>
-          <a:xfrm>
-            <a:off x="4910328" y="2258568"/>
-            <a:ext cx="2340864" cy="365760"/>
-          </a:xfrm>
-          <a:prstGeom prst="rect">
-            <a:avLst/>
-          </a:prstGeom>
-          <a:noFill/>
-          <a:ln/>
-        </p:spPr>
-        <p:txBody>
-          <a:bodyPr wrap="square" lIns="0" tIns="0" rIns="0" bIns="0" rtlCol="0" anchor="ctr"/>
-          <a:lstStyle/>
-          <a:p>
-            <a:pPr algn="ctr" indent="0" marL="0">
-              <a:buNone/>
-            </a:pPr>
-            <a:r>
-              <a:rPr lang="en-US" sz="1450" b="1" dirty="0">
-                <a:solidFill>
-                  <a:srgbClr val="0F2E33"/>
-                </a:solidFill>
-                <a:latin typeface="Calibri" pitchFamily="34" charset="0"/>
-                <a:ea typeface="Calibri" pitchFamily="34" charset="-122"/>
-                <a:cs typeface="Calibri" pitchFamily="34" charset="-120"/>
-              </a:rPr>
-              <a:t>Fog node</a:t>
-            </a:r>
-            <a:endParaRPr lang="en-US" sz="1450" dirty="0"/>
-          </a:p>
-        </p:txBody>
-      </p:sp>
-      <p:sp>
-        <p:nvSpPr>
-          <p:cNvPr id="11" name="Text 9"/>
-          <p:cNvSpPr/>
-          <p:nvPr/>
-        </p:nvSpPr>
-        <p:spPr>
-          <a:xfrm>
-            <a:off x="4937760" y="2606040"/>
-            <a:ext cx="2286000" cy="411480"/>
-          </a:xfrm>
-          <a:prstGeom prst="rect">
-            <a:avLst/>
-          </a:prstGeom>
-          <a:noFill/>
-          <a:ln/>
-        </p:spPr>
-        <p:txBody>
-          <a:bodyPr wrap="square" lIns="0" tIns="0" rIns="0" bIns="0" rtlCol="0" anchor="t"/>
-          <a:lstStyle/>
-          <a:p>
-            <a:pPr algn="ctr" indent="0" marL="0">
-              <a:buNone/>
-            </a:pPr>
-            <a:r>
-              <a:rPr lang="en-US" sz="1050" dirty="0">
-                <a:solidFill>
-                  <a:srgbClr val="567478"/>
-                </a:solidFill>
-                <a:latin typeface="Calibri" pitchFamily="34" charset="0"/>
-                <a:ea typeface="Calibri" pitchFamily="34" charset="-122"/>
-                <a:cs typeface="Calibri" pitchFamily="34" charset="-120"/>
-              </a:rPr>
-              <a:t>10 s windows · gates</a:t>
-            </a:r>
-            <a:endParaRPr lang="en-US" sz="1050" dirty="0"/>
-          </a:p>
-        </p:txBody>
-      </p:sp>
-      <p:sp>
-        <p:nvSpPr>
-          <p:cNvPr id="12" name="Shape 10"/>
-          <p:cNvSpPr/>
-          <p:nvPr/>
-        </p:nvSpPr>
-        <p:spPr>
-          <a:xfrm>
-            <a:off x="7242048" y="2514600"/>
-            <a:ext cx="1975104" cy="0"/>
-          </a:xfrm>
-          <a:prstGeom prst="line">
-            <a:avLst/>
-          </a:prstGeom>
-          <a:noFill/>
-          <a:ln w="25400">
-            <a:solidFill>
-              <a:srgbClr val="4FAAB6"/>
-            </a:solidFill>
-            <a:prstDash val="solid"/>
-            <a:headEnd type="none"/>
-            <a:tailEnd type="triangle"/>
-          </a:ln>
-        </p:spPr>
-      </p:sp>
-      <p:sp>
-        <p:nvSpPr>
-          <p:cNvPr id="13" name="Shape 11"/>
-          <p:cNvSpPr/>
-          <p:nvPr/>
-        </p:nvSpPr>
-        <p:spPr>
-          <a:xfrm>
-            <a:off x="9235440" y="1874520"/>
-            <a:ext cx="2286000" cy="1280160"/>
-          </a:xfrm>
-          <a:prstGeom prst="roundRect">
-            <a:avLst>
-              <a:gd name="adj" fmla="val 7143"/>
-            </a:avLst>
-          </a:prstGeom>
-          <a:solidFill>
-            <a:srgbClr val="EDF6F7"/>
-          </a:solidFill>
-          <a:ln w="19050">
-            <a:solidFill>
-              <a:srgbClr val="0F6E7C"/>
-            </a:solidFill>
-            <a:prstDash val="solid"/>
-          </a:ln>
-        </p:spPr>
-      </p:sp>
-      <p:sp>
-        <p:nvSpPr>
-          <p:cNvPr id="14" name="Shape 12"/>
-          <p:cNvSpPr/>
-          <p:nvPr/>
-        </p:nvSpPr>
-        <p:spPr>
-          <a:xfrm>
-            <a:off x="10287000" y="2039112"/>
-            <a:ext cx="182880" cy="182880"/>
-          </a:xfrm>
-          <a:prstGeom prst="ellipse">
-            <a:avLst/>
-          </a:prstGeom>
-          <a:solidFill>
-            <a:srgbClr val="0F6E7C"/>
-          </a:solidFill>
-          <a:ln/>
-        </p:spPr>
-      </p:sp>
-      <p:sp>
-        <p:nvSpPr>
-          <p:cNvPr id="15" name="Text 13"/>
-          <p:cNvSpPr/>
-          <p:nvPr/>
-        </p:nvSpPr>
-        <p:spPr>
-          <a:xfrm>
-            <a:off x="9208008" y="2258568"/>
-            <a:ext cx="2340864" cy="365760"/>
-          </a:xfrm>
-          <a:prstGeom prst="rect">
-            <a:avLst/>
-          </a:prstGeom>
-          <a:noFill/>
-          <a:ln/>
-        </p:spPr>
-        <p:txBody>
-          <a:bodyPr wrap="square" lIns="0" tIns="0" rIns="0" bIns="0" rtlCol="0" anchor="ctr"/>
-          <a:lstStyle/>
-          <a:p>
-            <a:pPr algn="ctr" indent="0" marL="0">
-              <a:buNone/>
-            </a:pPr>
-            <a:r>
-              <a:rPr lang="en-US" sz="1450" b="1" dirty="0">
-                <a:solidFill>
-                  <a:srgbClr val="0F2E33"/>
-                </a:solidFill>
-                <a:latin typeface="Calibri" pitchFamily="34" charset="0"/>
-                <a:ea typeface="Calibri" pitchFamily="34" charset="-122"/>
-                <a:cs typeface="Calibri" pitchFamily="34" charset="-120"/>
-              </a:rPr>
-              <a:t>Amazon SQS</a:t>
-            </a:r>
-            <a:endParaRPr lang="en-US" sz="1450" dirty="0"/>
-          </a:p>
-        </p:txBody>
-      </p:sp>
-      <p:sp>
-        <p:nvSpPr>
-          <p:cNvPr id="16" name="Text 14"/>
-          <p:cNvSpPr/>
-          <p:nvPr/>
-        </p:nvSpPr>
-        <p:spPr>
-          <a:xfrm>
-            <a:off x="9235440" y="2606040"/>
-            <a:ext cx="2286000" cy="411480"/>
-          </a:xfrm>
-          <a:prstGeom prst="rect">
-            <a:avLst/>
-          </a:prstGeom>
-          <a:noFill/>
-          <a:ln/>
-        </p:spPr>
-        <p:txBody>
-          <a:bodyPr wrap="square" lIns="0" tIns="0" rIns="0" bIns="0" rtlCol="0" anchor="t"/>
-          <a:lstStyle/>
-          <a:p>
-            <a:pPr algn="ctr" indent="0" marL="0">
-              <a:buNone/>
-            </a:pPr>
-            <a:r>
-              <a:rPr lang="en-US" sz="1050" dirty="0">
-                <a:solidFill>
-                  <a:srgbClr val="567478"/>
-                </a:solidFill>
-                <a:latin typeface="Calibri" pitchFamily="34" charset="0"/>
-                <a:ea typeface="Calibri" pitchFamily="34" charset="-122"/>
-                <a:cs typeface="Calibri" pitchFamily="34" charset="-120"/>
-              </a:rPr>
-              <a:t>1 summary / window</a:t>
-            </a:r>
-            <a:endParaRPr lang="en-US" sz="1050" dirty="0"/>
-          </a:p>
-        </p:txBody>
-      </p:sp>
-      <p:sp>
-        <p:nvSpPr>
-          <p:cNvPr id="17" name="Shape 15"/>
-          <p:cNvSpPr/>
-          <p:nvPr/>
-        </p:nvSpPr>
-        <p:spPr>
-          <a:xfrm>
-            <a:off x="9235440" y="3520440"/>
-            <a:ext cx="2286000" cy="1280160"/>
-          </a:xfrm>
-          <a:prstGeom prst="roundRect">
-            <a:avLst>
-              <a:gd name="adj" fmla="val 7143"/>
-            </a:avLst>
-          </a:prstGeom>
-          <a:solidFill>
-            <a:srgbClr val="EDF6F7"/>
-          </a:solidFill>
-          <a:ln w="19050">
-            <a:solidFill>
-              <a:srgbClr val="0F6E7C"/>
-            </a:solidFill>
-            <a:prstDash val="solid"/>
-          </a:ln>
-        </p:spPr>
-      </p:sp>
-      <p:sp>
-        <p:nvSpPr>
-          <p:cNvPr id="18" name="Shape 16"/>
-          <p:cNvSpPr/>
-          <p:nvPr/>
-        </p:nvSpPr>
-        <p:spPr>
-          <a:xfrm>
-            <a:off x="10287000" y="3685032"/>
-            <a:ext cx="182880" cy="182880"/>
-          </a:xfrm>
-          <a:prstGeom prst="ellipse">
-            <a:avLst/>
-          </a:prstGeom>
-          <a:solidFill>
-            <a:srgbClr val="0F6E7C"/>
-          </a:solidFill>
-          <a:ln/>
-        </p:spPr>
-      </p:sp>
-      <p:sp>
-        <p:nvSpPr>
-          <p:cNvPr id="19" name="Text 17"/>
-          <p:cNvSpPr/>
-          <p:nvPr/>
-        </p:nvSpPr>
-        <p:spPr>
-          <a:xfrm>
-            <a:off x="9208008" y="3904488"/>
-            <a:ext cx="2340864" cy="365760"/>
-          </a:xfrm>
-          <a:prstGeom prst="rect">
-            <a:avLst/>
-          </a:prstGeom>
-          <a:noFill/>
-          <a:ln/>
-        </p:spPr>
-        <p:txBody>
-          <a:bodyPr wrap="square" lIns="0" tIns="0" rIns="0" bIns="0" rtlCol="0" anchor="ctr"/>
-          <a:lstStyle/>
-          <a:p>
-            <a:pPr algn="ctr" indent="0" marL="0">
-              <a:buNone/>
-            </a:pPr>
-            <a:r>
-              <a:rPr lang="en-US" sz="1450" b="1" dirty="0">
-                <a:solidFill>
-                  <a:srgbClr val="0F2E33"/>
-                </a:solidFill>
-                <a:latin typeface="Calibri" pitchFamily="34" charset="0"/>
-                <a:ea typeface="Calibri" pitchFamily="34" charset="-122"/>
-                <a:cs typeface="Calibri" pitchFamily="34" charset="-120"/>
-              </a:rPr>
-              <a:t>AWS Lambda</a:t>
-            </a:r>
-            <a:endParaRPr lang="en-US" sz="1450" dirty="0"/>
-          </a:p>
-        </p:txBody>
-      </p:sp>
-      <p:sp>
-        <p:nvSpPr>
-          <p:cNvPr id="20" name="Text 18"/>
-          <p:cNvSpPr/>
-          <p:nvPr/>
-        </p:nvSpPr>
-        <p:spPr>
-          <a:xfrm>
-            <a:off x="9235440" y="4251960"/>
-            <a:ext cx="2286000" cy="411480"/>
-          </a:xfrm>
-          <a:prstGeom prst="rect">
-            <a:avLst/>
-          </a:prstGeom>
-          <a:noFill/>
-          <a:ln/>
-        </p:spPr>
-        <p:txBody>
-          <a:bodyPr wrap="square" lIns="0" tIns="0" rIns="0" bIns="0" rtlCol="0" anchor="t"/>
-          <a:lstStyle/>
-          <a:p>
-            <a:pPr algn="ctr" indent="0" marL="0">
-              <a:buNone/>
-            </a:pPr>
-            <a:r>
-              <a:rPr lang="en-US" sz="1050" dirty="0">
-                <a:solidFill>
-                  <a:srgbClr val="567478"/>
-                </a:solidFill>
-                <a:latin typeface="Calibri" pitchFamily="34" charset="0"/>
-                <a:ea typeface="Calibri" pitchFamily="34" charset="-122"/>
-                <a:cs typeface="Calibri" pitchFamily="34" charset="-120"/>
-              </a:rPr>
-              <a:t>nodejs20 ingest</a:t>
-            </a:r>
-            <a:endParaRPr lang="en-US" sz="1050" dirty="0"/>
-          </a:p>
-        </p:txBody>
-      </p:sp>
-      <p:sp>
-        <p:nvSpPr>
-          <p:cNvPr id="21" name="Shape 19"/>
-          <p:cNvSpPr/>
-          <p:nvPr/>
-        </p:nvSpPr>
-        <p:spPr>
-          <a:xfrm>
-            <a:off x="7242048" y="4160520"/>
-            <a:ext cx="1975104" cy="0"/>
-          </a:xfrm>
-          <a:prstGeom prst="line">
-            <a:avLst/>
-          </a:prstGeom>
-          <a:noFill/>
-          <a:ln w="25400">
-            <a:solidFill>
-              <a:srgbClr val="4FAAB6"/>
-            </a:solidFill>
-            <a:prstDash val="solid"/>
-            <a:headEnd type="triangle"/>
-            <a:tailEnd type="oval"/>
-          </a:ln>
-        </p:spPr>
-      </p:sp>
-      <p:sp>
-        <p:nvSpPr>
-          <p:cNvPr id="22" name="Shape 20"/>
-          <p:cNvSpPr/>
-          <p:nvPr/>
-        </p:nvSpPr>
-        <p:spPr>
-          <a:xfrm>
-            <a:off x="4937760" y="3520440"/>
-            <a:ext cx="2286000" cy="1280160"/>
-          </a:xfrm>
-          <a:prstGeom prst="roundRect">
-            <a:avLst>
-              <a:gd name="adj" fmla="val 7143"/>
-            </a:avLst>
-          </a:prstGeom>
-          <a:solidFill>
-            <a:srgbClr val="EDF6F7"/>
-          </a:solidFill>
-          <a:ln w="19050">
-            <a:solidFill>
-              <a:srgbClr val="0F6E7C"/>
-            </a:solidFill>
-            <a:prstDash val="solid"/>
-          </a:ln>
-        </p:spPr>
-      </p:sp>
-      <p:sp>
-        <p:nvSpPr>
-          <p:cNvPr id="23" name="Shape 21"/>
-          <p:cNvSpPr/>
-          <p:nvPr/>
-        </p:nvSpPr>
-        <p:spPr>
-          <a:xfrm>
-            <a:off x="5989320" y="3685032"/>
-            <a:ext cx="182880" cy="182880"/>
-          </a:xfrm>
-          <a:prstGeom prst="ellipse">
-            <a:avLst/>
-          </a:prstGeom>
-          <a:solidFill>
-            <a:srgbClr val="0F6E7C"/>
-          </a:solidFill>
-          <a:ln/>
-        </p:spPr>
-      </p:sp>
-      <p:sp>
-        <p:nvSpPr>
-          <p:cNvPr id="24" name="Text 22"/>
-          <p:cNvSpPr/>
-          <p:nvPr/>
-        </p:nvSpPr>
-        <p:spPr>
-          <a:xfrm>
-            <a:off x="4910328" y="3904488"/>
-            <a:ext cx="2340864" cy="365760"/>
-          </a:xfrm>
-          <a:prstGeom prst="rect">
-            <a:avLst/>
-          </a:prstGeom>
-          <a:noFill/>
-          <a:ln/>
-        </p:spPr>
-        <p:txBody>
-          <a:bodyPr wrap="square" lIns="0" tIns="0" rIns="0" bIns="0" rtlCol="0" anchor="ctr"/>
-          <a:lstStyle/>
-          <a:p>
-            <a:pPr algn="ctr" indent="0" marL="0">
-              <a:buNone/>
-            </a:pPr>
-            <a:r>
-              <a:rPr lang="en-US" sz="1450" b="1" dirty="0">
-                <a:solidFill>
-                  <a:srgbClr val="0F2E33"/>
-                </a:solidFill>
-                <a:latin typeface="Calibri" pitchFamily="34" charset="0"/>
-                <a:ea typeface="Calibri" pitchFamily="34" charset="-122"/>
-                <a:cs typeface="Calibri" pitchFamily="34" charset="-120"/>
-              </a:rPr>
-              <a:t>DynamoDB</a:t>
-            </a:r>
-            <a:endParaRPr lang="en-US" sz="1450" dirty="0"/>
-          </a:p>
-        </p:txBody>
-      </p:sp>
-      <p:sp>
-        <p:nvSpPr>
-          <p:cNvPr id="25" name="Text 23"/>
-          <p:cNvSpPr/>
-          <p:nvPr/>
-        </p:nvSpPr>
-        <p:spPr>
-          <a:xfrm>
-            <a:off x="4937760" y="4251960"/>
-            <a:ext cx="2286000" cy="411480"/>
-          </a:xfrm>
-          <a:prstGeom prst="rect">
-            <a:avLst/>
-          </a:prstGeom>
-          <a:noFill/>
-          <a:ln/>
-        </p:spPr>
-        <p:txBody>
-          <a:bodyPr wrap="square" lIns="0" tIns="0" rIns="0" bIns="0" rtlCol="0" anchor="t"/>
-          <a:lstStyle/>
-          <a:p>
-            <a:pPr algn="ctr" indent="0" marL="0">
-              <a:buNone/>
-            </a:pPr>
-            <a:r>
-              <a:rPr lang="en-US" sz="1050" dirty="0">
-                <a:solidFill>
-                  <a:srgbClr val="567478"/>
-                </a:solidFill>
-                <a:latin typeface="Calibri" pitchFamily="34" charset="0"/>
-                <a:ea typeface="Calibri" pitchFamily="34" charset="-122"/>
-                <a:cs typeface="Calibri" pitchFamily="34" charset="-120"/>
-              </a:rPr>
-              <a:t>time-series store</a:t>
-            </a:r>
-            <a:endParaRPr lang="en-US" sz="1050" dirty="0"/>
-          </a:p>
-        </p:txBody>
-      </p:sp>
-      <p:sp>
-        <p:nvSpPr>
-          <p:cNvPr id="26" name="Shape 24"/>
-          <p:cNvSpPr/>
-          <p:nvPr/>
-        </p:nvSpPr>
-        <p:spPr>
-          <a:xfrm>
-            <a:off x="2944368" y="4160520"/>
-            <a:ext cx="1975104" cy="0"/>
-          </a:xfrm>
-          <a:prstGeom prst="line">
-            <a:avLst/>
-          </a:prstGeom>
-          <a:noFill/>
-          <a:ln w="25400">
-            <a:solidFill>
-              <a:srgbClr val="4FAAB6"/>
-            </a:solidFill>
-            <a:prstDash val="solid"/>
-            <a:headEnd type="triangle"/>
-            <a:tailEnd type="oval"/>
-          </a:ln>
-        </p:spPr>
-      </p:sp>
-      <p:sp>
-        <p:nvSpPr>
-          <p:cNvPr id="27" name="Shape 25"/>
-          <p:cNvSpPr/>
-          <p:nvPr/>
-        </p:nvSpPr>
-        <p:spPr>
-          <a:xfrm>
-            <a:off x="640080" y="3520440"/>
-            <a:ext cx="2286000" cy="1280160"/>
-          </a:xfrm>
-          <a:prstGeom prst="roundRect">
-            <a:avLst>
-              <a:gd name="adj" fmla="val 7143"/>
-            </a:avLst>
-          </a:prstGeom>
-          <a:solidFill>
-            <a:srgbClr val="EDF6F7"/>
-          </a:solidFill>
-          <a:ln w="19050">
-            <a:solidFill>
-              <a:srgbClr val="1E8FA0"/>
-            </a:solidFill>
-            <a:prstDash val="solid"/>
-          </a:ln>
-        </p:spPr>
-      </p:sp>
-      <p:sp>
-        <p:nvSpPr>
-          <p:cNvPr id="28" name="Shape 26"/>
-          <p:cNvSpPr/>
-          <p:nvPr/>
-        </p:nvSpPr>
-        <p:spPr>
-          <a:xfrm>
-            <a:off x="1691640" y="3685032"/>
-            <a:ext cx="182880" cy="182880"/>
-          </a:xfrm>
-          <a:prstGeom prst="ellipse">
-            <a:avLst/>
-          </a:prstGeom>
-          <a:solidFill>
-            <a:srgbClr val="1E8FA0"/>
-          </a:solidFill>
-          <a:ln/>
-        </p:spPr>
-      </p:sp>
-      <p:sp>
-        <p:nvSpPr>
-          <p:cNvPr id="29" name="Text 27"/>
-          <p:cNvSpPr/>
-          <p:nvPr/>
-        </p:nvSpPr>
-        <p:spPr>
-          <a:xfrm>
-            <a:off x="612648" y="3904488"/>
-            <a:ext cx="2340864" cy="365760"/>
-          </a:xfrm>
-          <a:prstGeom prst="rect">
-            <a:avLst/>
-          </a:prstGeom>
-          <a:noFill/>
-          <a:ln/>
-        </p:spPr>
-        <p:txBody>
-          <a:bodyPr wrap="square" lIns="0" tIns="0" rIns="0" bIns="0" rtlCol="0" anchor="ctr"/>
-          <a:lstStyle/>
-          <a:p>
-            <a:pPr algn="ctr" indent="0" marL="0">
-              <a:buNone/>
-            </a:pPr>
-            <a:r>
-              <a:rPr lang="en-US" sz="1450" b="1" dirty="0">
-                <a:solidFill>
-                  <a:srgbClr val="0F2E33"/>
-                </a:solidFill>
-                <a:latin typeface="Calibri" pitchFamily="34" charset="0"/>
-                <a:ea typeface="Calibri" pitchFamily="34" charset="-122"/>
-                <a:cs typeface="Calibri" pitchFamily="34" charset="-120"/>
-              </a:rPr>
-              <a:t>API GW + S3</a:t>
-            </a:r>
-            <a:endParaRPr lang="en-US" sz="1450" dirty="0"/>
-          </a:p>
-        </p:txBody>
-      </p:sp>
-      <p:sp>
-        <p:nvSpPr>
-          <p:cNvPr id="30" name="Text 28"/>
-          <p:cNvSpPr/>
-          <p:nvPr/>
-        </p:nvSpPr>
-        <p:spPr>
-          <a:xfrm>
-            <a:off x="640080" y="4251960"/>
-            <a:ext cx="2286000" cy="411480"/>
-          </a:xfrm>
-          <a:prstGeom prst="rect">
-            <a:avLst/>
-          </a:prstGeom>
-          <a:noFill/>
-          <a:ln/>
-        </p:spPr>
-        <p:txBody>
-          <a:bodyPr wrap="square" lIns="0" tIns="0" rIns="0" bIns="0" rtlCol="0" anchor="t"/>
-          <a:lstStyle/>
-          <a:p>
-            <a:pPr algn="ctr" indent="0" marL="0">
-              <a:buNone/>
-            </a:pPr>
-            <a:r>
-              <a:rPr lang="en-US" sz="1050" dirty="0">
-                <a:solidFill>
-                  <a:srgbClr val="567478"/>
-                </a:solidFill>
-                <a:latin typeface="Calibri" pitchFamily="34" charset="0"/>
-                <a:ea typeface="Calibri" pitchFamily="34" charset="-122"/>
-                <a:cs typeface="Calibri" pitchFamily="34" charset="-120"/>
-              </a:rPr>
-              <a:t>compliance board</a:t>
-            </a:r>
-            <a:endParaRPr lang="en-US" sz="1050" dirty="0"/>
-          </a:p>
-        </p:txBody>
-      </p:sp>
-      <p:sp>
-        <p:nvSpPr>
-          <p:cNvPr id="31" name="Shape 29"/>
-          <p:cNvSpPr/>
-          <p:nvPr/>
-        </p:nvSpPr>
-        <p:spPr>
-          <a:xfrm>
-            <a:off x="10378440" y="3154680"/>
-            <a:ext cx="0" cy="365760"/>
+            <a:off x="2231136" y="3154680"/>
+            <a:ext cx="258409" cy="0"/>
           </a:xfrm>
           <a:prstGeom prst="line">
             <a:avLst/>
@@ -2446,7 +1721,806 @@
       </p:sp>
       <p:sp>
         <p:nvSpPr>
+          <p:cNvPr id="8" name="Shape 6"/>
+          <p:cNvSpPr/>
+          <p:nvPr/>
+        </p:nvSpPr>
+        <p:spPr>
+          <a:xfrm>
+            <a:off x="2507833" y="2468880"/>
+            <a:ext cx="1572768" cy="1371600"/>
+          </a:xfrm>
+          <a:prstGeom prst="roundRect">
+            <a:avLst>
+              <a:gd name="adj" fmla="val 6667"/>
+            </a:avLst>
+          </a:prstGeom>
+          <a:solidFill>
+            <a:srgbClr val="EDF6F7"/>
+          </a:solidFill>
+          <a:ln w="19050">
+            <a:solidFill>
+              <a:srgbClr val="4FAAB6"/>
+            </a:solidFill>
+            <a:prstDash val="solid"/>
+          </a:ln>
+        </p:spPr>
+      </p:sp>
+      <p:sp>
+        <p:nvSpPr>
+          <p:cNvPr id="9" name="Shape 7"/>
+          <p:cNvSpPr/>
+          <p:nvPr/>
+        </p:nvSpPr>
+        <p:spPr>
+          <a:xfrm>
+            <a:off x="3202777" y="2633472"/>
+            <a:ext cx="182880" cy="182880"/>
+          </a:xfrm>
+          <a:prstGeom prst="ellipse">
+            <a:avLst/>
+          </a:prstGeom>
+          <a:solidFill>
+            <a:srgbClr val="4FAAB6"/>
+          </a:solidFill>
+          <a:ln/>
+        </p:spPr>
+      </p:sp>
+      <p:sp>
+        <p:nvSpPr>
+          <p:cNvPr id="10" name="Text 8"/>
+          <p:cNvSpPr/>
+          <p:nvPr/>
+        </p:nvSpPr>
+        <p:spPr>
+          <a:xfrm>
+            <a:off x="2480401" y="2852928"/>
+            <a:ext cx="1627632" cy="365760"/>
+          </a:xfrm>
+          <a:prstGeom prst="rect">
+            <a:avLst/>
+          </a:prstGeom>
+          <a:noFill/>
+          <a:ln/>
+        </p:spPr>
+        <p:txBody>
+          <a:bodyPr wrap="square" lIns="0" tIns="0" rIns="0" bIns="0" rtlCol="0" anchor="ctr"/>
+          <a:lstStyle/>
+          <a:p>
+            <a:pPr algn="ctr" indent="0" marL="0">
+              <a:buNone/>
+            </a:pPr>
+            <a:r>
+              <a:rPr lang="en-US" sz="1450" b="1" dirty="0">
+                <a:solidFill>
+                  <a:srgbClr val="0F2E33"/>
+                </a:solidFill>
+                <a:latin typeface="Calibri" pitchFamily="34" charset="0"/>
+                <a:ea typeface="Calibri" pitchFamily="34" charset="-122"/>
+                <a:cs typeface="Calibri" pitchFamily="34" charset="-120"/>
+              </a:rPr>
+              <a:t>Fog node</a:t>
+            </a:r>
+            <a:endParaRPr lang="en-US" sz="1450" dirty="0"/>
+          </a:p>
+        </p:txBody>
+      </p:sp>
+      <p:sp>
+        <p:nvSpPr>
+          <p:cNvPr id="11" name="Text 9"/>
+          <p:cNvSpPr/>
+          <p:nvPr/>
+        </p:nvSpPr>
+        <p:spPr>
+          <a:xfrm>
+            <a:off x="2507833" y="3200400"/>
+            <a:ext cx="1572768" cy="411480"/>
+          </a:xfrm>
+          <a:prstGeom prst="rect">
+            <a:avLst/>
+          </a:prstGeom>
+          <a:noFill/>
+          <a:ln/>
+        </p:spPr>
+        <p:txBody>
+          <a:bodyPr wrap="square" lIns="0" tIns="0" rIns="0" bIns="0" rtlCol="0" anchor="t"/>
+          <a:lstStyle/>
+          <a:p>
+            <a:pPr algn="ctr" indent="0" marL="0">
+              <a:buNone/>
+            </a:pPr>
+            <a:r>
+              <a:rPr lang="en-US" sz="1050" dirty="0">
+                <a:solidFill>
+                  <a:srgbClr val="567478"/>
+                </a:solidFill>
+                <a:latin typeface="Calibri" pitchFamily="34" charset="0"/>
+                <a:ea typeface="Calibri" pitchFamily="34" charset="-122"/>
+                <a:cs typeface="Calibri" pitchFamily="34" charset="-120"/>
+              </a:rPr>
+              <a:t>10 s windows · gates</a:t>
+            </a:r>
+            <a:endParaRPr lang="en-US" sz="1050" dirty="0"/>
+          </a:p>
+        </p:txBody>
+      </p:sp>
+      <p:sp>
+        <p:nvSpPr>
+          <p:cNvPr id="12" name="Shape 10"/>
+          <p:cNvSpPr/>
+          <p:nvPr/>
+        </p:nvSpPr>
+        <p:spPr>
+          <a:xfrm>
+            <a:off x="4098889" y="3154680"/>
+            <a:ext cx="258409" cy="0"/>
+          </a:xfrm>
+          <a:prstGeom prst="line">
+            <a:avLst/>
+          </a:prstGeom>
+          <a:noFill/>
+          <a:ln w="25400">
+            <a:solidFill>
+              <a:srgbClr val="4FAAB6"/>
+            </a:solidFill>
+            <a:prstDash val="solid"/>
+            <a:tailEnd type="triangle"/>
+          </a:ln>
+        </p:spPr>
+      </p:sp>
+      <p:sp>
+        <p:nvSpPr>
+          <p:cNvPr id="13" name="Shape 11"/>
+          <p:cNvSpPr/>
+          <p:nvPr/>
+        </p:nvSpPr>
+        <p:spPr>
+          <a:xfrm>
+            <a:off x="4375587" y="2468880"/>
+            <a:ext cx="1572768" cy="1371600"/>
+          </a:xfrm>
+          <a:prstGeom prst="roundRect">
+            <a:avLst>
+              <a:gd name="adj" fmla="val 6667"/>
+            </a:avLst>
+          </a:prstGeom>
+          <a:solidFill>
+            <a:srgbClr val="EDF6F7"/>
+          </a:solidFill>
+          <a:ln w="19050">
+            <a:solidFill>
+              <a:srgbClr val="0F6E7C"/>
+            </a:solidFill>
+            <a:prstDash val="solid"/>
+          </a:ln>
+        </p:spPr>
+      </p:sp>
+      <p:sp>
+        <p:nvSpPr>
+          <p:cNvPr id="14" name="Shape 12"/>
+          <p:cNvSpPr/>
+          <p:nvPr/>
+        </p:nvSpPr>
+        <p:spPr>
+          <a:xfrm>
+            <a:off x="5070531" y="2633472"/>
+            <a:ext cx="182880" cy="182880"/>
+          </a:xfrm>
+          <a:prstGeom prst="ellipse">
+            <a:avLst/>
+          </a:prstGeom>
+          <a:solidFill>
+            <a:srgbClr val="0F6E7C"/>
+          </a:solidFill>
+          <a:ln/>
+        </p:spPr>
+      </p:sp>
+      <p:sp>
+        <p:nvSpPr>
+          <p:cNvPr id="15" name="Text 13"/>
+          <p:cNvSpPr/>
+          <p:nvPr/>
+        </p:nvSpPr>
+        <p:spPr>
+          <a:xfrm>
+            <a:off x="4348155" y="2852928"/>
+            <a:ext cx="1627632" cy="365760"/>
+          </a:xfrm>
+          <a:prstGeom prst="rect">
+            <a:avLst/>
+          </a:prstGeom>
+          <a:noFill/>
+          <a:ln/>
+        </p:spPr>
+        <p:txBody>
+          <a:bodyPr wrap="square" lIns="0" tIns="0" rIns="0" bIns="0" rtlCol="0" anchor="ctr"/>
+          <a:lstStyle/>
+          <a:p>
+            <a:pPr algn="ctr" indent="0" marL="0">
+              <a:buNone/>
+            </a:pPr>
+            <a:r>
+              <a:rPr lang="en-US" sz="1450" b="1" dirty="0">
+                <a:solidFill>
+                  <a:srgbClr val="0F2E33"/>
+                </a:solidFill>
+                <a:latin typeface="Calibri" pitchFamily="34" charset="0"/>
+                <a:ea typeface="Calibri" pitchFamily="34" charset="-122"/>
+                <a:cs typeface="Calibri" pitchFamily="34" charset="-120"/>
+              </a:rPr>
+              <a:t>Amazon SQS</a:t>
+            </a:r>
+            <a:endParaRPr lang="en-US" sz="1450" dirty="0"/>
+          </a:p>
+        </p:txBody>
+      </p:sp>
+      <p:sp>
+        <p:nvSpPr>
+          <p:cNvPr id="16" name="Text 14"/>
+          <p:cNvSpPr/>
+          <p:nvPr/>
+        </p:nvSpPr>
+        <p:spPr>
+          <a:xfrm>
+            <a:off x="4375587" y="3200400"/>
+            <a:ext cx="1572768" cy="411480"/>
+          </a:xfrm>
+          <a:prstGeom prst="rect">
+            <a:avLst/>
+          </a:prstGeom>
+          <a:noFill/>
+          <a:ln/>
+        </p:spPr>
+        <p:txBody>
+          <a:bodyPr wrap="square" lIns="0" tIns="0" rIns="0" bIns="0" rtlCol="0" anchor="t"/>
+          <a:lstStyle/>
+          <a:p>
+            <a:pPr algn="ctr" indent="0" marL="0">
+              <a:buNone/>
+            </a:pPr>
+            <a:r>
+              <a:rPr lang="en-US" sz="1050" dirty="0">
+                <a:solidFill>
+                  <a:srgbClr val="567478"/>
+                </a:solidFill>
+                <a:latin typeface="Calibri" pitchFamily="34" charset="0"/>
+                <a:ea typeface="Calibri" pitchFamily="34" charset="-122"/>
+                <a:cs typeface="Calibri" pitchFamily="34" charset="-120"/>
+              </a:rPr>
+              <a:t>1 summary / window</a:t>
+            </a:r>
+            <a:endParaRPr lang="en-US" sz="1050" dirty="0"/>
+          </a:p>
+        </p:txBody>
+      </p:sp>
+      <p:sp>
+        <p:nvSpPr>
+          <p:cNvPr id="17" name="Shape 15"/>
+          <p:cNvSpPr/>
+          <p:nvPr/>
+        </p:nvSpPr>
+        <p:spPr>
+          <a:xfrm>
+            <a:off x="5966643" y="3154680"/>
+            <a:ext cx="258409" cy="0"/>
+          </a:xfrm>
+          <a:prstGeom prst="line">
+            <a:avLst/>
+          </a:prstGeom>
+          <a:noFill/>
+          <a:ln w="25400">
+            <a:solidFill>
+              <a:srgbClr val="4FAAB6"/>
+            </a:solidFill>
+            <a:prstDash val="solid"/>
+            <a:tailEnd type="triangle"/>
+          </a:ln>
+        </p:spPr>
+      </p:sp>
+      <p:sp>
+        <p:nvSpPr>
+          <p:cNvPr id="18" name="Shape 16"/>
+          <p:cNvSpPr/>
+          <p:nvPr/>
+        </p:nvSpPr>
+        <p:spPr>
+          <a:xfrm>
+            <a:off x="6243340" y="2468880"/>
+            <a:ext cx="1572768" cy="1371600"/>
+          </a:xfrm>
+          <a:prstGeom prst="roundRect">
+            <a:avLst>
+              <a:gd name="adj" fmla="val 6667"/>
+            </a:avLst>
+          </a:prstGeom>
+          <a:solidFill>
+            <a:srgbClr val="EDF6F7"/>
+          </a:solidFill>
+          <a:ln w="19050">
+            <a:solidFill>
+              <a:srgbClr val="0F6E7C"/>
+            </a:solidFill>
+            <a:prstDash val="solid"/>
+          </a:ln>
+        </p:spPr>
+      </p:sp>
+      <p:sp>
+        <p:nvSpPr>
+          <p:cNvPr id="19" name="Shape 17"/>
+          <p:cNvSpPr/>
+          <p:nvPr/>
+        </p:nvSpPr>
+        <p:spPr>
+          <a:xfrm>
+            <a:off x="6938284" y="2633472"/>
+            <a:ext cx="182880" cy="182880"/>
+          </a:xfrm>
+          <a:prstGeom prst="ellipse">
+            <a:avLst/>
+          </a:prstGeom>
+          <a:solidFill>
+            <a:srgbClr val="0F6E7C"/>
+          </a:solidFill>
+          <a:ln/>
+        </p:spPr>
+      </p:sp>
+      <p:sp>
+        <p:nvSpPr>
+          <p:cNvPr id="20" name="Text 18"/>
+          <p:cNvSpPr/>
+          <p:nvPr/>
+        </p:nvSpPr>
+        <p:spPr>
+          <a:xfrm>
+            <a:off x="6215908" y="2852928"/>
+            <a:ext cx="1627632" cy="365760"/>
+          </a:xfrm>
+          <a:prstGeom prst="rect">
+            <a:avLst/>
+          </a:prstGeom>
+          <a:noFill/>
+          <a:ln/>
+        </p:spPr>
+        <p:txBody>
+          <a:bodyPr wrap="square" lIns="0" tIns="0" rIns="0" bIns="0" rtlCol="0" anchor="ctr"/>
+          <a:lstStyle/>
+          <a:p>
+            <a:pPr algn="ctr" indent="0" marL="0">
+              <a:buNone/>
+            </a:pPr>
+            <a:r>
+              <a:rPr lang="en-US" sz="1450" b="1" dirty="0">
+                <a:solidFill>
+                  <a:srgbClr val="0F2E33"/>
+                </a:solidFill>
+                <a:latin typeface="Calibri" pitchFamily="34" charset="0"/>
+                <a:ea typeface="Calibri" pitchFamily="34" charset="-122"/>
+                <a:cs typeface="Calibri" pitchFamily="34" charset="-120"/>
+              </a:rPr>
+              <a:t>AWS Lambda</a:t>
+            </a:r>
+            <a:endParaRPr lang="en-US" sz="1450" dirty="0"/>
+          </a:p>
+        </p:txBody>
+      </p:sp>
+      <p:sp>
+        <p:nvSpPr>
+          <p:cNvPr id="21" name="Text 19"/>
+          <p:cNvSpPr/>
+          <p:nvPr/>
+        </p:nvSpPr>
+        <p:spPr>
+          <a:xfrm>
+            <a:off x="6243340" y="3200400"/>
+            <a:ext cx="1572768" cy="411480"/>
+          </a:xfrm>
+          <a:prstGeom prst="rect">
+            <a:avLst/>
+          </a:prstGeom>
+          <a:noFill/>
+          <a:ln/>
+        </p:spPr>
+        <p:txBody>
+          <a:bodyPr wrap="square" lIns="0" tIns="0" rIns="0" bIns="0" rtlCol="0" anchor="t"/>
+          <a:lstStyle/>
+          <a:p>
+            <a:pPr algn="ctr" indent="0" marL="0">
+              <a:buNone/>
+            </a:pPr>
+            <a:r>
+              <a:rPr lang="en-US" sz="1050" dirty="0">
+                <a:solidFill>
+                  <a:srgbClr val="567478"/>
+                </a:solidFill>
+                <a:latin typeface="Calibri" pitchFamily="34" charset="0"/>
+                <a:ea typeface="Calibri" pitchFamily="34" charset="-122"/>
+                <a:cs typeface="Calibri" pitchFamily="34" charset="-120"/>
+              </a:rPr>
+              <a:t>nodejs20 ingest</a:t>
+            </a:r>
+            <a:endParaRPr lang="en-US" sz="1050" dirty="0"/>
+          </a:p>
+        </p:txBody>
+      </p:sp>
+      <p:sp>
+        <p:nvSpPr>
+          <p:cNvPr id="22" name="Shape 20"/>
+          <p:cNvSpPr/>
+          <p:nvPr/>
+        </p:nvSpPr>
+        <p:spPr>
+          <a:xfrm>
+            <a:off x="7834396" y="3154680"/>
+            <a:ext cx="258409" cy="0"/>
+          </a:xfrm>
+          <a:prstGeom prst="line">
+            <a:avLst/>
+          </a:prstGeom>
+          <a:noFill/>
+          <a:ln w="25400">
+            <a:solidFill>
+              <a:srgbClr val="4FAAB6"/>
+            </a:solidFill>
+            <a:prstDash val="solid"/>
+            <a:tailEnd type="triangle"/>
+          </a:ln>
+        </p:spPr>
+      </p:sp>
+      <p:sp>
+        <p:nvSpPr>
+          <p:cNvPr id="23" name="Shape 21"/>
+          <p:cNvSpPr/>
+          <p:nvPr/>
+        </p:nvSpPr>
+        <p:spPr>
+          <a:xfrm>
+            <a:off x="8111094" y="2468880"/>
+            <a:ext cx="1572768" cy="1371600"/>
+          </a:xfrm>
+          <a:prstGeom prst="roundRect">
+            <a:avLst>
+              <a:gd name="adj" fmla="val 6667"/>
+            </a:avLst>
+          </a:prstGeom>
+          <a:solidFill>
+            <a:srgbClr val="EDF6F7"/>
+          </a:solidFill>
+          <a:ln w="19050">
+            <a:solidFill>
+              <a:srgbClr val="0F6E7C"/>
+            </a:solidFill>
+            <a:prstDash val="solid"/>
+          </a:ln>
+        </p:spPr>
+      </p:sp>
+      <p:sp>
+        <p:nvSpPr>
+          <p:cNvPr id="24" name="Shape 22"/>
+          <p:cNvSpPr/>
+          <p:nvPr/>
+        </p:nvSpPr>
+        <p:spPr>
+          <a:xfrm>
+            <a:off x="8806038" y="2633472"/>
+            <a:ext cx="182880" cy="182880"/>
+          </a:xfrm>
+          <a:prstGeom prst="ellipse">
+            <a:avLst/>
+          </a:prstGeom>
+          <a:solidFill>
+            <a:srgbClr val="0F6E7C"/>
+          </a:solidFill>
+          <a:ln/>
+        </p:spPr>
+      </p:sp>
+      <p:sp>
+        <p:nvSpPr>
+          <p:cNvPr id="25" name="Text 23"/>
+          <p:cNvSpPr/>
+          <p:nvPr/>
+        </p:nvSpPr>
+        <p:spPr>
+          <a:xfrm>
+            <a:off x="8083662" y="2852928"/>
+            <a:ext cx="1627632" cy="365760"/>
+          </a:xfrm>
+          <a:prstGeom prst="rect">
+            <a:avLst/>
+          </a:prstGeom>
+          <a:noFill/>
+          <a:ln/>
+        </p:spPr>
+        <p:txBody>
+          <a:bodyPr wrap="square" lIns="0" tIns="0" rIns="0" bIns="0" rtlCol="0" anchor="ctr"/>
+          <a:lstStyle/>
+          <a:p>
+            <a:pPr algn="ctr" indent="0" marL="0">
+              <a:buNone/>
+            </a:pPr>
+            <a:r>
+              <a:rPr lang="en-US" sz="1450" b="1" dirty="0">
+                <a:solidFill>
+                  <a:srgbClr val="0F2E33"/>
+                </a:solidFill>
+                <a:latin typeface="Calibri" pitchFamily="34" charset="0"/>
+                <a:ea typeface="Calibri" pitchFamily="34" charset="-122"/>
+                <a:cs typeface="Calibri" pitchFamily="34" charset="-120"/>
+              </a:rPr>
+              <a:t>DynamoDB</a:t>
+            </a:r>
+            <a:endParaRPr lang="en-US" sz="1450" dirty="0"/>
+          </a:p>
+        </p:txBody>
+      </p:sp>
+      <p:sp>
+        <p:nvSpPr>
+          <p:cNvPr id="26" name="Text 24"/>
+          <p:cNvSpPr/>
+          <p:nvPr/>
+        </p:nvSpPr>
+        <p:spPr>
+          <a:xfrm>
+            <a:off x="8111094" y="3200400"/>
+            <a:ext cx="1572768" cy="411480"/>
+          </a:xfrm>
+          <a:prstGeom prst="rect">
+            <a:avLst/>
+          </a:prstGeom>
+          <a:noFill/>
+          <a:ln/>
+        </p:spPr>
+        <p:txBody>
+          <a:bodyPr wrap="square" lIns="0" tIns="0" rIns="0" bIns="0" rtlCol="0" anchor="t"/>
+          <a:lstStyle/>
+          <a:p>
+            <a:pPr algn="ctr" indent="0" marL="0">
+              <a:buNone/>
+            </a:pPr>
+            <a:r>
+              <a:rPr lang="en-US" sz="1050" dirty="0">
+                <a:solidFill>
+                  <a:srgbClr val="567478"/>
+                </a:solidFill>
+                <a:latin typeface="Calibri" pitchFamily="34" charset="0"/>
+                <a:ea typeface="Calibri" pitchFamily="34" charset="-122"/>
+                <a:cs typeface="Calibri" pitchFamily="34" charset="-120"/>
+              </a:rPr>
+              <a:t>time-series store</a:t>
+            </a:r>
+            <a:endParaRPr lang="en-US" sz="1050" dirty="0"/>
+          </a:p>
+        </p:txBody>
+      </p:sp>
+      <p:sp>
+        <p:nvSpPr>
+          <p:cNvPr id="27" name="Shape 25"/>
+          <p:cNvSpPr/>
+          <p:nvPr/>
+        </p:nvSpPr>
+        <p:spPr>
+          <a:xfrm>
+            <a:off x="9702150" y="3154680"/>
+            <a:ext cx="258409" cy="0"/>
+          </a:xfrm>
+          <a:prstGeom prst="line">
+            <a:avLst/>
+          </a:prstGeom>
+          <a:noFill/>
+          <a:ln w="25400">
+            <a:solidFill>
+              <a:srgbClr val="4FAAB6"/>
+            </a:solidFill>
+            <a:prstDash val="solid"/>
+            <a:tailEnd type="triangle"/>
+          </a:ln>
+        </p:spPr>
+      </p:sp>
+      <p:sp>
+        <p:nvSpPr>
+          <p:cNvPr id="28" name="Shape 26"/>
+          <p:cNvSpPr/>
+          <p:nvPr/>
+        </p:nvSpPr>
+        <p:spPr>
+          <a:xfrm>
+            <a:off x="9978847" y="2468880"/>
+            <a:ext cx="1572768" cy="1371600"/>
+          </a:xfrm>
+          <a:prstGeom prst="roundRect">
+            <a:avLst>
+              <a:gd name="adj" fmla="val 6667"/>
+            </a:avLst>
+          </a:prstGeom>
+          <a:solidFill>
+            <a:srgbClr val="EDF6F7"/>
+          </a:solidFill>
+          <a:ln w="19050">
+            <a:solidFill>
+              <a:srgbClr val="1E8FA0"/>
+            </a:solidFill>
+            <a:prstDash val="solid"/>
+          </a:ln>
+        </p:spPr>
+      </p:sp>
+      <p:sp>
+        <p:nvSpPr>
+          <p:cNvPr id="29" name="Shape 27"/>
+          <p:cNvSpPr/>
+          <p:nvPr/>
+        </p:nvSpPr>
+        <p:spPr>
+          <a:xfrm>
+            <a:off x="10673791" y="2633472"/>
+            <a:ext cx="182880" cy="182880"/>
+          </a:xfrm>
+          <a:prstGeom prst="ellipse">
+            <a:avLst/>
+          </a:prstGeom>
+          <a:solidFill>
+            <a:srgbClr val="1E8FA0"/>
+          </a:solidFill>
+          <a:ln/>
+        </p:spPr>
+      </p:sp>
+      <p:sp>
+        <p:nvSpPr>
+          <p:cNvPr id="30" name="Text 28"/>
+          <p:cNvSpPr/>
+          <p:nvPr/>
+        </p:nvSpPr>
+        <p:spPr>
+          <a:xfrm>
+            <a:off x="9951415" y="2852928"/>
+            <a:ext cx="1627632" cy="365760"/>
+          </a:xfrm>
+          <a:prstGeom prst="rect">
+            <a:avLst/>
+          </a:prstGeom>
+          <a:noFill/>
+          <a:ln/>
+        </p:spPr>
+        <p:txBody>
+          <a:bodyPr wrap="square" lIns="0" tIns="0" rIns="0" bIns="0" rtlCol="0" anchor="ctr"/>
+          <a:lstStyle/>
+          <a:p>
+            <a:pPr algn="ctr" indent="0" marL="0">
+              <a:buNone/>
+            </a:pPr>
+            <a:r>
+              <a:rPr lang="en-US" sz="1450" b="1" dirty="0">
+                <a:solidFill>
+                  <a:srgbClr val="0F2E33"/>
+                </a:solidFill>
+                <a:latin typeface="Calibri" pitchFamily="34" charset="0"/>
+                <a:ea typeface="Calibri" pitchFamily="34" charset="-122"/>
+                <a:cs typeface="Calibri" pitchFamily="34" charset="-120"/>
+              </a:rPr>
+              <a:t>API GW + S3</a:t>
+            </a:r>
+            <a:endParaRPr lang="en-US" sz="1450" dirty="0"/>
+          </a:p>
+        </p:txBody>
+      </p:sp>
+      <p:sp>
+        <p:nvSpPr>
+          <p:cNvPr id="31" name="Text 29"/>
+          <p:cNvSpPr/>
+          <p:nvPr/>
+        </p:nvSpPr>
+        <p:spPr>
+          <a:xfrm>
+            <a:off x="9978847" y="3200400"/>
+            <a:ext cx="1572768" cy="411480"/>
+          </a:xfrm>
+          <a:prstGeom prst="rect">
+            <a:avLst/>
+          </a:prstGeom>
+          <a:noFill/>
+          <a:ln/>
+        </p:spPr>
+        <p:txBody>
+          <a:bodyPr wrap="square" lIns="0" tIns="0" rIns="0" bIns="0" rtlCol="0" anchor="t"/>
+          <a:lstStyle/>
+          <a:p>
+            <a:pPr algn="ctr" indent="0" marL="0">
+              <a:buNone/>
+            </a:pPr>
+            <a:r>
+              <a:rPr lang="en-US" sz="1050" dirty="0">
+                <a:solidFill>
+                  <a:srgbClr val="567478"/>
+                </a:solidFill>
+                <a:latin typeface="Calibri" pitchFamily="34" charset="0"/>
+                <a:ea typeface="Calibri" pitchFamily="34" charset="-122"/>
+                <a:cs typeface="Calibri" pitchFamily="34" charset="-120"/>
+              </a:rPr>
+              <a:t>compliance board</a:t>
+            </a:r>
+            <a:endParaRPr lang="en-US" sz="1050" dirty="0"/>
+          </a:p>
+        </p:txBody>
+      </p:sp>
+      <p:sp>
+        <p:nvSpPr>
           <p:cNvPr id="32" name="Text 30"/>
+          <p:cNvSpPr/>
+          <p:nvPr/>
+        </p:nvSpPr>
+        <p:spPr>
+          <a:xfrm>
+            <a:off x="640080" y="3977640"/>
+            <a:ext cx="3440521" cy="274320"/>
+          </a:xfrm>
+          <a:prstGeom prst="rect">
+            <a:avLst/>
+          </a:prstGeom>
+          <a:noFill/>
+          <a:ln/>
+        </p:spPr>
+        <p:txBody>
+          <a:bodyPr wrap="square" rtlCol="0" anchor="ctr"/>
+          <a:lstStyle/>
+          <a:p>
+            <a:pPr algn="ctr" indent="0" marL="0">
+              <a:buNone/>
+            </a:pPr>
+            <a:r>
+              <a:rPr lang="en-US" sz="1100" b="1" spc="200" kern="0" dirty="0">
+                <a:solidFill>
+                  <a:srgbClr val="4FAAB6"/>
+                </a:solidFill>
+                <a:latin typeface="Calibri" pitchFamily="34" charset="0"/>
+                <a:ea typeface="Calibri" pitchFamily="34" charset="-122"/>
+                <a:cs typeface="Calibri" pitchFamily="34" charset="-120"/>
+              </a:rPr>
+              <a:t>EDGE</a:t>
+            </a:r>
+            <a:endParaRPr lang="en-US" sz="1100" dirty="0"/>
+          </a:p>
+        </p:txBody>
+      </p:sp>
+      <p:sp>
+        <p:nvSpPr>
+          <p:cNvPr id="33" name="Text 31"/>
+          <p:cNvSpPr/>
+          <p:nvPr/>
+        </p:nvSpPr>
+        <p:spPr>
+          <a:xfrm>
+            <a:off x="4375587" y="3977640"/>
+            <a:ext cx="7176028" cy="274320"/>
+          </a:xfrm>
+          <a:prstGeom prst="rect">
+            <a:avLst/>
+          </a:prstGeom>
+          <a:noFill/>
+          <a:ln/>
+        </p:spPr>
+        <p:txBody>
+          <a:bodyPr wrap="square" rtlCol="0" anchor="ctr"/>
+          <a:lstStyle/>
+          <a:p>
+            <a:pPr algn="ctr" indent="0" marL="0">
+              <a:buNone/>
+            </a:pPr>
+            <a:r>
+              <a:rPr lang="en-US" sz="1100" b="1" spc="200" kern="0" dirty="0">
+                <a:solidFill>
+                  <a:srgbClr val="0F6E7C"/>
+                </a:solidFill>
+                <a:latin typeface="Calibri" pitchFamily="34" charset="0"/>
+                <a:ea typeface="Calibri" pitchFamily="34" charset="-122"/>
+                <a:cs typeface="Calibri" pitchFamily="34" charset="-120"/>
+              </a:rPr>
+              <a:t>CLOUD</a:t>
+            </a:r>
+            <a:endParaRPr lang="en-US" sz="1100" dirty="0"/>
+          </a:p>
+        </p:txBody>
+      </p:sp>
+      <p:sp>
+        <p:nvSpPr>
+          <p:cNvPr id="34" name="Text 32"/>
           <p:cNvSpPr/>
           <p:nvPr/>
         </p:nvSpPr>
@@ -3206,24 +3280,59 @@
       </p:sp>
       <p:sp>
         <p:nvSpPr>
-          <p:cNvPr id="3" name="Shape 1"/>
-          <p:cNvSpPr/>
-          <p:nvPr/>
-        </p:nvSpPr>
-        <p:spPr>
-          <a:xfrm>
-            <a:off x="731520" y="1920240"/>
-            <a:ext cx="10698480" cy="1965960"/>
-          </a:xfrm>
-          <a:prstGeom prst="roundRect">
-            <a:avLst>
-              <a:gd name="adj" fmla="val 4651"/>
-            </a:avLst>
-          </a:prstGeom>
-          <a:solidFill>
-            <a:srgbClr val="EDF6F7"/>
-          </a:solidFill>
-          <a:ln w="19050">
+          <p:cNvPr id="3" name="Text 1"/>
+          <p:cNvSpPr/>
+          <p:nvPr/>
+        </p:nvSpPr>
+        <p:spPr>
+          <a:xfrm>
+            <a:off x="731520" y="1965960"/>
+            <a:ext cx="2377440" cy="548640"/>
+          </a:xfrm>
+          <a:prstGeom prst="rect">
+            <a:avLst/>
+          </a:prstGeom>
+          <a:noFill/>
+          <a:ln/>
+        </p:spPr>
+        <p:txBody>
+          <a:bodyPr wrap="square" lIns="0" tIns="0" rIns="0" bIns="0" rtlCol="0" anchor="ctr"/>
+          <a:lstStyle/>
+          <a:p>
+            <a:pPr indent="0" marL="0">
+              <a:buNone/>
+            </a:pPr>
+            <a:r>
+              <a:rPr lang="en-US" sz="2300" b="1" dirty="0">
+                <a:solidFill>
+                  <a:srgbClr val="E4A63C"/>
+                </a:solidFill>
+                <a:latin typeface="Century Schoolbook" pitchFamily="34" charset="0"/>
+                <a:ea typeface="Century Schoolbook" pitchFamily="34" charset="-122"/>
+                <a:cs typeface="Century Schoolbook" pitchFamily="34" charset="-120"/>
+              </a:rPr>
+              <a:t>Problem</a:t>
+            </a:r>
+            <a:endParaRPr lang="en-US" sz="2300" dirty="0"/>
+          </a:p>
+        </p:txBody>
+      </p:sp>
+      <p:sp>
+        <p:nvSpPr>
+          <p:cNvPr id="4" name="Shape 2"/>
+          <p:cNvSpPr/>
+          <p:nvPr/>
+        </p:nvSpPr>
+        <p:spPr>
+          <a:xfrm>
+            <a:off x="3200400" y="1920240"/>
+            <a:ext cx="0" cy="1783080"/>
+          </a:xfrm>
+          <a:prstGeom prst="line">
+            <a:avLst/>
+          </a:prstGeom>
+          <a:noFill/>
+          <a:ln w="31750">
             <a:solidFill>
               <a:srgbClr val="E4A63C"/>
             </a:solidFill>
@@ -3233,14 +3342,14 @@
       </p:sp>
       <p:sp>
         <p:nvSpPr>
-          <p:cNvPr id="4" name="Text 2"/>
-          <p:cNvSpPr/>
-          <p:nvPr/>
-        </p:nvSpPr>
-        <p:spPr>
-          <a:xfrm>
-            <a:off x="1005840" y="2103120"/>
-            <a:ext cx="3657600" cy="457200"/>
+          <p:cNvPr id="5" name="Text 3"/>
+          <p:cNvSpPr/>
+          <p:nvPr/>
+        </p:nvSpPr>
+        <p:spPr>
+          <a:xfrm>
+            <a:off x="3474720" y="1920240"/>
+            <a:ext cx="7955280" cy="1920240"/>
           </a:xfrm>
           <a:prstGeom prst="rect">
             <a:avLst/>
@@ -3253,85 +3362,81 @@
           <a:lstStyle/>
           <a:p>
             <a:pPr indent="0" marL="0">
-              <a:buNone/>
-            </a:pPr>
-            <a:r>
-              <a:rPr lang="en-US" sz="1900" b="1" dirty="0">
-                <a:solidFill>
-                  <a:srgbClr val="E4A63C"/>
+              <a:lnSpc>
+                <a:spcPct val="112000"/>
+              </a:lnSpc>
+              <a:buNone/>
+            </a:pPr>
+            <a:r>
+              <a:rPr lang="en-US" sz="1450" dirty="0">
+                <a:solidFill>
+                  <a:srgbClr val="0F2E33"/>
+                </a:solidFill>
+                <a:latin typeface="Calibri" pitchFamily="34" charset="0"/>
+                <a:ea typeface="Calibri" pitchFamily="34" charset="-122"/>
+                <a:cs typeface="Calibri" pitchFamily="34" charset="-120"/>
+              </a:rPr>
+              <a:t>Normal traffic is one summary every ten seconds; to claim scalability I fired 2,000 messages at the queue from 32 parallel workers. But from outside, a non-empty queue is ambiguous — a slow consumer and a dead one look identical — and the emulator runs the Lambda in a single container, so drain time swings wildly and a naive pass/fail test either flakes or lies.</a:t>
+            </a:r>
+            <a:endParaRPr lang="en-US" sz="1450" dirty="0"/>
+          </a:p>
+        </p:txBody>
+      </p:sp>
+      <p:sp>
+        <p:nvSpPr>
+          <p:cNvPr id="6" name="Text 4"/>
+          <p:cNvSpPr/>
+          <p:nvPr/>
+        </p:nvSpPr>
+        <p:spPr>
+          <a:xfrm>
+            <a:off x="731520" y="4114800"/>
+            <a:ext cx="2377440" cy="548640"/>
+          </a:xfrm>
+          <a:prstGeom prst="rect">
+            <a:avLst/>
+          </a:prstGeom>
+          <a:noFill/>
+          <a:ln/>
+        </p:spPr>
+        <p:txBody>
+          <a:bodyPr wrap="square" lIns="0" tIns="0" rIns="0" bIns="0" rtlCol="0" anchor="ctr"/>
+          <a:lstStyle/>
+          <a:p>
+            <a:pPr indent="0" marL="0">
+              <a:buNone/>
+            </a:pPr>
+            <a:r>
+              <a:rPr lang="en-US" sz="2300" b="1" dirty="0">
+                <a:solidFill>
+                  <a:srgbClr val="1E8FA0"/>
                 </a:solidFill>
                 <a:latin typeface="Century Schoolbook" pitchFamily="34" charset="0"/>
                 <a:ea typeface="Century Schoolbook" pitchFamily="34" charset="-122"/>
                 <a:cs typeface="Century Schoolbook" pitchFamily="34" charset="-120"/>
               </a:rPr>
-              <a:t>Problem</a:t>
-            </a:r>
-            <a:endParaRPr lang="en-US" sz="1900" dirty="0"/>
-          </a:p>
-        </p:txBody>
-      </p:sp>
-      <p:sp>
-        <p:nvSpPr>
-          <p:cNvPr id="5" name="Text 3"/>
-          <p:cNvSpPr/>
-          <p:nvPr/>
-        </p:nvSpPr>
-        <p:spPr>
-          <a:xfrm>
-            <a:off x="1005840" y="2578608"/>
-            <a:ext cx="9966960" cy="1188720"/>
-          </a:xfrm>
-          <a:prstGeom prst="rect">
-            <a:avLst/>
-          </a:prstGeom>
-          <a:noFill/>
-          <a:ln/>
-        </p:spPr>
-        <p:txBody>
-          <a:bodyPr wrap="square" lIns="0" tIns="0" rIns="0" bIns="0" rtlCol="0" anchor="ctr"/>
-          <a:lstStyle/>
-          <a:p>
-            <a:pPr indent="0" marL="0">
-              <a:lnSpc>
-                <a:spcPct val="105000"/>
-              </a:lnSpc>
-              <a:buNone/>
-            </a:pPr>
-            <a:r>
-              <a:rPr lang="en-US" sz="1300" dirty="0">
-                <a:solidFill>
-                  <a:srgbClr val="0F2E33"/>
-                </a:solidFill>
-                <a:latin typeface="Calibri" pitchFamily="34" charset="0"/>
-                <a:ea typeface="Calibri" pitchFamily="34" charset="-122"/>
-                <a:cs typeface="Calibri" pitchFamily="34" charset="-120"/>
-              </a:rPr>
-              <a:t>Normal traffic is one summary every ten seconds; to claim scalability I fired 2,000 messages at the queue from 32 parallel workers. But from outside, a non-empty queue is ambiguous — a slow consumer and a dead one look identical — and the emulator runs the Lambda in a single container, so drain time swings wildly and a naive pass/fail test either flakes or lies.</a:t>
-            </a:r>
-            <a:endParaRPr lang="en-US" sz="1300" dirty="0"/>
-          </a:p>
-        </p:txBody>
-      </p:sp>
-      <p:sp>
-        <p:nvSpPr>
-          <p:cNvPr id="6" name="Shape 4"/>
-          <p:cNvSpPr/>
-          <p:nvPr/>
-        </p:nvSpPr>
-        <p:spPr>
-          <a:xfrm>
-            <a:off x="731520" y="4041648"/>
-            <a:ext cx="10698480" cy="1965960"/>
-          </a:xfrm>
-          <a:prstGeom prst="roundRect">
-            <a:avLst>
-              <a:gd name="adj" fmla="val 4651"/>
-            </a:avLst>
-          </a:prstGeom>
-          <a:solidFill>
-            <a:srgbClr val="EDF6F7"/>
-          </a:solidFill>
-          <a:ln w="19050">
+              <a:t>Solution</a:t>
+            </a:r>
+            <a:endParaRPr lang="en-US" sz="2300" dirty="0"/>
+          </a:p>
+        </p:txBody>
+      </p:sp>
+      <p:sp>
+        <p:nvSpPr>
+          <p:cNvPr id="7" name="Shape 5"/>
+          <p:cNvSpPr/>
+          <p:nvPr/>
+        </p:nvSpPr>
+        <p:spPr>
+          <a:xfrm>
+            <a:off x="3200400" y="4069080"/>
+            <a:ext cx="0" cy="1783080"/>
+          </a:xfrm>
+          <a:prstGeom prst="line">
+            <a:avLst/>
+          </a:prstGeom>
+          <a:noFill/>
+          <a:ln w="31750">
             <a:solidFill>
               <a:srgbClr val="1E8FA0"/>
             </a:solidFill>
@@ -3341,53 +3446,14 @@
       </p:sp>
       <p:sp>
         <p:nvSpPr>
-          <p:cNvPr id="7" name="Text 5"/>
-          <p:cNvSpPr/>
-          <p:nvPr/>
-        </p:nvSpPr>
-        <p:spPr>
-          <a:xfrm>
-            <a:off x="1005840" y="4224528"/>
-            <a:ext cx="3657600" cy="457200"/>
-          </a:xfrm>
-          <a:prstGeom prst="rect">
-            <a:avLst/>
-          </a:prstGeom>
-          <a:noFill/>
-          <a:ln/>
-        </p:spPr>
-        <p:txBody>
-          <a:bodyPr wrap="square" lIns="0" tIns="0" rIns="0" bIns="0" rtlCol="0" anchor="ctr"/>
-          <a:lstStyle/>
-          <a:p>
-            <a:pPr indent="0" marL="0">
-              <a:buNone/>
-            </a:pPr>
-            <a:r>
-              <a:rPr lang="en-US" sz="1900" b="1" dirty="0">
-                <a:solidFill>
-                  <a:srgbClr val="1E8FA0"/>
-                </a:solidFill>
-                <a:latin typeface="Century Schoolbook" pitchFamily="34" charset="0"/>
-                <a:ea typeface="Century Schoolbook" pitchFamily="34" charset="-122"/>
-                <a:cs typeface="Century Schoolbook" pitchFamily="34" charset="-120"/>
-              </a:rPr>
-              <a:t>Solution</a:t>
-            </a:r>
-            <a:endParaRPr lang="en-US" sz="1900" dirty="0"/>
-          </a:p>
-        </p:txBody>
-      </p:sp>
-      <p:sp>
-        <p:nvSpPr>
           <p:cNvPr id="8" name="Text 6"/>
           <p:cNvSpPr/>
           <p:nvPr/>
         </p:nvSpPr>
         <p:spPr>
           <a:xfrm>
-            <a:off x="1005840" y="4700016"/>
-            <a:ext cx="9966960" cy="1188720"/>
+            <a:off x="3474720" y="4069080"/>
+            <a:ext cx="7955280" cy="1920240"/>
           </a:xfrm>
           <a:prstGeom prst="rect">
             <a:avLst/>
@@ -3401,12 +3467,12 @@
           <a:p>
             <a:pPr indent="0" marL="0">
               <a:lnSpc>
-                <a:spcPct val="105000"/>
+                <a:spcPct val="112000"/>
               </a:lnSpc>
               <a:buNone/>
             </a:pPr>
             <a:r>
-              <a:rPr lang="en-US" sz="1300" dirty="0">
+              <a:rPr lang="en-US" sz="1450" dirty="0">
                 <a:solidFill>
                   <a:srgbClr val="0F2E33"/>
                 </a:solidFill>
@@ -3416,7 +3482,7 @@
               </a:rPr>
               <a:t>A two-tier check: first assert the queue really absorbed the burst, then require either a full drain in time or a backlog strictly below the post-burst peak. A strictly decreasing backlog proves the consumer is alive and working, not stalled — real progress, not a guess.</a:t>
             </a:r>
-            <a:endParaRPr lang="en-US" sz="1300" dirty="0"/>
+            <a:endParaRPr lang="en-US" sz="1450" dirty="0"/>
           </a:p>
         </p:txBody>
       </p:sp>

--- a/ppt/RakeshKunchala_X25176862_water-treatment-utility.pptx
+++ b/ppt/RakeshKunchala_X25176862_water-treatment-utility.pptx
@@ -2675,12 +2675,12 @@
         </p:nvSpPr>
         <p:spPr>
           <a:xfrm>
-            <a:off x="640080" y="1874520"/>
-            <a:ext cx="3502152" cy="3657600"/>
+            <a:off x="640080" y="1828800"/>
+            <a:ext cx="10881360" cy="1371600"/>
           </a:xfrm>
           <a:prstGeom prst="roundRect">
             <a:avLst>
-              <a:gd name="adj" fmla="val 2611"/>
+              <a:gd name="adj" fmla="val 6667"/>
             </a:avLst>
           </a:prstGeom>
           <a:solidFill>
@@ -2702,8 +2702,8 @@
         </p:nvSpPr>
         <p:spPr>
           <a:xfrm>
-            <a:off x="914400" y="2194560"/>
-            <a:ext cx="640080" cy="640080"/>
+            <a:off x="960120" y="2203704"/>
+            <a:ext cx="621792" cy="621792"/>
           </a:xfrm>
           <a:prstGeom prst="ellipse">
             <a:avLst/>
@@ -2722,8 +2722,8 @@
         </p:nvSpPr>
         <p:spPr>
           <a:xfrm>
-            <a:off x="914400" y="2194560"/>
-            <a:ext cx="640080" cy="640080"/>
+            <a:off x="960120" y="2203704"/>
+            <a:ext cx="621792" cy="621792"/>
           </a:xfrm>
           <a:prstGeom prst="rect">
             <a:avLst/>
@@ -2739,7 +2739,7 @@
               <a:buNone/>
             </a:pPr>
             <a:r>
-              <a:rPr lang="en-US" sz="2400" b="1" dirty="0">
+              <a:rPr lang="en-US" sz="2200" b="1" dirty="0">
                 <a:solidFill>
                   <a:srgbClr val="FFFFFF"/>
                 </a:solidFill>
@@ -2749,7 +2749,7 @@
               </a:rPr>
               <a:t>1</a:t>
             </a:r>
-            <a:endParaRPr lang="en-US" sz="2400" dirty="0"/>
+            <a:endParaRPr lang="en-US" sz="2200" dirty="0"/>
           </a:p>
         </p:txBody>
       </p:sp>
@@ -2761,8 +2761,8 @@
         </p:nvSpPr>
         <p:spPr>
           <a:xfrm>
-            <a:off x="914400" y="3017520"/>
-            <a:ext cx="2953512" cy="822960"/>
+            <a:off x="1828800" y="2029968"/>
+            <a:ext cx="9418320" cy="411480"/>
           </a:xfrm>
           <a:prstGeom prst="rect">
             <a:avLst/>
@@ -2800,8 +2800,8 @@
         </p:nvSpPr>
         <p:spPr>
           <a:xfrm>
-            <a:off x="914400" y="3794760"/>
-            <a:ext cx="2953512" cy="1554480"/>
+            <a:off x="1828800" y="2450592"/>
+            <a:ext cx="9418320" cy="594360"/>
           </a:xfrm>
           <a:prstGeom prst="rect">
             <a:avLst/>
@@ -2842,12 +2842,12 @@
         </p:nvSpPr>
         <p:spPr>
           <a:xfrm>
-            <a:off x="4416552" y="1874520"/>
-            <a:ext cx="3502152" cy="3657600"/>
+            <a:off x="640080" y="3346704"/>
+            <a:ext cx="10881360" cy="1371600"/>
           </a:xfrm>
           <a:prstGeom prst="roundRect">
             <a:avLst>
-              <a:gd name="adj" fmla="val 2611"/>
+              <a:gd name="adj" fmla="val 6667"/>
             </a:avLst>
           </a:prstGeom>
           <a:solidFill>
@@ -2869,8 +2869,8 @@
         </p:nvSpPr>
         <p:spPr>
           <a:xfrm>
-            <a:off x="4690872" y="2194560"/>
-            <a:ext cx="640080" cy="640080"/>
+            <a:off x="960120" y="3721608"/>
+            <a:ext cx="621792" cy="621792"/>
           </a:xfrm>
           <a:prstGeom prst="ellipse">
             <a:avLst/>
@@ -2889,8 +2889,8 @@
         </p:nvSpPr>
         <p:spPr>
           <a:xfrm>
-            <a:off x="4690872" y="2194560"/>
-            <a:ext cx="640080" cy="640080"/>
+            <a:off x="960120" y="3721608"/>
+            <a:ext cx="621792" cy="621792"/>
           </a:xfrm>
           <a:prstGeom prst="rect">
             <a:avLst/>
@@ -2906,7 +2906,7 @@
               <a:buNone/>
             </a:pPr>
             <a:r>
-              <a:rPr lang="en-US" sz="2400" b="1" dirty="0">
+              <a:rPr lang="en-US" sz="2200" b="1" dirty="0">
                 <a:solidFill>
                   <a:srgbClr val="FFFFFF"/>
                 </a:solidFill>
@@ -2916,7 +2916,7 @@
               </a:rPr>
               <a:t>2</a:t>
             </a:r>
-            <a:endParaRPr lang="en-US" sz="2400" dirty="0"/>
+            <a:endParaRPr lang="en-US" sz="2200" dirty="0"/>
           </a:p>
         </p:txBody>
       </p:sp>
@@ -2928,8 +2928,8 @@
         </p:nvSpPr>
         <p:spPr>
           <a:xfrm>
-            <a:off x="4690872" y="3017520"/>
-            <a:ext cx="2953512" cy="822960"/>
+            <a:off x="1828800" y="3547872"/>
+            <a:ext cx="9418320" cy="411480"/>
           </a:xfrm>
           <a:prstGeom prst="rect">
             <a:avLst/>
@@ -2967,8 +2967,8 @@
         </p:nvSpPr>
         <p:spPr>
           <a:xfrm>
-            <a:off x="4690872" y="3794760"/>
-            <a:ext cx="2953512" cy="1554480"/>
+            <a:off x="1828800" y="3968496"/>
+            <a:ext cx="9418320" cy="594360"/>
           </a:xfrm>
           <a:prstGeom prst="rect">
             <a:avLst/>
@@ -3009,12 +3009,12 @@
         </p:nvSpPr>
         <p:spPr>
           <a:xfrm>
-            <a:off x="8193024" y="1874520"/>
-            <a:ext cx="3502152" cy="3657600"/>
+            <a:off x="640080" y="4864608"/>
+            <a:ext cx="10881360" cy="1371600"/>
           </a:xfrm>
           <a:prstGeom prst="roundRect">
             <a:avLst>
-              <a:gd name="adj" fmla="val 2611"/>
+              <a:gd name="adj" fmla="val 6667"/>
             </a:avLst>
           </a:prstGeom>
           <a:solidFill>
@@ -3036,8 +3036,8 @@
         </p:nvSpPr>
         <p:spPr>
           <a:xfrm>
-            <a:off x="8467344" y="2194560"/>
-            <a:ext cx="640080" cy="640080"/>
+            <a:off x="960120" y="5239512"/>
+            <a:ext cx="621792" cy="621792"/>
           </a:xfrm>
           <a:prstGeom prst="ellipse">
             <a:avLst/>
@@ -3056,8 +3056,8 @@
         </p:nvSpPr>
         <p:spPr>
           <a:xfrm>
-            <a:off x="8467344" y="2194560"/>
-            <a:ext cx="640080" cy="640080"/>
+            <a:off x="960120" y="5239512"/>
+            <a:ext cx="621792" cy="621792"/>
           </a:xfrm>
           <a:prstGeom prst="rect">
             <a:avLst/>
@@ -3073,7 +3073,7 @@
               <a:buNone/>
             </a:pPr>
             <a:r>
-              <a:rPr lang="en-US" sz="2400" b="1" dirty="0">
+              <a:rPr lang="en-US" sz="2200" b="1" dirty="0">
                 <a:solidFill>
                   <a:srgbClr val="FFFFFF"/>
                 </a:solidFill>
@@ -3083,7 +3083,7 @@
               </a:rPr>
               <a:t>3</a:t>
             </a:r>
-            <a:endParaRPr lang="en-US" sz="2400" dirty="0"/>
+            <a:endParaRPr lang="en-US" sz="2200" dirty="0"/>
           </a:p>
         </p:txBody>
       </p:sp>
@@ -3095,8 +3095,8 @@
         </p:nvSpPr>
         <p:spPr>
           <a:xfrm>
-            <a:off x="8467344" y="3017520"/>
-            <a:ext cx="2953512" cy="822960"/>
+            <a:off x="1828800" y="5065776"/>
+            <a:ext cx="9418320" cy="411480"/>
           </a:xfrm>
           <a:prstGeom prst="rect">
             <a:avLst/>
@@ -3134,8 +3134,8 @@
         </p:nvSpPr>
         <p:spPr>
           <a:xfrm>
-            <a:off x="8467344" y="3794760"/>
-            <a:ext cx="2953512" cy="1554480"/>
+            <a:off x="1828800" y="5486400"/>
+            <a:ext cx="9418320" cy="594360"/>
           </a:xfrm>
           <a:prstGeom prst="rect">
             <a:avLst/>
@@ -3163,45 +3163,6 @@
                 <a:cs typeface="Calibri" pitchFamily="34" charset="-120"/>
               </a:rPr>
               <a:t>The trend charts run both plants side by side, so an under-chlorination drift is visible as it develops.</a:t>
-            </a:r>
-            <a:endParaRPr lang="en-US" sz="1300" dirty="0"/>
-          </a:p>
-        </p:txBody>
-      </p:sp>
-      <p:sp>
-        <p:nvSpPr>
-          <p:cNvPr id="19" name="Text 17"/>
-          <p:cNvSpPr/>
-          <p:nvPr/>
-        </p:nvSpPr>
-        <p:spPr>
-          <a:xfrm>
-            <a:off x="640080" y="6263640"/>
-            <a:ext cx="10972800" cy="365760"/>
-          </a:xfrm>
-          <a:prstGeom prst="rect">
-            <a:avLst/>
-          </a:prstGeom>
-          <a:noFill/>
-          <a:ln/>
-        </p:spPr>
-        <p:txBody>
-          <a:bodyPr wrap="square" rtlCol="0" anchor="ctr"/>
-          <a:lstStyle/>
-          <a:p>
-            <a:pPr indent="0" marL="0">
-              <a:buNone/>
-            </a:pPr>
-            <a:r>
-              <a:rPr lang="en-US" sz="1300" i="1" dirty="0">
-                <a:solidFill>
-                  <a:srgbClr val="4FAAB6"/>
-                </a:solidFill>
-                <a:latin typeface="Calibri" pitchFamily="34" charset="0"/>
-                <a:ea typeface="Calibri" pitchFamily="34" charset="-122"/>
-                <a:cs typeface="Calibri" pitchFamily="34" charset="-120"/>
-              </a:rPr>
-              <a:t>Switch to the live dashboard here — backup video ready.</a:t>
             </a:r>
             <a:endParaRPr lang="en-US" sz="1300" dirty="0"/>
           </a:p>
@@ -3280,59 +3241,24 @@
       </p:sp>
       <p:sp>
         <p:nvSpPr>
-          <p:cNvPr id="3" name="Text 1"/>
-          <p:cNvSpPr/>
-          <p:nvPr/>
-        </p:nvSpPr>
-        <p:spPr>
-          <a:xfrm>
-            <a:off x="731520" y="1965960"/>
-            <a:ext cx="2377440" cy="548640"/>
-          </a:xfrm>
-          <a:prstGeom prst="rect">
-            <a:avLst/>
-          </a:prstGeom>
-          <a:noFill/>
-          <a:ln/>
-        </p:spPr>
-        <p:txBody>
-          <a:bodyPr wrap="square" lIns="0" tIns="0" rIns="0" bIns="0" rtlCol="0" anchor="ctr"/>
-          <a:lstStyle/>
-          <a:p>
-            <a:pPr indent="0" marL="0">
-              <a:buNone/>
-            </a:pPr>
-            <a:r>
-              <a:rPr lang="en-US" sz="2300" b="1" dirty="0">
-                <a:solidFill>
-                  <a:srgbClr val="E4A63C"/>
-                </a:solidFill>
-                <a:latin typeface="Century Schoolbook" pitchFamily="34" charset="0"/>
-                <a:ea typeface="Century Schoolbook" pitchFamily="34" charset="-122"/>
-                <a:cs typeface="Century Schoolbook" pitchFamily="34" charset="-120"/>
-              </a:rPr>
-              <a:t>Problem</a:t>
-            </a:r>
-            <a:endParaRPr lang="en-US" sz="2300" dirty="0"/>
-          </a:p>
-        </p:txBody>
-      </p:sp>
-      <p:sp>
-        <p:nvSpPr>
-          <p:cNvPr id="4" name="Shape 2"/>
-          <p:cNvSpPr/>
-          <p:nvPr/>
-        </p:nvSpPr>
-        <p:spPr>
-          <a:xfrm>
-            <a:off x="3200400" y="1920240"/>
-            <a:ext cx="0" cy="1783080"/>
-          </a:xfrm>
-          <a:prstGeom prst="line">
-            <a:avLst/>
-          </a:prstGeom>
-          <a:noFill/>
-          <a:ln w="31750">
+          <p:cNvPr id="3" name="Shape 1"/>
+          <p:cNvSpPr/>
+          <p:nvPr/>
+        </p:nvSpPr>
+        <p:spPr>
+          <a:xfrm>
+            <a:off x="731520" y="1920240"/>
+            <a:ext cx="10698480" cy="1965960"/>
+          </a:xfrm>
+          <a:prstGeom prst="roundRect">
+            <a:avLst>
+              <a:gd name="adj" fmla="val 4651"/>
+            </a:avLst>
+          </a:prstGeom>
+          <a:solidFill>
+            <a:srgbClr val="EDF6F7"/>
+          </a:solidFill>
+          <a:ln w="19050">
             <a:solidFill>
               <a:srgbClr val="E4A63C"/>
             </a:solidFill>
@@ -3342,14 +3268,53 @@
       </p:sp>
       <p:sp>
         <p:nvSpPr>
+          <p:cNvPr id="4" name="Text 2"/>
+          <p:cNvSpPr/>
+          <p:nvPr/>
+        </p:nvSpPr>
+        <p:spPr>
+          <a:xfrm>
+            <a:off x="1005840" y="2103120"/>
+            <a:ext cx="3657600" cy="457200"/>
+          </a:xfrm>
+          <a:prstGeom prst="rect">
+            <a:avLst/>
+          </a:prstGeom>
+          <a:noFill/>
+          <a:ln/>
+        </p:spPr>
+        <p:txBody>
+          <a:bodyPr wrap="square" lIns="0" tIns="0" rIns="0" bIns="0" rtlCol="0" anchor="ctr"/>
+          <a:lstStyle/>
+          <a:p>
+            <a:pPr indent="0" marL="0">
+              <a:buNone/>
+            </a:pPr>
+            <a:r>
+              <a:rPr lang="en-US" sz="1900" b="1" dirty="0">
+                <a:solidFill>
+                  <a:srgbClr val="E4A63C"/>
+                </a:solidFill>
+                <a:latin typeface="Century Schoolbook" pitchFamily="34" charset="0"/>
+                <a:ea typeface="Century Schoolbook" pitchFamily="34" charset="-122"/>
+                <a:cs typeface="Century Schoolbook" pitchFamily="34" charset="-120"/>
+              </a:rPr>
+              <a:t>Problem</a:t>
+            </a:r>
+            <a:endParaRPr lang="en-US" sz="1900" dirty="0"/>
+          </a:p>
+        </p:txBody>
+      </p:sp>
+      <p:sp>
+        <p:nvSpPr>
           <p:cNvPr id="5" name="Text 3"/>
           <p:cNvSpPr/>
           <p:nvPr/>
         </p:nvSpPr>
         <p:spPr>
           <a:xfrm>
-            <a:off x="3474720" y="1920240"/>
-            <a:ext cx="7955280" cy="1920240"/>
+            <a:off x="1005840" y="2578608"/>
+            <a:ext cx="9966960" cy="1188720"/>
           </a:xfrm>
           <a:prstGeom prst="rect">
             <a:avLst/>
@@ -3363,12 +3328,12 @@
           <a:p>
             <a:pPr indent="0" marL="0">
               <a:lnSpc>
-                <a:spcPct val="112000"/>
+                <a:spcPct val="105000"/>
               </a:lnSpc>
               <a:buNone/>
             </a:pPr>
             <a:r>
-              <a:rPr lang="en-US" sz="1450" dirty="0">
+              <a:rPr lang="en-US" sz="1300" dirty="0">
                 <a:solidFill>
                   <a:srgbClr val="0F2E33"/>
                 </a:solidFill>
@@ -3378,65 +3343,30 @@
               </a:rPr>
               <a:t>Normal traffic is one summary every ten seconds; to claim scalability I fired 2,000 messages at the queue from 32 parallel workers. But from outside, a non-empty queue is ambiguous — a slow consumer and a dead one look identical — and the emulator runs the Lambda in a single container, so drain time swings wildly and a naive pass/fail test either flakes or lies.</a:t>
             </a:r>
-            <a:endParaRPr lang="en-US" sz="1450" dirty="0"/>
-          </a:p>
-        </p:txBody>
-      </p:sp>
-      <p:sp>
-        <p:nvSpPr>
-          <p:cNvPr id="6" name="Text 4"/>
-          <p:cNvSpPr/>
-          <p:nvPr/>
-        </p:nvSpPr>
-        <p:spPr>
-          <a:xfrm>
-            <a:off x="731520" y="4114800"/>
-            <a:ext cx="2377440" cy="548640"/>
-          </a:xfrm>
-          <a:prstGeom prst="rect">
-            <a:avLst/>
-          </a:prstGeom>
-          <a:noFill/>
-          <a:ln/>
-        </p:spPr>
-        <p:txBody>
-          <a:bodyPr wrap="square" lIns="0" tIns="0" rIns="0" bIns="0" rtlCol="0" anchor="ctr"/>
-          <a:lstStyle/>
-          <a:p>
-            <a:pPr indent="0" marL="0">
-              <a:buNone/>
-            </a:pPr>
-            <a:r>
-              <a:rPr lang="en-US" sz="2300" b="1" dirty="0">
-                <a:solidFill>
-                  <a:srgbClr val="1E8FA0"/>
-                </a:solidFill>
-                <a:latin typeface="Century Schoolbook" pitchFamily="34" charset="0"/>
-                <a:ea typeface="Century Schoolbook" pitchFamily="34" charset="-122"/>
-                <a:cs typeface="Century Schoolbook" pitchFamily="34" charset="-120"/>
-              </a:rPr>
-              <a:t>Solution</a:t>
-            </a:r>
-            <a:endParaRPr lang="en-US" sz="2300" dirty="0"/>
-          </a:p>
-        </p:txBody>
-      </p:sp>
-      <p:sp>
-        <p:nvSpPr>
-          <p:cNvPr id="7" name="Shape 5"/>
-          <p:cNvSpPr/>
-          <p:nvPr/>
-        </p:nvSpPr>
-        <p:spPr>
-          <a:xfrm>
-            <a:off x="3200400" y="4069080"/>
-            <a:ext cx="0" cy="1783080"/>
-          </a:xfrm>
-          <a:prstGeom prst="line">
-            <a:avLst/>
-          </a:prstGeom>
-          <a:noFill/>
-          <a:ln w="31750">
+            <a:endParaRPr lang="en-US" sz="1300" dirty="0"/>
+          </a:p>
+        </p:txBody>
+      </p:sp>
+      <p:sp>
+        <p:nvSpPr>
+          <p:cNvPr id="6" name="Shape 4"/>
+          <p:cNvSpPr/>
+          <p:nvPr/>
+        </p:nvSpPr>
+        <p:spPr>
+          <a:xfrm>
+            <a:off x="731520" y="4041648"/>
+            <a:ext cx="10698480" cy="1965960"/>
+          </a:xfrm>
+          <a:prstGeom prst="roundRect">
+            <a:avLst>
+              <a:gd name="adj" fmla="val 4651"/>
+            </a:avLst>
+          </a:prstGeom>
+          <a:solidFill>
+            <a:srgbClr val="EDF6F7"/>
+          </a:solidFill>
+          <a:ln w="19050">
             <a:solidFill>
               <a:srgbClr val="1E8FA0"/>
             </a:solidFill>
@@ -3446,14 +3376,53 @@
       </p:sp>
       <p:sp>
         <p:nvSpPr>
+          <p:cNvPr id="7" name="Text 5"/>
+          <p:cNvSpPr/>
+          <p:nvPr/>
+        </p:nvSpPr>
+        <p:spPr>
+          <a:xfrm>
+            <a:off x="1005840" y="4224528"/>
+            <a:ext cx="3657600" cy="457200"/>
+          </a:xfrm>
+          <a:prstGeom prst="rect">
+            <a:avLst/>
+          </a:prstGeom>
+          <a:noFill/>
+          <a:ln/>
+        </p:spPr>
+        <p:txBody>
+          <a:bodyPr wrap="square" lIns="0" tIns="0" rIns="0" bIns="0" rtlCol="0" anchor="ctr"/>
+          <a:lstStyle/>
+          <a:p>
+            <a:pPr indent="0" marL="0">
+              <a:buNone/>
+            </a:pPr>
+            <a:r>
+              <a:rPr lang="en-US" sz="1900" b="1" dirty="0">
+                <a:solidFill>
+                  <a:srgbClr val="1E8FA0"/>
+                </a:solidFill>
+                <a:latin typeface="Century Schoolbook" pitchFamily="34" charset="0"/>
+                <a:ea typeface="Century Schoolbook" pitchFamily="34" charset="-122"/>
+                <a:cs typeface="Century Schoolbook" pitchFamily="34" charset="-120"/>
+              </a:rPr>
+              <a:t>Solution</a:t>
+            </a:r>
+            <a:endParaRPr lang="en-US" sz="1900" dirty="0"/>
+          </a:p>
+        </p:txBody>
+      </p:sp>
+      <p:sp>
+        <p:nvSpPr>
           <p:cNvPr id="8" name="Text 6"/>
           <p:cNvSpPr/>
           <p:nvPr/>
         </p:nvSpPr>
         <p:spPr>
           <a:xfrm>
-            <a:off x="3474720" y="4069080"/>
-            <a:ext cx="7955280" cy="1920240"/>
+            <a:off x="1005840" y="4700016"/>
+            <a:ext cx="9966960" cy="1188720"/>
           </a:xfrm>
           <a:prstGeom prst="rect">
             <a:avLst/>
@@ -3467,12 +3436,12 @@
           <a:p>
             <a:pPr indent="0" marL="0">
               <a:lnSpc>
-                <a:spcPct val="112000"/>
+                <a:spcPct val="105000"/>
               </a:lnSpc>
               <a:buNone/>
             </a:pPr>
             <a:r>
-              <a:rPr lang="en-US" sz="1450" dirty="0">
+              <a:rPr lang="en-US" sz="1300" dirty="0">
                 <a:solidFill>
                   <a:srgbClr val="0F2E33"/>
                 </a:solidFill>
@@ -3482,7 +3451,7 @@
               </a:rPr>
               <a:t>A two-tier check: first assert the queue really absorbed the burst, then require either a full drain in time or a backlog strictly below the post-burst peak. A strictly decreasing backlog proves the consumer is alive and working, not stalled — real progress, not a guess.</a:t>
             </a:r>
-            <a:endParaRPr lang="en-US" sz="1450" dirty="0"/>
+            <a:endParaRPr lang="en-US" sz="1300" dirty="0"/>
           </a:p>
         </p:txBody>
       </p:sp>

--- a/ppt/RakeshKunchala_X25176862_water-treatment-utility.pptx
+++ b/ppt/RakeshKunchala_X25176862_water-treatment-utility.pptx
@@ -1283,7 +1283,7 @@
           </a:solidFill>
           <a:ln w="12700">
             <a:solidFill>
-              <a:srgbClr val="E4A63C"/>
+              <a:srgbClr val="1E8FA0"/>
             </a:solidFill>
             <a:prstDash val="solid"/>
           </a:ln>
@@ -1349,7 +1349,7 @@
           </a:solidFill>
           <a:ln w="12700">
             <a:solidFill>
-              <a:srgbClr val="E4A63C"/>
+              <a:srgbClr val="1E8FA0"/>
             </a:solidFill>
             <a:prstDash val="solid"/>
           </a:ln>
@@ -1415,7 +1415,7 @@
           </a:solidFill>
           <a:ln w="12700">
             <a:solidFill>
-              <a:srgbClr val="E4A63C"/>
+              <a:srgbClr val="1E8FA0"/>
             </a:solidFill>
             <a:prstDash val="solid"/>
           </a:ln>
@@ -1484,17 +1484,6 @@
             <a:pPr indent="0" marL="0">
               <a:buNone/>
             </a:pPr>
-            <a:r>
-              <a:rPr lang="en-US" sz="1300" dirty="0">
-                <a:solidFill>
-                  <a:srgbClr val="567478"/>
-                </a:solidFill>
-                <a:latin typeface="Calibri" pitchFamily="34" charset="0"/>
-                <a:ea typeface="Calibri" pitchFamily="34" charset="-122"/>
-                <a:cs typeface="Calibri" pitchFamily="34" charset="-120"/>
-              </a:rPr>
-              <a:t>Fog &amp; Edge Computing (H9FECC)   ·   deployed live on AWS</a:t>
-            </a:r>
             <a:endParaRPr lang="en-US" sz="1300" dirty="0"/>
           </a:p>
         </p:txBody>

--- a/ppt/RakeshKunchala_X25176862_water-treatment-utility.pptx
+++ b/ppt/RakeshKunchala_X25176862_water-treatment-utility.pptx
@@ -1124,7 +1124,7 @@
     <p:bg>
       <p:bgPr>
         <a:solidFill>
-          <a:srgbClr val="0E2E34"/>
+          <a:srgbClr val="EEF4F9"/>
         </a:solidFill>
       </p:bgPr>
     </p:bg>
@@ -1144,14 +1144,54 @@
       </p:grpSpPr>
       <p:sp>
         <p:nvSpPr>
-          <p:cNvPr id="2" name="Text 0"/>
-          <p:cNvSpPr/>
-          <p:nvPr/>
-        </p:nvSpPr>
-        <p:spPr>
-          <a:xfrm>
-            <a:off x="640080" y="914400"/>
-            <a:ext cx="10972800" cy="1280160"/>
+          <p:cNvPr id="2" name="Shape 0"/>
+          <p:cNvSpPr/>
+          <p:nvPr/>
+        </p:nvSpPr>
+        <p:spPr>
+          <a:xfrm>
+            <a:off x="0" y="0"/>
+            <a:ext cx="12191695" cy="960120"/>
+          </a:xfrm>
+          <a:prstGeom prst="rect">
+            <a:avLst/>
+          </a:prstGeom>
+          <a:solidFill>
+            <a:srgbClr val="E6ECF1"/>
+          </a:solidFill>
+          <a:ln/>
+        </p:spPr>
+      </p:sp>
+      <p:sp>
+        <p:nvSpPr>
+          <p:cNvPr id="3" name="Shape 1"/>
+          <p:cNvSpPr/>
+          <p:nvPr/>
+        </p:nvSpPr>
+        <p:spPr>
+          <a:xfrm>
+            <a:off x="0" y="960120"/>
+            <a:ext cx="12191695" cy="54864"/>
+          </a:xfrm>
+          <a:prstGeom prst="rect">
+            <a:avLst/>
+          </a:prstGeom>
+          <a:solidFill>
+            <a:srgbClr val="1C6EA4"/>
+          </a:solidFill>
+          <a:ln/>
+        </p:spPr>
+      </p:sp>
+      <p:sp>
+        <p:nvSpPr>
+          <p:cNvPr id="4" name="Text 2"/>
+          <p:cNvSpPr/>
+          <p:nvPr/>
+        </p:nvSpPr>
+        <p:spPr>
+          <a:xfrm>
+            <a:off x="758952" y="1874520"/>
+            <a:ext cx="10637215" cy="1645920"/>
           </a:xfrm>
           <a:prstGeom prst="rect">
             <a:avLst/>
@@ -1164,12 +1204,15 @@
           <a:lstStyle/>
           <a:p>
             <a:pPr indent="0" marL="0">
+              <a:lnSpc>
+                <a:spcPct val="98000"/>
+              </a:lnSpc>
               <a:buNone/>
             </a:pPr>
             <a:r>
               <a:rPr lang="en-US" sz="3800" b="1" dirty="0">
                 <a:solidFill>
-                  <a:srgbClr val="FFFFFF"/>
+                  <a:srgbClr val="14304A"/>
                 </a:solidFill>
                 <a:latin typeface="Century Schoolbook" pitchFamily="34" charset="0"/>
                 <a:ea typeface="Century Schoolbook" pitchFamily="34" charset="-122"/>
@@ -1183,14 +1226,14 @@
       </p:sp>
       <p:sp>
         <p:nvSpPr>
-          <p:cNvPr id="3" name="Text 1"/>
-          <p:cNvSpPr/>
-          <p:nvPr/>
-        </p:nvSpPr>
-        <p:spPr>
-          <a:xfrm>
-            <a:off x="658368" y="2148840"/>
-            <a:ext cx="10972800" cy="365760"/>
+          <p:cNvPr id="5" name="Text 3"/>
+          <p:cNvSpPr/>
+          <p:nvPr/>
+        </p:nvSpPr>
+        <p:spPr>
+          <a:xfrm>
+            <a:off x="777240" y="3566160"/>
+            <a:ext cx="10637215" cy="365760"/>
           </a:xfrm>
           <a:prstGeom prst="rect">
             <a:avLst/>
@@ -1206,9 +1249,9 @@
               <a:buNone/>
             </a:pPr>
             <a:r>
-              <a:rPr lang="en-US" sz="1600" dirty="0">
-                <a:solidFill>
-                  <a:srgbClr val="4FAAB6"/>
+              <a:rPr lang="en-US" sz="1450" dirty="0">
+                <a:solidFill>
+                  <a:srgbClr val="5F6B74"/>
                 </a:solidFill>
                 <a:latin typeface="Calibri" pitchFamily="34" charset="0"/>
                 <a:ea typeface="Calibri" pitchFamily="34" charset="-122"/>
@@ -1216,41 +1259,41 @@
               </a:rPr>
               <a:t>Rakesh Kunchala   ·   X25176862</a:t>
             </a:r>
-            <a:endParaRPr lang="en-US" sz="1600" dirty="0"/>
-          </a:p>
-        </p:txBody>
-      </p:sp>
-      <p:sp>
-        <p:nvSpPr>
-          <p:cNvPr id="4" name="Text 2"/>
-          <p:cNvSpPr/>
-          <p:nvPr/>
-        </p:nvSpPr>
-        <p:spPr>
-          <a:xfrm>
-            <a:off x="658368" y="2697480"/>
-            <a:ext cx="10424160" cy="1371600"/>
-          </a:xfrm>
-          <a:prstGeom prst="rect">
-            <a:avLst/>
-          </a:prstGeom>
-          <a:noFill/>
-          <a:ln/>
-        </p:spPr>
-        <p:txBody>
-          <a:bodyPr wrap="square" rtlCol="0" anchor="ctr"/>
+            <a:endParaRPr lang="en-US" sz="1450" dirty="0"/>
+          </a:p>
+        </p:txBody>
+      </p:sp>
+      <p:sp>
+        <p:nvSpPr>
+          <p:cNvPr id="6" name="Text 4"/>
+          <p:cNvSpPr/>
+          <p:nvPr/>
+        </p:nvSpPr>
+        <p:spPr>
+          <a:xfrm>
+            <a:off x="777240" y="4160520"/>
+            <a:ext cx="8138160" cy="1097280"/>
+          </a:xfrm>
+          <a:prstGeom prst="rect">
+            <a:avLst/>
+          </a:prstGeom>
+          <a:noFill/>
+          <a:ln/>
+        </p:spPr>
+        <p:txBody>
+          <a:bodyPr wrap="square" rtlCol="0" anchor="t"/>
           <a:lstStyle/>
           <a:p>
             <a:pPr indent="0" marL="0">
               <a:lnSpc>
-                <a:spcPct val="110000"/>
+                <a:spcPct val="130000"/>
               </a:lnSpc>
               <a:buNone/>
             </a:pPr>
             <a:r>
-              <a:rPr lang="en-US" sz="2000" dirty="0">
-                <a:solidFill>
-                  <a:srgbClr val="CEE7EB"/>
+              <a:rPr lang="en-US" sz="1400" dirty="0">
+                <a:solidFill>
+                  <a:srgbClr val="14304A"/>
                 </a:solidFill>
                 <a:latin typeface="Calibri" pitchFamily="34" charset="0"/>
                 <a:ea typeface="Calibri" pitchFamily="34" charset="-122"/>
@@ -1258,233 +1301,7 @@
               </a:rPr>
               <a:t>Treatment quality moves second by second, and a momentary pressure drop can mean a hydraulic fault even when the daily mean looks perfectly healthy — transient events vanish into averages.</a:t>
             </a:r>
-            <a:endParaRPr lang="en-US" sz="2000" dirty="0"/>
-          </a:p>
-        </p:txBody>
-      </p:sp>
-      <p:sp>
-        <p:nvSpPr>
-          <p:cNvPr id="5" name="Shape 3"/>
-          <p:cNvSpPr/>
-          <p:nvPr/>
-        </p:nvSpPr>
-        <p:spPr>
-          <a:xfrm>
-            <a:off x="658368" y="4206240"/>
-            <a:ext cx="2651760" cy="566928"/>
-          </a:xfrm>
-          <a:prstGeom prst="roundRect">
-            <a:avLst>
-              <a:gd name="adj" fmla="val 50000"/>
-            </a:avLst>
-          </a:prstGeom>
-          <a:solidFill>
-            <a:srgbClr val="143A40"/>
-          </a:solidFill>
-          <a:ln w="12700">
-            <a:solidFill>
-              <a:srgbClr val="1E8FA0"/>
-            </a:solidFill>
-            <a:prstDash val="solid"/>
-          </a:ln>
-        </p:spPr>
-      </p:sp>
-      <p:sp>
-        <p:nvSpPr>
-          <p:cNvPr id="6" name="Text 4"/>
-          <p:cNvSpPr/>
-          <p:nvPr/>
-        </p:nvSpPr>
-        <p:spPr>
-          <a:xfrm>
-            <a:off x="658368" y="4206240"/>
-            <a:ext cx="2651760" cy="566928"/>
-          </a:xfrm>
-          <a:prstGeom prst="rect">
-            <a:avLst/>
-          </a:prstGeom>
-          <a:noFill/>
-          <a:ln/>
-        </p:spPr>
-        <p:txBody>
-          <a:bodyPr wrap="square" lIns="0" tIns="0" rIns="0" bIns="0" rtlCol="0" anchor="ctr"/>
-          <a:lstStyle/>
-          <a:p>
-            <a:pPr algn="ctr" indent="0" marL="0">
-              <a:buNone/>
-            </a:pPr>
-            <a:r>
-              <a:rPr lang="en-US" sz="1350" b="1" dirty="0">
-                <a:solidFill>
-                  <a:srgbClr val="E4A63C"/>
-                </a:solidFill>
-                <a:latin typeface="Calibri" pitchFamily="34" charset="0"/>
-                <a:ea typeface="Calibri" pitchFamily="34" charset="-122"/>
-                <a:cs typeface="Calibri" pitchFamily="34" charset="-120"/>
-              </a:rPr>
-              <a:t>Pressure &lt; 2 bar (min)</a:t>
-            </a:r>
-            <a:endParaRPr lang="en-US" sz="1350" dirty="0"/>
-          </a:p>
-        </p:txBody>
-      </p:sp>
-      <p:sp>
-        <p:nvSpPr>
-          <p:cNvPr id="7" name="Shape 5"/>
-          <p:cNvSpPr/>
-          <p:nvPr/>
-        </p:nvSpPr>
-        <p:spPr>
-          <a:xfrm>
-            <a:off x="3538728" y="4206240"/>
-            <a:ext cx="2651760" cy="566928"/>
-          </a:xfrm>
-          <a:prstGeom prst="roundRect">
-            <a:avLst>
-              <a:gd name="adj" fmla="val 50000"/>
-            </a:avLst>
-          </a:prstGeom>
-          <a:solidFill>
-            <a:srgbClr val="143A40"/>
-          </a:solidFill>
-          <a:ln w="12700">
-            <a:solidFill>
-              <a:srgbClr val="1E8FA0"/>
-            </a:solidFill>
-            <a:prstDash val="solid"/>
-          </a:ln>
-        </p:spPr>
-      </p:sp>
-      <p:sp>
-        <p:nvSpPr>
-          <p:cNvPr id="8" name="Text 6"/>
-          <p:cNvSpPr/>
-          <p:nvPr/>
-        </p:nvSpPr>
-        <p:spPr>
-          <a:xfrm>
-            <a:off x="3538728" y="4206240"/>
-            <a:ext cx="2651760" cy="566928"/>
-          </a:xfrm>
-          <a:prstGeom prst="rect">
-            <a:avLst/>
-          </a:prstGeom>
-          <a:noFill/>
-          <a:ln/>
-        </p:spPr>
-        <p:txBody>
-          <a:bodyPr wrap="square" lIns="0" tIns="0" rIns="0" bIns="0" rtlCol="0" anchor="ctr"/>
-          <a:lstStyle/>
-          <a:p>
-            <a:pPr algn="ctr" indent="0" marL="0">
-              <a:buNone/>
-            </a:pPr>
-            <a:r>
-              <a:rPr lang="en-US" sz="1350" b="1" dirty="0">
-                <a:solidFill>
-                  <a:srgbClr val="E4A63C"/>
-                </a:solidFill>
-                <a:latin typeface="Calibri" pitchFamily="34" charset="0"/>
-                <a:ea typeface="Calibri" pitchFamily="34" charset="-122"/>
-                <a:cs typeface="Calibri" pitchFamily="34" charset="-120"/>
-              </a:rPr>
-              <a:t>Chlorine &lt; 0.2 ppm</a:t>
-            </a:r>
-            <a:endParaRPr lang="en-US" sz="1350" dirty="0"/>
-          </a:p>
-        </p:txBody>
-      </p:sp>
-      <p:sp>
-        <p:nvSpPr>
-          <p:cNvPr id="9" name="Shape 7"/>
-          <p:cNvSpPr/>
-          <p:nvPr/>
-        </p:nvSpPr>
-        <p:spPr>
-          <a:xfrm>
-            <a:off x="6419088" y="4206240"/>
-            <a:ext cx="2651760" cy="566928"/>
-          </a:xfrm>
-          <a:prstGeom prst="roundRect">
-            <a:avLst>
-              <a:gd name="adj" fmla="val 50000"/>
-            </a:avLst>
-          </a:prstGeom>
-          <a:solidFill>
-            <a:srgbClr val="143A40"/>
-          </a:solidFill>
-          <a:ln w="12700">
-            <a:solidFill>
-              <a:srgbClr val="1E8FA0"/>
-            </a:solidFill>
-            <a:prstDash val="solid"/>
-          </a:ln>
-        </p:spPr>
-      </p:sp>
-      <p:sp>
-        <p:nvSpPr>
-          <p:cNvPr id="10" name="Text 8"/>
-          <p:cNvSpPr/>
-          <p:nvPr/>
-        </p:nvSpPr>
-        <p:spPr>
-          <a:xfrm>
-            <a:off x="6419088" y="4206240"/>
-            <a:ext cx="2651760" cy="566928"/>
-          </a:xfrm>
-          <a:prstGeom prst="rect">
-            <a:avLst/>
-          </a:prstGeom>
-          <a:noFill/>
-          <a:ln/>
-        </p:spPr>
-        <p:txBody>
-          <a:bodyPr wrap="square" lIns="0" tIns="0" rIns="0" bIns="0" rtlCol="0" anchor="ctr"/>
-          <a:lstStyle/>
-          <a:p>
-            <a:pPr algn="ctr" indent="0" marL="0">
-              <a:buNone/>
-            </a:pPr>
-            <a:r>
-              <a:rPr lang="en-US" sz="1350" b="1" dirty="0">
-                <a:solidFill>
-                  <a:srgbClr val="E4A63C"/>
-                </a:solidFill>
-                <a:latin typeface="Calibri" pitchFamily="34" charset="0"/>
-                <a:ea typeface="Calibri" pitchFamily="34" charset="-122"/>
-                <a:cs typeface="Calibri" pitchFamily="34" charset="-120"/>
-              </a:rPr>
-              <a:t>10 s window score</a:t>
-            </a:r>
-            <a:endParaRPr lang="en-US" sz="1350" dirty="0"/>
-          </a:p>
-        </p:txBody>
-      </p:sp>
-      <p:sp>
-        <p:nvSpPr>
-          <p:cNvPr id="11" name="Text 9"/>
-          <p:cNvSpPr/>
-          <p:nvPr/>
-        </p:nvSpPr>
-        <p:spPr>
-          <a:xfrm>
-            <a:off x="658368" y="6126480"/>
-            <a:ext cx="10972800" cy="365760"/>
-          </a:xfrm>
-          <a:prstGeom prst="rect">
-            <a:avLst/>
-          </a:prstGeom>
-          <a:noFill/>
-          <a:ln/>
-        </p:spPr>
-        <p:txBody>
-          <a:bodyPr wrap="square" rtlCol="0" anchor="ctr"/>
-          <a:lstStyle/>
-          <a:p>
-            <a:pPr indent="0" marL="0">
-              <a:buNone/>
-            </a:pPr>
-            <a:endParaRPr lang="en-US" sz="1300" dirty="0"/>
+            <a:endParaRPr lang="en-US" sz="1400" dirty="0"/>
           </a:p>
         </p:txBody>
       </p:sp>
@@ -1502,7 +1319,7 @@
     <p:bg>
       <p:bgPr>
         <a:solidFill>
-          <a:srgbClr val="FFFFFF"/>
+          <a:srgbClr val="EEF4F9"/>
         </a:solidFill>
       </p:bgPr>
     </p:bg>
@@ -1522,23 +1339,63 @@
       </p:grpSpPr>
       <p:sp>
         <p:nvSpPr>
-          <p:cNvPr id="2" name="Text 0"/>
-          <p:cNvSpPr/>
-          <p:nvPr/>
-        </p:nvSpPr>
-        <p:spPr>
-          <a:xfrm>
-            <a:off x="640080" y="457200"/>
-            <a:ext cx="10972800" cy="640080"/>
-          </a:xfrm>
-          <a:prstGeom prst="rect">
-            <a:avLst/>
-          </a:prstGeom>
-          <a:noFill/>
-          <a:ln/>
-        </p:spPr>
-        <p:txBody>
-          <a:bodyPr wrap="square" rtlCol="0" anchor="ctr"/>
+          <p:cNvPr id="2" name="Shape 0"/>
+          <p:cNvSpPr/>
+          <p:nvPr/>
+        </p:nvSpPr>
+        <p:spPr>
+          <a:xfrm>
+            <a:off x="0" y="0"/>
+            <a:ext cx="12191695" cy="960120"/>
+          </a:xfrm>
+          <a:prstGeom prst="rect">
+            <a:avLst/>
+          </a:prstGeom>
+          <a:solidFill>
+            <a:srgbClr val="E6ECF1"/>
+          </a:solidFill>
+          <a:ln/>
+        </p:spPr>
+      </p:sp>
+      <p:sp>
+        <p:nvSpPr>
+          <p:cNvPr id="3" name="Shape 1"/>
+          <p:cNvSpPr/>
+          <p:nvPr/>
+        </p:nvSpPr>
+        <p:spPr>
+          <a:xfrm>
+            <a:off x="0" y="960120"/>
+            <a:ext cx="12191695" cy="54864"/>
+          </a:xfrm>
+          <a:prstGeom prst="rect">
+            <a:avLst/>
+          </a:prstGeom>
+          <a:solidFill>
+            <a:srgbClr val="1C6EA4"/>
+          </a:solidFill>
+          <a:ln/>
+        </p:spPr>
+      </p:sp>
+      <p:sp>
+        <p:nvSpPr>
+          <p:cNvPr id="4" name="Text 2"/>
+          <p:cNvSpPr/>
+          <p:nvPr/>
+        </p:nvSpPr>
+        <p:spPr>
+          <a:xfrm>
+            <a:off x="777240" y="1188720"/>
+            <a:ext cx="914400" cy="640080"/>
+          </a:xfrm>
+          <a:prstGeom prst="rect">
+            <a:avLst/>
+          </a:prstGeom>
+          <a:noFill/>
+          <a:ln/>
+        </p:spPr>
+        <p:txBody>
+          <a:bodyPr wrap="square" lIns="0" tIns="0" rIns="0" bIns="0" rtlCol="0" anchor="ctr"/>
           <a:lstStyle/>
           <a:p>
             <a:pPr indent="0" marL="0">
@@ -1547,40 +1404,118 @@
             <a:r>
               <a:rPr lang="en-US" sz="3000" b="1" dirty="0">
                 <a:solidFill>
-                  <a:srgbClr val="0F2E33"/>
+                  <a:srgbClr val="1C6EA4"/>
                 </a:solidFill>
                 <a:latin typeface="Century Schoolbook" pitchFamily="34" charset="0"/>
                 <a:ea typeface="Century Schoolbook" pitchFamily="34" charset="-122"/>
                 <a:cs typeface="Century Schoolbook" pitchFamily="34" charset="-120"/>
               </a:rPr>
+              <a:t>01</a:t>
+            </a:r>
+            <a:endParaRPr lang="en-US" sz="3000" dirty="0"/>
+          </a:p>
+        </p:txBody>
+      </p:sp>
+      <p:sp>
+        <p:nvSpPr>
+          <p:cNvPr id="5" name="Text 3"/>
+          <p:cNvSpPr/>
+          <p:nvPr/>
+        </p:nvSpPr>
+        <p:spPr>
+          <a:xfrm>
+            <a:off x="1645920" y="1362456"/>
+            <a:ext cx="9768535" cy="274320"/>
+          </a:xfrm>
+          <a:prstGeom prst="rect">
+            <a:avLst/>
+          </a:prstGeom>
+          <a:noFill/>
+          <a:ln/>
+        </p:spPr>
+        <p:txBody>
+          <a:bodyPr wrap="square" lIns="0" tIns="0" rIns="0" bIns="0" rtlCol="0" anchor="ctr"/>
+          <a:lstStyle/>
+          <a:p>
+            <a:pPr indent="0" marL="0">
+              <a:buNone/>
+            </a:pPr>
+            <a:r>
+              <a:rPr lang="en-US" sz="1100" b="1" spc="200" kern="0" dirty="0">
+                <a:solidFill>
+                  <a:srgbClr val="5F6B74"/>
+                </a:solidFill>
+                <a:latin typeface="Calibri" pitchFamily="34" charset="0"/>
+                <a:ea typeface="Calibri" pitchFamily="34" charset="-122"/>
+                <a:cs typeface="Calibri" pitchFamily="34" charset="-120"/>
+              </a:rPr>
+              <a:t>ARCHITECTURE</a:t>
+            </a:r>
+            <a:endParaRPr lang="en-US" sz="1100" dirty="0"/>
+          </a:p>
+        </p:txBody>
+      </p:sp>
+      <p:sp>
+        <p:nvSpPr>
+          <p:cNvPr id="6" name="Text 4"/>
+          <p:cNvSpPr/>
+          <p:nvPr/>
+        </p:nvSpPr>
+        <p:spPr>
+          <a:xfrm>
+            <a:off x="777240" y="1837944"/>
+            <a:ext cx="10637215" cy="640080"/>
+          </a:xfrm>
+          <a:prstGeom prst="rect">
+            <a:avLst/>
+          </a:prstGeom>
+          <a:noFill/>
+          <a:ln/>
+        </p:spPr>
+        <p:txBody>
+          <a:bodyPr wrap="square" lIns="0" tIns="0" rIns="0" bIns="0" rtlCol="0" anchor="ctr"/>
+          <a:lstStyle/>
+          <a:p>
+            <a:pPr indent="0" marL="0">
+              <a:buNone/>
+            </a:pPr>
+            <a:r>
+              <a:rPr lang="en-US" sz="2300" b="1" dirty="0">
+                <a:solidFill>
+                  <a:srgbClr val="14304A"/>
+                </a:solidFill>
+                <a:latin typeface="Century Schoolbook" pitchFamily="34" charset="0"/>
+                <a:ea typeface="Century Schoolbook" pitchFamily="34" charset="-122"/>
+                <a:cs typeface="Century Schoolbook" pitchFamily="34" charset="-120"/>
+              </a:rPr>
               <a:t>What I Built — Intake to Dashboard</a:t>
             </a:r>
-            <a:endParaRPr lang="en-US" sz="3000" dirty="0"/>
-          </a:p>
-        </p:txBody>
-      </p:sp>
-      <p:sp>
-        <p:nvSpPr>
-          <p:cNvPr id="3" name="Shape 1"/>
-          <p:cNvSpPr/>
-          <p:nvPr/>
-        </p:nvSpPr>
-        <p:spPr>
-          <a:xfrm>
-            <a:off x="640080" y="2468880"/>
-            <a:ext cx="1572768" cy="1371600"/>
+            <a:endParaRPr lang="en-US" sz="2300" dirty="0"/>
+          </a:p>
+        </p:txBody>
+      </p:sp>
+      <p:sp>
+        <p:nvSpPr>
+          <p:cNvPr id="7" name="Shape 5"/>
+          <p:cNvSpPr/>
+          <p:nvPr/>
+        </p:nvSpPr>
+        <p:spPr>
+          <a:xfrm>
+            <a:off x="777240" y="3429000"/>
+            <a:ext cx="1391869" cy="1965960"/>
           </a:xfrm>
           <a:prstGeom prst="roundRect">
             <a:avLst>
-              <a:gd name="adj" fmla="val 6667"/>
+              <a:gd name="adj" fmla="val 3942"/>
             </a:avLst>
           </a:prstGeom>
           <a:solidFill>
-            <a:srgbClr val="EDF6F7"/>
-          </a:solidFill>
-          <a:ln w="19050">
+            <a:srgbClr val="1C6EA4"/>
+          </a:solidFill>
+          <a:ln w="12700">
             <a:solidFill>
-              <a:srgbClr val="4FAAB6"/>
+              <a:srgbClr val="1C6EA4"/>
             </a:solidFill>
             <a:prstDash val="solid"/>
           </a:ln>
@@ -1588,34 +1523,14 @@
       </p:sp>
       <p:sp>
         <p:nvSpPr>
-          <p:cNvPr id="4" name="Shape 2"/>
-          <p:cNvSpPr/>
-          <p:nvPr/>
-        </p:nvSpPr>
-        <p:spPr>
-          <a:xfrm>
-            <a:off x="1335024" y="2633472"/>
-            <a:ext cx="182880" cy="182880"/>
-          </a:xfrm>
-          <a:prstGeom prst="ellipse">
-            <a:avLst/>
-          </a:prstGeom>
-          <a:solidFill>
-            <a:srgbClr val="4FAAB6"/>
-          </a:solidFill>
-          <a:ln/>
-        </p:spPr>
-      </p:sp>
-      <p:sp>
-        <p:nvSpPr>
-          <p:cNvPr id="5" name="Text 3"/>
-          <p:cNvSpPr/>
-          <p:nvPr/>
-        </p:nvSpPr>
-        <p:spPr>
-          <a:xfrm>
-            <a:off x="612648" y="2852928"/>
-            <a:ext cx="1627632" cy="365760"/>
+          <p:cNvPr id="8" name="Text 6"/>
+          <p:cNvSpPr/>
+          <p:nvPr/>
+        </p:nvSpPr>
+        <p:spPr>
+          <a:xfrm>
+            <a:off x="923544" y="3611880"/>
+            <a:ext cx="1099261" cy="320040"/>
           </a:xfrm>
           <a:prstGeom prst="rect">
             <a:avLst/>
@@ -1627,34 +1542,201 @@
           <a:bodyPr wrap="square" lIns="0" tIns="0" rIns="0" bIns="0" rtlCol="0" anchor="ctr"/>
           <a:lstStyle/>
           <a:p>
-            <a:pPr algn="ctr" indent="0" marL="0">
-              <a:buNone/>
-            </a:pPr>
-            <a:r>
-              <a:rPr lang="en-US" sz="1450" b="1" dirty="0">
-                <a:solidFill>
-                  <a:srgbClr val="0F2E33"/>
+            <a:pPr indent="0" marL="0">
+              <a:buNone/>
+            </a:pPr>
+            <a:r>
+              <a:rPr lang="en-US" sz="1100" dirty="0">
+                <a:solidFill>
+                  <a:srgbClr val="FFFFFF"/>
+                </a:solidFill>
+                <a:latin typeface="Consolas" pitchFamily="34" charset="0"/>
+                <a:ea typeface="Consolas" pitchFamily="34" charset="-122"/>
+                <a:cs typeface="Consolas" pitchFamily="34" charset="-120"/>
+              </a:rPr>
+              <a:t>01</a:t>
+            </a:r>
+            <a:endParaRPr lang="en-US" sz="1100" dirty="0"/>
+          </a:p>
+        </p:txBody>
+      </p:sp>
+      <p:sp>
+        <p:nvSpPr>
+          <p:cNvPr id="9" name="Text 7"/>
+          <p:cNvSpPr/>
+          <p:nvPr/>
+        </p:nvSpPr>
+        <p:spPr>
+          <a:xfrm>
+            <a:off x="923544" y="4050792"/>
+            <a:ext cx="1099261" cy="868680"/>
+          </a:xfrm>
+          <a:prstGeom prst="rect">
+            <a:avLst/>
+          </a:prstGeom>
+          <a:noFill/>
+          <a:ln/>
+        </p:spPr>
+        <p:txBody>
+          <a:bodyPr wrap="square" lIns="0" tIns="0" rIns="0" bIns="0" rtlCol="0" anchor="t"/>
+          <a:lstStyle/>
+          <a:p>
+            <a:pPr indent="0" marL="0">
+              <a:lnSpc>
+                <a:spcPct val="96000"/>
+              </a:lnSpc>
+              <a:buNone/>
+            </a:pPr>
+            <a:r>
+              <a:rPr lang="en-US" sz="1300" b="1" dirty="0">
+                <a:solidFill>
+                  <a:srgbClr val="FFFFFF"/>
+                </a:solidFill>
+                <a:latin typeface="Century Schoolbook" pitchFamily="34" charset="0"/>
+                <a:ea typeface="Century Schoolbook" pitchFamily="34" charset="-122"/>
+                <a:cs typeface="Century Schoolbook" pitchFamily="34" charset="-120"/>
+              </a:rPr>
+              <a:t>Plant sensors</a:t>
+            </a:r>
+            <a:endParaRPr lang="en-US" sz="1300" dirty="0"/>
+          </a:p>
+        </p:txBody>
+      </p:sp>
+      <p:sp>
+        <p:nvSpPr>
+          <p:cNvPr id="10" name="Text 8"/>
+          <p:cNvSpPr/>
+          <p:nvPr/>
+        </p:nvSpPr>
+        <p:spPr>
+          <a:xfrm>
+            <a:off x="923544" y="4910328"/>
+            <a:ext cx="1099261" cy="365760"/>
+          </a:xfrm>
+          <a:prstGeom prst="rect">
+            <a:avLst/>
+          </a:prstGeom>
+          <a:noFill/>
+          <a:ln/>
+        </p:spPr>
+        <p:txBody>
+          <a:bodyPr wrap="square" lIns="0" tIns="0" rIns="0" bIns="0" rtlCol="0" anchor="ctr"/>
+          <a:lstStyle/>
+          <a:p>
+            <a:pPr indent="0" marL="0">
+              <a:buNone/>
+            </a:pPr>
+            <a:r>
+              <a:rPr lang="en-US" sz="900" dirty="0">
+                <a:solidFill>
+                  <a:srgbClr val="FFFFFF"/>
                 </a:solidFill>
                 <a:latin typeface="Calibri" pitchFamily="34" charset="0"/>
                 <a:ea typeface="Calibri" pitchFamily="34" charset="-122"/>
                 <a:cs typeface="Calibri" pitchFamily="34" charset="-120"/>
               </a:rPr>
-              <a:t>Plant sensors</a:t>
-            </a:r>
-            <a:endParaRPr lang="en-US" sz="1450" dirty="0"/>
-          </a:p>
-        </p:txBody>
-      </p:sp>
-      <p:sp>
-        <p:nvSpPr>
-          <p:cNvPr id="6" name="Text 4"/>
-          <p:cNvSpPr/>
-          <p:nvPr/>
-        </p:nvSpPr>
-        <p:spPr>
-          <a:xfrm>
-            <a:off x="640080" y="3200400"/>
-            <a:ext cx="1572768" cy="411480"/>
+              <a:t>10 · 2 plants</a:t>
+            </a:r>
+            <a:endParaRPr lang="en-US" sz="900" dirty="0"/>
+          </a:p>
+        </p:txBody>
+      </p:sp>
+      <p:sp>
+        <p:nvSpPr>
+          <p:cNvPr id="11" name="Shape 9"/>
+          <p:cNvSpPr/>
+          <p:nvPr/>
+        </p:nvSpPr>
+        <p:spPr>
+          <a:xfrm>
+            <a:off x="2242261" y="4302252"/>
+            <a:ext cx="310896" cy="219456"/>
+          </a:xfrm>
+          <a:prstGeom prst="rightArrow">
+            <a:avLst/>
+          </a:prstGeom>
+          <a:solidFill>
+            <a:srgbClr val="5F6B74"/>
+          </a:solidFill>
+          <a:ln/>
+        </p:spPr>
+      </p:sp>
+      <p:sp>
+        <p:nvSpPr>
+          <p:cNvPr id="12" name="Shape 10"/>
+          <p:cNvSpPr/>
+          <p:nvPr/>
+        </p:nvSpPr>
+        <p:spPr>
+          <a:xfrm>
+            <a:off x="2626309" y="3429000"/>
+            <a:ext cx="1391869" cy="1965960"/>
+          </a:xfrm>
+          <a:prstGeom prst="roundRect">
+            <a:avLst>
+              <a:gd name="adj" fmla="val 3942"/>
+            </a:avLst>
+          </a:prstGeom>
+          <a:solidFill>
+            <a:srgbClr val="1C6EA4"/>
+          </a:solidFill>
+          <a:ln w="12700">
+            <a:solidFill>
+              <a:srgbClr val="1C6EA4"/>
+            </a:solidFill>
+            <a:prstDash val="solid"/>
+          </a:ln>
+        </p:spPr>
+      </p:sp>
+      <p:sp>
+        <p:nvSpPr>
+          <p:cNvPr id="13" name="Text 11"/>
+          <p:cNvSpPr/>
+          <p:nvPr/>
+        </p:nvSpPr>
+        <p:spPr>
+          <a:xfrm>
+            <a:off x="2772613" y="3611880"/>
+            <a:ext cx="1099261" cy="320040"/>
+          </a:xfrm>
+          <a:prstGeom prst="rect">
+            <a:avLst/>
+          </a:prstGeom>
+          <a:noFill/>
+          <a:ln/>
+        </p:spPr>
+        <p:txBody>
+          <a:bodyPr wrap="square" lIns="0" tIns="0" rIns="0" bIns="0" rtlCol="0" anchor="ctr"/>
+          <a:lstStyle/>
+          <a:p>
+            <a:pPr indent="0" marL="0">
+              <a:buNone/>
+            </a:pPr>
+            <a:r>
+              <a:rPr lang="en-US" sz="1100" dirty="0">
+                <a:solidFill>
+                  <a:srgbClr val="FFFFFF"/>
+                </a:solidFill>
+                <a:latin typeface="Consolas" pitchFamily="34" charset="0"/>
+                <a:ea typeface="Consolas" pitchFamily="34" charset="-122"/>
+                <a:cs typeface="Consolas" pitchFamily="34" charset="-120"/>
+              </a:rPr>
+              <a:t>02</a:t>
+            </a:r>
+            <a:endParaRPr lang="en-US" sz="1100" dirty="0"/>
+          </a:p>
+        </p:txBody>
+      </p:sp>
+      <p:sp>
+        <p:nvSpPr>
+          <p:cNvPr id="14" name="Text 12"/>
+          <p:cNvSpPr/>
+          <p:nvPr/>
+        </p:nvSpPr>
+        <p:spPr>
+          <a:xfrm>
+            <a:off x="2772613" y="4050792"/>
+            <a:ext cx="1099261" cy="868680"/>
           </a:xfrm>
           <a:prstGeom prst="rect">
             <a:avLst/>
@@ -1666,70 +1748,108 @@
           <a:bodyPr wrap="square" lIns="0" tIns="0" rIns="0" bIns="0" rtlCol="0" anchor="t"/>
           <a:lstStyle/>
           <a:p>
-            <a:pPr algn="ctr" indent="0" marL="0">
-              <a:buNone/>
-            </a:pPr>
-            <a:r>
-              <a:rPr lang="en-US" sz="1050" dirty="0">
-                <a:solidFill>
-                  <a:srgbClr val="567478"/>
+            <a:pPr indent="0" marL="0">
+              <a:lnSpc>
+                <a:spcPct val="96000"/>
+              </a:lnSpc>
+              <a:buNone/>
+            </a:pPr>
+            <a:r>
+              <a:rPr lang="en-US" sz="1300" b="1" dirty="0">
+                <a:solidFill>
+                  <a:srgbClr val="FFFFFF"/>
+                </a:solidFill>
+                <a:latin typeface="Century Schoolbook" pitchFamily="34" charset="0"/>
+                <a:ea typeface="Century Schoolbook" pitchFamily="34" charset="-122"/>
+                <a:cs typeface="Century Schoolbook" pitchFamily="34" charset="-120"/>
+              </a:rPr>
+              <a:t>Fog node</a:t>
+            </a:r>
+            <a:endParaRPr lang="en-US" sz="1300" dirty="0"/>
+          </a:p>
+        </p:txBody>
+      </p:sp>
+      <p:sp>
+        <p:nvSpPr>
+          <p:cNvPr id="15" name="Text 13"/>
+          <p:cNvSpPr/>
+          <p:nvPr/>
+        </p:nvSpPr>
+        <p:spPr>
+          <a:xfrm>
+            <a:off x="2772613" y="4910328"/>
+            <a:ext cx="1099261" cy="365760"/>
+          </a:xfrm>
+          <a:prstGeom prst="rect">
+            <a:avLst/>
+          </a:prstGeom>
+          <a:noFill/>
+          <a:ln/>
+        </p:spPr>
+        <p:txBody>
+          <a:bodyPr wrap="square" lIns="0" tIns="0" rIns="0" bIns="0" rtlCol="0" anchor="ctr"/>
+          <a:lstStyle/>
+          <a:p>
+            <a:pPr indent="0" marL="0">
+              <a:buNone/>
+            </a:pPr>
+            <a:r>
+              <a:rPr lang="en-US" sz="900" dirty="0">
+                <a:solidFill>
+                  <a:srgbClr val="FFFFFF"/>
                 </a:solidFill>
                 <a:latin typeface="Calibri" pitchFamily="34" charset="0"/>
                 <a:ea typeface="Calibri" pitchFamily="34" charset="-122"/>
                 <a:cs typeface="Calibri" pitchFamily="34" charset="-120"/>
               </a:rPr>
-              <a:t>10 · 2 plants</a:t>
-            </a:r>
-            <a:endParaRPr lang="en-US" sz="1050" dirty="0"/>
-          </a:p>
-        </p:txBody>
-      </p:sp>
-      <p:sp>
-        <p:nvSpPr>
-          <p:cNvPr id="7" name="Shape 5"/>
-          <p:cNvSpPr/>
-          <p:nvPr/>
-        </p:nvSpPr>
-        <p:spPr>
-          <a:xfrm>
-            <a:off x="2231136" y="3154680"/>
-            <a:ext cx="258409" cy="0"/>
-          </a:xfrm>
-          <a:prstGeom prst="line">
-            <a:avLst/>
-          </a:prstGeom>
-          <a:noFill/>
-          <a:ln w="25400">
-            <a:solidFill>
-              <a:srgbClr val="4FAAB6"/>
-            </a:solidFill>
-            <a:prstDash val="solid"/>
-            <a:tailEnd type="triangle"/>
-          </a:ln>
-        </p:spPr>
-      </p:sp>
-      <p:sp>
-        <p:nvSpPr>
-          <p:cNvPr id="8" name="Shape 6"/>
-          <p:cNvSpPr/>
-          <p:nvPr/>
-        </p:nvSpPr>
-        <p:spPr>
-          <a:xfrm>
-            <a:off x="2507833" y="2468880"/>
-            <a:ext cx="1572768" cy="1371600"/>
+              <a:t>10 s windows · gates</a:t>
+            </a:r>
+            <a:endParaRPr lang="en-US" sz="900" dirty="0"/>
+          </a:p>
+        </p:txBody>
+      </p:sp>
+      <p:sp>
+        <p:nvSpPr>
+          <p:cNvPr id="16" name="Shape 14"/>
+          <p:cNvSpPr/>
+          <p:nvPr/>
+        </p:nvSpPr>
+        <p:spPr>
+          <a:xfrm>
+            <a:off x="4091330" y="4302252"/>
+            <a:ext cx="310896" cy="219456"/>
+          </a:xfrm>
+          <a:prstGeom prst="rightArrow">
+            <a:avLst/>
+          </a:prstGeom>
+          <a:solidFill>
+            <a:srgbClr val="5F6B74"/>
+          </a:solidFill>
+          <a:ln/>
+        </p:spPr>
+      </p:sp>
+      <p:sp>
+        <p:nvSpPr>
+          <p:cNvPr id="17" name="Shape 15"/>
+          <p:cNvSpPr/>
+          <p:nvPr/>
+        </p:nvSpPr>
+        <p:spPr>
+          <a:xfrm>
+            <a:off x="4475378" y="3429000"/>
+            <a:ext cx="1391869" cy="1965960"/>
           </a:xfrm>
           <a:prstGeom prst="roundRect">
             <a:avLst>
-              <a:gd name="adj" fmla="val 6667"/>
+              <a:gd name="adj" fmla="val 3942"/>
             </a:avLst>
           </a:prstGeom>
           <a:solidFill>
-            <a:srgbClr val="EDF6F7"/>
-          </a:solidFill>
-          <a:ln w="19050">
+            <a:srgbClr val="FFFFFF"/>
+          </a:solidFill>
+          <a:ln w="12700">
             <a:solidFill>
-              <a:srgbClr val="4FAAB6"/>
+              <a:srgbClr val="E4E6E9"/>
             </a:solidFill>
             <a:prstDash val="solid"/>
           </a:ln>
@@ -1737,34 +1857,14 @@
       </p:sp>
       <p:sp>
         <p:nvSpPr>
-          <p:cNvPr id="9" name="Shape 7"/>
-          <p:cNvSpPr/>
-          <p:nvPr/>
-        </p:nvSpPr>
-        <p:spPr>
-          <a:xfrm>
-            <a:off x="3202777" y="2633472"/>
-            <a:ext cx="182880" cy="182880"/>
-          </a:xfrm>
-          <a:prstGeom prst="ellipse">
-            <a:avLst/>
-          </a:prstGeom>
-          <a:solidFill>
-            <a:srgbClr val="4FAAB6"/>
-          </a:solidFill>
-          <a:ln/>
-        </p:spPr>
-      </p:sp>
-      <p:sp>
-        <p:nvSpPr>
-          <p:cNvPr id="10" name="Text 8"/>
-          <p:cNvSpPr/>
-          <p:nvPr/>
-        </p:nvSpPr>
-        <p:spPr>
-          <a:xfrm>
-            <a:off x="2480401" y="2852928"/>
-            <a:ext cx="1627632" cy="365760"/>
+          <p:cNvPr id="18" name="Text 16"/>
+          <p:cNvSpPr/>
+          <p:nvPr/>
+        </p:nvSpPr>
+        <p:spPr>
+          <a:xfrm>
+            <a:off x="4621682" y="3611880"/>
+            <a:ext cx="1099261" cy="320040"/>
           </a:xfrm>
           <a:prstGeom prst="rect">
             <a:avLst/>
@@ -1776,34 +1876,201 @@
           <a:bodyPr wrap="square" lIns="0" tIns="0" rIns="0" bIns="0" rtlCol="0" anchor="ctr"/>
           <a:lstStyle/>
           <a:p>
-            <a:pPr algn="ctr" indent="0" marL="0">
-              <a:buNone/>
-            </a:pPr>
-            <a:r>
-              <a:rPr lang="en-US" sz="1450" b="1" dirty="0">
-                <a:solidFill>
-                  <a:srgbClr val="0F2E33"/>
+            <a:pPr indent="0" marL="0">
+              <a:buNone/>
+            </a:pPr>
+            <a:r>
+              <a:rPr lang="en-US" sz="1100" dirty="0">
+                <a:solidFill>
+                  <a:srgbClr val="1C6EA4"/>
+                </a:solidFill>
+                <a:latin typeface="Consolas" pitchFamily="34" charset="0"/>
+                <a:ea typeface="Consolas" pitchFamily="34" charset="-122"/>
+                <a:cs typeface="Consolas" pitchFamily="34" charset="-120"/>
+              </a:rPr>
+              <a:t>03</a:t>
+            </a:r>
+            <a:endParaRPr lang="en-US" sz="1100" dirty="0"/>
+          </a:p>
+        </p:txBody>
+      </p:sp>
+      <p:sp>
+        <p:nvSpPr>
+          <p:cNvPr id="19" name="Text 17"/>
+          <p:cNvSpPr/>
+          <p:nvPr/>
+        </p:nvSpPr>
+        <p:spPr>
+          <a:xfrm>
+            <a:off x="4621682" y="4050792"/>
+            <a:ext cx="1099261" cy="868680"/>
+          </a:xfrm>
+          <a:prstGeom prst="rect">
+            <a:avLst/>
+          </a:prstGeom>
+          <a:noFill/>
+          <a:ln/>
+        </p:spPr>
+        <p:txBody>
+          <a:bodyPr wrap="square" lIns="0" tIns="0" rIns="0" bIns="0" rtlCol="0" anchor="t"/>
+          <a:lstStyle/>
+          <a:p>
+            <a:pPr indent="0" marL="0">
+              <a:lnSpc>
+                <a:spcPct val="96000"/>
+              </a:lnSpc>
+              <a:buNone/>
+            </a:pPr>
+            <a:r>
+              <a:rPr lang="en-US" sz="1300" b="1" dirty="0">
+                <a:solidFill>
+                  <a:srgbClr val="14304A"/>
+                </a:solidFill>
+                <a:latin typeface="Century Schoolbook" pitchFamily="34" charset="0"/>
+                <a:ea typeface="Century Schoolbook" pitchFamily="34" charset="-122"/>
+                <a:cs typeface="Century Schoolbook" pitchFamily="34" charset="-120"/>
+              </a:rPr>
+              <a:t>Amazon SQS</a:t>
+            </a:r>
+            <a:endParaRPr lang="en-US" sz="1300" dirty="0"/>
+          </a:p>
+        </p:txBody>
+      </p:sp>
+      <p:sp>
+        <p:nvSpPr>
+          <p:cNvPr id="20" name="Text 18"/>
+          <p:cNvSpPr/>
+          <p:nvPr/>
+        </p:nvSpPr>
+        <p:spPr>
+          <a:xfrm>
+            <a:off x="4621682" y="4910328"/>
+            <a:ext cx="1099261" cy="365760"/>
+          </a:xfrm>
+          <a:prstGeom prst="rect">
+            <a:avLst/>
+          </a:prstGeom>
+          <a:noFill/>
+          <a:ln/>
+        </p:spPr>
+        <p:txBody>
+          <a:bodyPr wrap="square" lIns="0" tIns="0" rIns="0" bIns="0" rtlCol="0" anchor="ctr"/>
+          <a:lstStyle/>
+          <a:p>
+            <a:pPr indent="0" marL="0">
+              <a:buNone/>
+            </a:pPr>
+            <a:r>
+              <a:rPr lang="en-US" sz="900" dirty="0">
+                <a:solidFill>
+                  <a:srgbClr val="5F6B74"/>
                 </a:solidFill>
                 <a:latin typeface="Calibri" pitchFamily="34" charset="0"/>
                 <a:ea typeface="Calibri" pitchFamily="34" charset="-122"/>
                 <a:cs typeface="Calibri" pitchFamily="34" charset="-120"/>
               </a:rPr>
-              <a:t>Fog node</a:t>
-            </a:r>
-            <a:endParaRPr lang="en-US" sz="1450" dirty="0"/>
-          </a:p>
-        </p:txBody>
-      </p:sp>
-      <p:sp>
-        <p:nvSpPr>
-          <p:cNvPr id="11" name="Text 9"/>
-          <p:cNvSpPr/>
-          <p:nvPr/>
-        </p:nvSpPr>
-        <p:spPr>
-          <a:xfrm>
-            <a:off x="2507833" y="3200400"/>
-            <a:ext cx="1572768" cy="411480"/>
+              <a:t>1 summary / window</a:t>
+            </a:r>
+            <a:endParaRPr lang="en-US" sz="900" dirty="0"/>
+          </a:p>
+        </p:txBody>
+      </p:sp>
+      <p:sp>
+        <p:nvSpPr>
+          <p:cNvPr id="21" name="Shape 19"/>
+          <p:cNvSpPr/>
+          <p:nvPr/>
+        </p:nvSpPr>
+        <p:spPr>
+          <a:xfrm>
+            <a:off x="5940400" y="4302252"/>
+            <a:ext cx="310896" cy="219456"/>
+          </a:xfrm>
+          <a:prstGeom prst="rightArrow">
+            <a:avLst/>
+          </a:prstGeom>
+          <a:solidFill>
+            <a:srgbClr val="5F6B74"/>
+          </a:solidFill>
+          <a:ln/>
+        </p:spPr>
+      </p:sp>
+      <p:sp>
+        <p:nvSpPr>
+          <p:cNvPr id="22" name="Shape 20"/>
+          <p:cNvSpPr/>
+          <p:nvPr/>
+        </p:nvSpPr>
+        <p:spPr>
+          <a:xfrm>
+            <a:off x="6324448" y="3429000"/>
+            <a:ext cx="1391869" cy="1965960"/>
+          </a:xfrm>
+          <a:prstGeom prst="roundRect">
+            <a:avLst>
+              <a:gd name="adj" fmla="val 3942"/>
+            </a:avLst>
+          </a:prstGeom>
+          <a:solidFill>
+            <a:srgbClr val="FFFFFF"/>
+          </a:solidFill>
+          <a:ln w="12700">
+            <a:solidFill>
+              <a:srgbClr val="E4E6E9"/>
+            </a:solidFill>
+            <a:prstDash val="solid"/>
+          </a:ln>
+        </p:spPr>
+      </p:sp>
+      <p:sp>
+        <p:nvSpPr>
+          <p:cNvPr id="23" name="Text 21"/>
+          <p:cNvSpPr/>
+          <p:nvPr/>
+        </p:nvSpPr>
+        <p:spPr>
+          <a:xfrm>
+            <a:off x="6470752" y="3611880"/>
+            <a:ext cx="1099261" cy="320040"/>
+          </a:xfrm>
+          <a:prstGeom prst="rect">
+            <a:avLst/>
+          </a:prstGeom>
+          <a:noFill/>
+          <a:ln/>
+        </p:spPr>
+        <p:txBody>
+          <a:bodyPr wrap="square" lIns="0" tIns="0" rIns="0" bIns="0" rtlCol="0" anchor="ctr"/>
+          <a:lstStyle/>
+          <a:p>
+            <a:pPr indent="0" marL="0">
+              <a:buNone/>
+            </a:pPr>
+            <a:r>
+              <a:rPr lang="en-US" sz="1100" dirty="0">
+                <a:solidFill>
+                  <a:srgbClr val="1C6EA4"/>
+                </a:solidFill>
+                <a:latin typeface="Consolas" pitchFamily="34" charset="0"/>
+                <a:ea typeface="Consolas" pitchFamily="34" charset="-122"/>
+                <a:cs typeface="Consolas" pitchFamily="34" charset="-120"/>
+              </a:rPr>
+              <a:t>04</a:t>
+            </a:r>
+            <a:endParaRPr lang="en-US" sz="1100" dirty="0"/>
+          </a:p>
+        </p:txBody>
+      </p:sp>
+      <p:sp>
+        <p:nvSpPr>
+          <p:cNvPr id="24" name="Text 22"/>
+          <p:cNvSpPr/>
+          <p:nvPr/>
+        </p:nvSpPr>
+        <p:spPr>
+          <a:xfrm>
+            <a:off x="6470752" y="4050792"/>
+            <a:ext cx="1099261" cy="868680"/>
           </a:xfrm>
           <a:prstGeom prst="rect">
             <a:avLst/>
@@ -1815,70 +2082,108 @@
           <a:bodyPr wrap="square" lIns="0" tIns="0" rIns="0" bIns="0" rtlCol="0" anchor="t"/>
           <a:lstStyle/>
           <a:p>
-            <a:pPr algn="ctr" indent="0" marL="0">
-              <a:buNone/>
-            </a:pPr>
-            <a:r>
-              <a:rPr lang="en-US" sz="1050" dirty="0">
-                <a:solidFill>
-                  <a:srgbClr val="567478"/>
+            <a:pPr indent="0" marL="0">
+              <a:lnSpc>
+                <a:spcPct val="96000"/>
+              </a:lnSpc>
+              <a:buNone/>
+            </a:pPr>
+            <a:r>
+              <a:rPr lang="en-US" sz="1300" b="1" dirty="0">
+                <a:solidFill>
+                  <a:srgbClr val="14304A"/>
+                </a:solidFill>
+                <a:latin typeface="Century Schoolbook" pitchFamily="34" charset="0"/>
+                <a:ea typeface="Century Schoolbook" pitchFamily="34" charset="-122"/>
+                <a:cs typeface="Century Schoolbook" pitchFamily="34" charset="-120"/>
+              </a:rPr>
+              <a:t>AWS Lambda</a:t>
+            </a:r>
+            <a:endParaRPr lang="en-US" sz="1300" dirty="0"/>
+          </a:p>
+        </p:txBody>
+      </p:sp>
+      <p:sp>
+        <p:nvSpPr>
+          <p:cNvPr id="25" name="Text 23"/>
+          <p:cNvSpPr/>
+          <p:nvPr/>
+        </p:nvSpPr>
+        <p:spPr>
+          <a:xfrm>
+            <a:off x="6470752" y="4910328"/>
+            <a:ext cx="1099261" cy="365760"/>
+          </a:xfrm>
+          <a:prstGeom prst="rect">
+            <a:avLst/>
+          </a:prstGeom>
+          <a:noFill/>
+          <a:ln/>
+        </p:spPr>
+        <p:txBody>
+          <a:bodyPr wrap="square" lIns="0" tIns="0" rIns="0" bIns="0" rtlCol="0" anchor="ctr"/>
+          <a:lstStyle/>
+          <a:p>
+            <a:pPr indent="0" marL="0">
+              <a:buNone/>
+            </a:pPr>
+            <a:r>
+              <a:rPr lang="en-US" sz="900" dirty="0">
+                <a:solidFill>
+                  <a:srgbClr val="5F6B74"/>
                 </a:solidFill>
                 <a:latin typeface="Calibri" pitchFamily="34" charset="0"/>
                 <a:ea typeface="Calibri" pitchFamily="34" charset="-122"/>
                 <a:cs typeface="Calibri" pitchFamily="34" charset="-120"/>
               </a:rPr>
-              <a:t>10 s windows · gates</a:t>
-            </a:r>
-            <a:endParaRPr lang="en-US" sz="1050" dirty="0"/>
-          </a:p>
-        </p:txBody>
-      </p:sp>
-      <p:sp>
-        <p:nvSpPr>
-          <p:cNvPr id="12" name="Shape 10"/>
-          <p:cNvSpPr/>
-          <p:nvPr/>
-        </p:nvSpPr>
-        <p:spPr>
-          <a:xfrm>
-            <a:off x="4098889" y="3154680"/>
-            <a:ext cx="258409" cy="0"/>
-          </a:xfrm>
-          <a:prstGeom prst="line">
-            <a:avLst/>
-          </a:prstGeom>
-          <a:noFill/>
-          <a:ln w="25400">
-            <a:solidFill>
-              <a:srgbClr val="4FAAB6"/>
-            </a:solidFill>
-            <a:prstDash val="solid"/>
-            <a:tailEnd type="triangle"/>
-          </a:ln>
-        </p:spPr>
-      </p:sp>
-      <p:sp>
-        <p:nvSpPr>
-          <p:cNvPr id="13" name="Shape 11"/>
-          <p:cNvSpPr/>
-          <p:nvPr/>
-        </p:nvSpPr>
-        <p:spPr>
-          <a:xfrm>
-            <a:off x="4375587" y="2468880"/>
-            <a:ext cx="1572768" cy="1371600"/>
+              <a:t>nodejs20 ingest</a:t>
+            </a:r>
+            <a:endParaRPr lang="en-US" sz="900" dirty="0"/>
+          </a:p>
+        </p:txBody>
+      </p:sp>
+      <p:sp>
+        <p:nvSpPr>
+          <p:cNvPr id="26" name="Shape 24"/>
+          <p:cNvSpPr/>
+          <p:nvPr/>
+        </p:nvSpPr>
+        <p:spPr>
+          <a:xfrm>
+            <a:off x="7789469" y="4302252"/>
+            <a:ext cx="310896" cy="219456"/>
+          </a:xfrm>
+          <a:prstGeom prst="rightArrow">
+            <a:avLst/>
+          </a:prstGeom>
+          <a:solidFill>
+            <a:srgbClr val="5F6B74"/>
+          </a:solidFill>
+          <a:ln/>
+        </p:spPr>
+      </p:sp>
+      <p:sp>
+        <p:nvSpPr>
+          <p:cNvPr id="27" name="Shape 25"/>
+          <p:cNvSpPr/>
+          <p:nvPr/>
+        </p:nvSpPr>
+        <p:spPr>
+          <a:xfrm>
+            <a:off x="8173517" y="3429000"/>
+            <a:ext cx="1391869" cy="1965960"/>
           </a:xfrm>
           <a:prstGeom prst="roundRect">
             <a:avLst>
-              <a:gd name="adj" fmla="val 6667"/>
+              <a:gd name="adj" fmla="val 3942"/>
             </a:avLst>
           </a:prstGeom>
           <a:solidFill>
-            <a:srgbClr val="EDF6F7"/>
-          </a:solidFill>
-          <a:ln w="19050">
+            <a:srgbClr val="FFFFFF"/>
+          </a:solidFill>
+          <a:ln w="12700">
             <a:solidFill>
-              <a:srgbClr val="0F6E7C"/>
+              <a:srgbClr val="E4E6E9"/>
             </a:solidFill>
             <a:prstDash val="solid"/>
           </a:ln>
@@ -1886,34 +2191,14 @@
       </p:sp>
       <p:sp>
         <p:nvSpPr>
-          <p:cNvPr id="14" name="Shape 12"/>
-          <p:cNvSpPr/>
-          <p:nvPr/>
-        </p:nvSpPr>
-        <p:spPr>
-          <a:xfrm>
-            <a:off x="5070531" y="2633472"/>
-            <a:ext cx="182880" cy="182880"/>
-          </a:xfrm>
-          <a:prstGeom prst="ellipse">
-            <a:avLst/>
-          </a:prstGeom>
-          <a:solidFill>
-            <a:srgbClr val="0F6E7C"/>
-          </a:solidFill>
-          <a:ln/>
-        </p:spPr>
-      </p:sp>
-      <p:sp>
-        <p:nvSpPr>
-          <p:cNvPr id="15" name="Text 13"/>
-          <p:cNvSpPr/>
-          <p:nvPr/>
-        </p:nvSpPr>
-        <p:spPr>
-          <a:xfrm>
-            <a:off x="4348155" y="2852928"/>
-            <a:ext cx="1627632" cy="365760"/>
+          <p:cNvPr id="28" name="Text 26"/>
+          <p:cNvSpPr/>
+          <p:nvPr/>
+        </p:nvSpPr>
+        <p:spPr>
+          <a:xfrm>
+            <a:off x="8319821" y="3611880"/>
+            <a:ext cx="1099261" cy="320040"/>
           </a:xfrm>
           <a:prstGeom prst="rect">
             <a:avLst/>
@@ -1925,34 +2210,201 @@
           <a:bodyPr wrap="square" lIns="0" tIns="0" rIns="0" bIns="0" rtlCol="0" anchor="ctr"/>
           <a:lstStyle/>
           <a:p>
-            <a:pPr algn="ctr" indent="0" marL="0">
-              <a:buNone/>
-            </a:pPr>
-            <a:r>
-              <a:rPr lang="en-US" sz="1450" b="1" dirty="0">
-                <a:solidFill>
-                  <a:srgbClr val="0F2E33"/>
+            <a:pPr indent="0" marL="0">
+              <a:buNone/>
+            </a:pPr>
+            <a:r>
+              <a:rPr lang="en-US" sz="1100" dirty="0">
+                <a:solidFill>
+                  <a:srgbClr val="1C6EA4"/>
+                </a:solidFill>
+                <a:latin typeface="Consolas" pitchFamily="34" charset="0"/>
+                <a:ea typeface="Consolas" pitchFamily="34" charset="-122"/>
+                <a:cs typeface="Consolas" pitchFamily="34" charset="-120"/>
+              </a:rPr>
+              <a:t>05</a:t>
+            </a:r>
+            <a:endParaRPr lang="en-US" sz="1100" dirty="0"/>
+          </a:p>
+        </p:txBody>
+      </p:sp>
+      <p:sp>
+        <p:nvSpPr>
+          <p:cNvPr id="29" name="Text 27"/>
+          <p:cNvSpPr/>
+          <p:nvPr/>
+        </p:nvSpPr>
+        <p:spPr>
+          <a:xfrm>
+            <a:off x="8319821" y="4050792"/>
+            <a:ext cx="1099261" cy="868680"/>
+          </a:xfrm>
+          <a:prstGeom prst="rect">
+            <a:avLst/>
+          </a:prstGeom>
+          <a:noFill/>
+          <a:ln/>
+        </p:spPr>
+        <p:txBody>
+          <a:bodyPr wrap="square" lIns="0" tIns="0" rIns="0" bIns="0" rtlCol="0" anchor="t"/>
+          <a:lstStyle/>
+          <a:p>
+            <a:pPr indent="0" marL="0">
+              <a:lnSpc>
+                <a:spcPct val="96000"/>
+              </a:lnSpc>
+              <a:buNone/>
+            </a:pPr>
+            <a:r>
+              <a:rPr lang="en-US" sz="1300" b="1" dirty="0">
+                <a:solidFill>
+                  <a:srgbClr val="14304A"/>
+                </a:solidFill>
+                <a:latin typeface="Century Schoolbook" pitchFamily="34" charset="0"/>
+                <a:ea typeface="Century Schoolbook" pitchFamily="34" charset="-122"/>
+                <a:cs typeface="Century Schoolbook" pitchFamily="34" charset="-120"/>
+              </a:rPr>
+              <a:t>DynamoDB</a:t>
+            </a:r>
+            <a:endParaRPr lang="en-US" sz="1300" dirty="0"/>
+          </a:p>
+        </p:txBody>
+      </p:sp>
+      <p:sp>
+        <p:nvSpPr>
+          <p:cNvPr id="30" name="Text 28"/>
+          <p:cNvSpPr/>
+          <p:nvPr/>
+        </p:nvSpPr>
+        <p:spPr>
+          <a:xfrm>
+            <a:off x="8319821" y="4910328"/>
+            <a:ext cx="1099261" cy="365760"/>
+          </a:xfrm>
+          <a:prstGeom prst="rect">
+            <a:avLst/>
+          </a:prstGeom>
+          <a:noFill/>
+          <a:ln/>
+        </p:spPr>
+        <p:txBody>
+          <a:bodyPr wrap="square" lIns="0" tIns="0" rIns="0" bIns="0" rtlCol="0" anchor="ctr"/>
+          <a:lstStyle/>
+          <a:p>
+            <a:pPr indent="0" marL="0">
+              <a:buNone/>
+            </a:pPr>
+            <a:r>
+              <a:rPr lang="en-US" sz="900" dirty="0">
+                <a:solidFill>
+                  <a:srgbClr val="5F6B74"/>
                 </a:solidFill>
                 <a:latin typeface="Calibri" pitchFamily="34" charset="0"/>
                 <a:ea typeface="Calibri" pitchFamily="34" charset="-122"/>
                 <a:cs typeface="Calibri" pitchFamily="34" charset="-120"/>
               </a:rPr>
-              <a:t>Amazon SQS</a:t>
-            </a:r>
-            <a:endParaRPr lang="en-US" sz="1450" dirty="0"/>
-          </a:p>
-        </p:txBody>
-      </p:sp>
-      <p:sp>
-        <p:nvSpPr>
-          <p:cNvPr id="16" name="Text 14"/>
-          <p:cNvSpPr/>
-          <p:nvPr/>
-        </p:nvSpPr>
-        <p:spPr>
-          <a:xfrm>
-            <a:off x="4375587" y="3200400"/>
-            <a:ext cx="1572768" cy="411480"/>
+              <a:t>time-series store</a:t>
+            </a:r>
+            <a:endParaRPr lang="en-US" sz="900" dirty="0"/>
+          </a:p>
+        </p:txBody>
+      </p:sp>
+      <p:sp>
+        <p:nvSpPr>
+          <p:cNvPr id="31" name="Shape 29"/>
+          <p:cNvSpPr/>
+          <p:nvPr/>
+        </p:nvSpPr>
+        <p:spPr>
+          <a:xfrm>
+            <a:off x="9638538" y="4302252"/>
+            <a:ext cx="310896" cy="219456"/>
+          </a:xfrm>
+          <a:prstGeom prst="rightArrow">
+            <a:avLst/>
+          </a:prstGeom>
+          <a:solidFill>
+            <a:srgbClr val="5F6B74"/>
+          </a:solidFill>
+          <a:ln/>
+        </p:spPr>
+      </p:sp>
+      <p:sp>
+        <p:nvSpPr>
+          <p:cNvPr id="32" name="Shape 30"/>
+          <p:cNvSpPr/>
+          <p:nvPr/>
+        </p:nvSpPr>
+        <p:spPr>
+          <a:xfrm>
+            <a:off x="10022586" y="3429000"/>
+            <a:ext cx="1391869" cy="1965960"/>
+          </a:xfrm>
+          <a:prstGeom prst="roundRect">
+            <a:avLst>
+              <a:gd name="adj" fmla="val 3942"/>
+            </a:avLst>
+          </a:prstGeom>
+          <a:solidFill>
+            <a:srgbClr val="FFFFFF"/>
+          </a:solidFill>
+          <a:ln w="12700">
+            <a:solidFill>
+              <a:srgbClr val="E4E6E9"/>
+            </a:solidFill>
+            <a:prstDash val="solid"/>
+          </a:ln>
+        </p:spPr>
+      </p:sp>
+      <p:sp>
+        <p:nvSpPr>
+          <p:cNvPr id="33" name="Text 31"/>
+          <p:cNvSpPr/>
+          <p:nvPr/>
+        </p:nvSpPr>
+        <p:spPr>
+          <a:xfrm>
+            <a:off x="10168890" y="3611880"/>
+            <a:ext cx="1099261" cy="320040"/>
+          </a:xfrm>
+          <a:prstGeom prst="rect">
+            <a:avLst/>
+          </a:prstGeom>
+          <a:noFill/>
+          <a:ln/>
+        </p:spPr>
+        <p:txBody>
+          <a:bodyPr wrap="square" lIns="0" tIns="0" rIns="0" bIns="0" rtlCol="0" anchor="ctr"/>
+          <a:lstStyle/>
+          <a:p>
+            <a:pPr indent="0" marL="0">
+              <a:buNone/>
+            </a:pPr>
+            <a:r>
+              <a:rPr lang="en-US" sz="1100" dirty="0">
+                <a:solidFill>
+                  <a:srgbClr val="1C6EA4"/>
+                </a:solidFill>
+                <a:latin typeface="Consolas" pitchFamily="34" charset="0"/>
+                <a:ea typeface="Consolas" pitchFamily="34" charset="-122"/>
+                <a:cs typeface="Consolas" pitchFamily="34" charset="-120"/>
+              </a:rPr>
+              <a:t>06</a:t>
+            </a:r>
+            <a:endParaRPr lang="en-US" sz="1100" dirty="0"/>
+          </a:p>
+        </p:txBody>
+      </p:sp>
+      <p:sp>
+        <p:nvSpPr>
+          <p:cNvPr id="34" name="Text 32"/>
+          <p:cNvSpPr/>
+          <p:nvPr/>
+        </p:nvSpPr>
+        <p:spPr>
+          <a:xfrm>
+            <a:off x="10168890" y="4050792"/>
+            <a:ext cx="1099261" cy="868680"/>
           </a:xfrm>
           <a:prstGeom prst="rect">
             <a:avLst/>
@@ -1964,585 +2416,63 @@
           <a:bodyPr wrap="square" lIns="0" tIns="0" rIns="0" bIns="0" rtlCol="0" anchor="t"/>
           <a:lstStyle/>
           <a:p>
-            <a:pPr algn="ctr" indent="0" marL="0">
-              <a:buNone/>
-            </a:pPr>
-            <a:r>
-              <a:rPr lang="en-US" sz="1050" dirty="0">
-                <a:solidFill>
-                  <a:srgbClr val="567478"/>
+            <a:pPr indent="0" marL="0">
+              <a:lnSpc>
+                <a:spcPct val="96000"/>
+              </a:lnSpc>
+              <a:buNone/>
+            </a:pPr>
+            <a:r>
+              <a:rPr lang="en-US" sz="1300" b="1" dirty="0">
+                <a:solidFill>
+                  <a:srgbClr val="14304A"/>
+                </a:solidFill>
+                <a:latin typeface="Century Schoolbook" pitchFamily="34" charset="0"/>
+                <a:ea typeface="Century Schoolbook" pitchFamily="34" charset="-122"/>
+                <a:cs typeface="Century Schoolbook" pitchFamily="34" charset="-120"/>
+              </a:rPr>
+              <a:t>API GW + S3</a:t>
+            </a:r>
+            <a:endParaRPr lang="en-US" sz="1300" dirty="0"/>
+          </a:p>
+        </p:txBody>
+      </p:sp>
+      <p:sp>
+        <p:nvSpPr>
+          <p:cNvPr id="35" name="Text 33"/>
+          <p:cNvSpPr/>
+          <p:nvPr/>
+        </p:nvSpPr>
+        <p:spPr>
+          <a:xfrm>
+            <a:off x="10168890" y="4910328"/>
+            <a:ext cx="1099261" cy="365760"/>
+          </a:xfrm>
+          <a:prstGeom prst="rect">
+            <a:avLst/>
+          </a:prstGeom>
+          <a:noFill/>
+          <a:ln/>
+        </p:spPr>
+        <p:txBody>
+          <a:bodyPr wrap="square" lIns="0" tIns="0" rIns="0" bIns="0" rtlCol="0" anchor="ctr"/>
+          <a:lstStyle/>
+          <a:p>
+            <a:pPr indent="0" marL="0">
+              <a:buNone/>
+            </a:pPr>
+            <a:r>
+              <a:rPr lang="en-US" sz="900" dirty="0">
+                <a:solidFill>
+                  <a:srgbClr val="5F6B74"/>
                 </a:solidFill>
                 <a:latin typeface="Calibri" pitchFamily="34" charset="0"/>
                 <a:ea typeface="Calibri" pitchFamily="34" charset="-122"/>
                 <a:cs typeface="Calibri" pitchFamily="34" charset="-120"/>
               </a:rPr>
-              <a:t>1 summary / window</a:t>
-            </a:r>
-            <a:endParaRPr lang="en-US" sz="1050" dirty="0"/>
-          </a:p>
-        </p:txBody>
-      </p:sp>
-      <p:sp>
-        <p:nvSpPr>
-          <p:cNvPr id="17" name="Shape 15"/>
-          <p:cNvSpPr/>
-          <p:nvPr/>
-        </p:nvSpPr>
-        <p:spPr>
-          <a:xfrm>
-            <a:off x="5966643" y="3154680"/>
-            <a:ext cx="258409" cy="0"/>
-          </a:xfrm>
-          <a:prstGeom prst="line">
-            <a:avLst/>
-          </a:prstGeom>
-          <a:noFill/>
-          <a:ln w="25400">
-            <a:solidFill>
-              <a:srgbClr val="4FAAB6"/>
-            </a:solidFill>
-            <a:prstDash val="solid"/>
-            <a:tailEnd type="triangle"/>
-          </a:ln>
-        </p:spPr>
-      </p:sp>
-      <p:sp>
-        <p:nvSpPr>
-          <p:cNvPr id="18" name="Shape 16"/>
-          <p:cNvSpPr/>
-          <p:nvPr/>
-        </p:nvSpPr>
-        <p:spPr>
-          <a:xfrm>
-            <a:off x="6243340" y="2468880"/>
-            <a:ext cx="1572768" cy="1371600"/>
-          </a:xfrm>
-          <a:prstGeom prst="roundRect">
-            <a:avLst>
-              <a:gd name="adj" fmla="val 6667"/>
-            </a:avLst>
-          </a:prstGeom>
-          <a:solidFill>
-            <a:srgbClr val="EDF6F7"/>
-          </a:solidFill>
-          <a:ln w="19050">
-            <a:solidFill>
-              <a:srgbClr val="0F6E7C"/>
-            </a:solidFill>
-            <a:prstDash val="solid"/>
-          </a:ln>
-        </p:spPr>
-      </p:sp>
-      <p:sp>
-        <p:nvSpPr>
-          <p:cNvPr id="19" name="Shape 17"/>
-          <p:cNvSpPr/>
-          <p:nvPr/>
-        </p:nvSpPr>
-        <p:spPr>
-          <a:xfrm>
-            <a:off x="6938284" y="2633472"/>
-            <a:ext cx="182880" cy="182880"/>
-          </a:xfrm>
-          <a:prstGeom prst="ellipse">
-            <a:avLst/>
-          </a:prstGeom>
-          <a:solidFill>
-            <a:srgbClr val="0F6E7C"/>
-          </a:solidFill>
-          <a:ln/>
-        </p:spPr>
-      </p:sp>
-      <p:sp>
-        <p:nvSpPr>
-          <p:cNvPr id="20" name="Text 18"/>
-          <p:cNvSpPr/>
-          <p:nvPr/>
-        </p:nvSpPr>
-        <p:spPr>
-          <a:xfrm>
-            <a:off x="6215908" y="2852928"/>
-            <a:ext cx="1627632" cy="365760"/>
-          </a:xfrm>
-          <a:prstGeom prst="rect">
-            <a:avLst/>
-          </a:prstGeom>
-          <a:noFill/>
-          <a:ln/>
-        </p:spPr>
-        <p:txBody>
-          <a:bodyPr wrap="square" lIns="0" tIns="0" rIns="0" bIns="0" rtlCol="0" anchor="ctr"/>
-          <a:lstStyle/>
-          <a:p>
-            <a:pPr algn="ctr" indent="0" marL="0">
-              <a:buNone/>
-            </a:pPr>
-            <a:r>
-              <a:rPr lang="en-US" sz="1450" b="1" dirty="0">
-                <a:solidFill>
-                  <a:srgbClr val="0F2E33"/>
-                </a:solidFill>
-                <a:latin typeface="Calibri" pitchFamily="34" charset="0"/>
-                <a:ea typeface="Calibri" pitchFamily="34" charset="-122"/>
-                <a:cs typeface="Calibri" pitchFamily="34" charset="-120"/>
-              </a:rPr>
-              <a:t>AWS Lambda</a:t>
-            </a:r>
-            <a:endParaRPr lang="en-US" sz="1450" dirty="0"/>
-          </a:p>
-        </p:txBody>
-      </p:sp>
-      <p:sp>
-        <p:nvSpPr>
-          <p:cNvPr id="21" name="Text 19"/>
-          <p:cNvSpPr/>
-          <p:nvPr/>
-        </p:nvSpPr>
-        <p:spPr>
-          <a:xfrm>
-            <a:off x="6243340" y="3200400"/>
-            <a:ext cx="1572768" cy="411480"/>
-          </a:xfrm>
-          <a:prstGeom prst="rect">
-            <a:avLst/>
-          </a:prstGeom>
-          <a:noFill/>
-          <a:ln/>
-        </p:spPr>
-        <p:txBody>
-          <a:bodyPr wrap="square" lIns="0" tIns="0" rIns="0" bIns="0" rtlCol="0" anchor="t"/>
-          <a:lstStyle/>
-          <a:p>
-            <a:pPr algn="ctr" indent="0" marL="0">
-              <a:buNone/>
-            </a:pPr>
-            <a:r>
-              <a:rPr lang="en-US" sz="1050" dirty="0">
-                <a:solidFill>
-                  <a:srgbClr val="567478"/>
-                </a:solidFill>
-                <a:latin typeface="Calibri" pitchFamily="34" charset="0"/>
-                <a:ea typeface="Calibri" pitchFamily="34" charset="-122"/>
-                <a:cs typeface="Calibri" pitchFamily="34" charset="-120"/>
-              </a:rPr>
-              <a:t>nodejs20 ingest</a:t>
-            </a:r>
-            <a:endParaRPr lang="en-US" sz="1050" dirty="0"/>
-          </a:p>
-        </p:txBody>
-      </p:sp>
-      <p:sp>
-        <p:nvSpPr>
-          <p:cNvPr id="22" name="Shape 20"/>
-          <p:cNvSpPr/>
-          <p:nvPr/>
-        </p:nvSpPr>
-        <p:spPr>
-          <a:xfrm>
-            <a:off x="7834396" y="3154680"/>
-            <a:ext cx="258409" cy="0"/>
-          </a:xfrm>
-          <a:prstGeom prst="line">
-            <a:avLst/>
-          </a:prstGeom>
-          <a:noFill/>
-          <a:ln w="25400">
-            <a:solidFill>
-              <a:srgbClr val="4FAAB6"/>
-            </a:solidFill>
-            <a:prstDash val="solid"/>
-            <a:tailEnd type="triangle"/>
-          </a:ln>
-        </p:spPr>
-      </p:sp>
-      <p:sp>
-        <p:nvSpPr>
-          <p:cNvPr id="23" name="Shape 21"/>
-          <p:cNvSpPr/>
-          <p:nvPr/>
-        </p:nvSpPr>
-        <p:spPr>
-          <a:xfrm>
-            <a:off x="8111094" y="2468880"/>
-            <a:ext cx="1572768" cy="1371600"/>
-          </a:xfrm>
-          <a:prstGeom prst="roundRect">
-            <a:avLst>
-              <a:gd name="adj" fmla="val 6667"/>
-            </a:avLst>
-          </a:prstGeom>
-          <a:solidFill>
-            <a:srgbClr val="EDF6F7"/>
-          </a:solidFill>
-          <a:ln w="19050">
-            <a:solidFill>
-              <a:srgbClr val="0F6E7C"/>
-            </a:solidFill>
-            <a:prstDash val="solid"/>
-          </a:ln>
-        </p:spPr>
-      </p:sp>
-      <p:sp>
-        <p:nvSpPr>
-          <p:cNvPr id="24" name="Shape 22"/>
-          <p:cNvSpPr/>
-          <p:nvPr/>
-        </p:nvSpPr>
-        <p:spPr>
-          <a:xfrm>
-            <a:off x="8806038" y="2633472"/>
-            <a:ext cx="182880" cy="182880"/>
-          </a:xfrm>
-          <a:prstGeom prst="ellipse">
-            <a:avLst/>
-          </a:prstGeom>
-          <a:solidFill>
-            <a:srgbClr val="0F6E7C"/>
-          </a:solidFill>
-          <a:ln/>
-        </p:spPr>
-      </p:sp>
-      <p:sp>
-        <p:nvSpPr>
-          <p:cNvPr id="25" name="Text 23"/>
-          <p:cNvSpPr/>
-          <p:nvPr/>
-        </p:nvSpPr>
-        <p:spPr>
-          <a:xfrm>
-            <a:off x="8083662" y="2852928"/>
-            <a:ext cx="1627632" cy="365760"/>
-          </a:xfrm>
-          <a:prstGeom prst="rect">
-            <a:avLst/>
-          </a:prstGeom>
-          <a:noFill/>
-          <a:ln/>
-        </p:spPr>
-        <p:txBody>
-          <a:bodyPr wrap="square" lIns="0" tIns="0" rIns="0" bIns="0" rtlCol="0" anchor="ctr"/>
-          <a:lstStyle/>
-          <a:p>
-            <a:pPr algn="ctr" indent="0" marL="0">
-              <a:buNone/>
-            </a:pPr>
-            <a:r>
-              <a:rPr lang="en-US" sz="1450" b="1" dirty="0">
-                <a:solidFill>
-                  <a:srgbClr val="0F2E33"/>
-                </a:solidFill>
-                <a:latin typeface="Calibri" pitchFamily="34" charset="0"/>
-                <a:ea typeface="Calibri" pitchFamily="34" charset="-122"/>
-                <a:cs typeface="Calibri" pitchFamily="34" charset="-120"/>
-              </a:rPr>
-              <a:t>DynamoDB</a:t>
-            </a:r>
-            <a:endParaRPr lang="en-US" sz="1450" dirty="0"/>
-          </a:p>
-        </p:txBody>
-      </p:sp>
-      <p:sp>
-        <p:nvSpPr>
-          <p:cNvPr id="26" name="Text 24"/>
-          <p:cNvSpPr/>
-          <p:nvPr/>
-        </p:nvSpPr>
-        <p:spPr>
-          <a:xfrm>
-            <a:off x="8111094" y="3200400"/>
-            <a:ext cx="1572768" cy="411480"/>
-          </a:xfrm>
-          <a:prstGeom prst="rect">
-            <a:avLst/>
-          </a:prstGeom>
-          <a:noFill/>
-          <a:ln/>
-        </p:spPr>
-        <p:txBody>
-          <a:bodyPr wrap="square" lIns="0" tIns="0" rIns="0" bIns="0" rtlCol="0" anchor="t"/>
-          <a:lstStyle/>
-          <a:p>
-            <a:pPr algn="ctr" indent="0" marL="0">
-              <a:buNone/>
-            </a:pPr>
-            <a:r>
-              <a:rPr lang="en-US" sz="1050" dirty="0">
-                <a:solidFill>
-                  <a:srgbClr val="567478"/>
-                </a:solidFill>
-                <a:latin typeface="Calibri" pitchFamily="34" charset="0"/>
-                <a:ea typeface="Calibri" pitchFamily="34" charset="-122"/>
-                <a:cs typeface="Calibri" pitchFamily="34" charset="-120"/>
-              </a:rPr>
-              <a:t>time-series store</a:t>
-            </a:r>
-            <a:endParaRPr lang="en-US" sz="1050" dirty="0"/>
-          </a:p>
-        </p:txBody>
-      </p:sp>
-      <p:sp>
-        <p:nvSpPr>
-          <p:cNvPr id="27" name="Shape 25"/>
-          <p:cNvSpPr/>
-          <p:nvPr/>
-        </p:nvSpPr>
-        <p:spPr>
-          <a:xfrm>
-            <a:off x="9702150" y="3154680"/>
-            <a:ext cx="258409" cy="0"/>
-          </a:xfrm>
-          <a:prstGeom prst="line">
-            <a:avLst/>
-          </a:prstGeom>
-          <a:noFill/>
-          <a:ln w="25400">
-            <a:solidFill>
-              <a:srgbClr val="4FAAB6"/>
-            </a:solidFill>
-            <a:prstDash val="solid"/>
-            <a:tailEnd type="triangle"/>
-          </a:ln>
-        </p:spPr>
-      </p:sp>
-      <p:sp>
-        <p:nvSpPr>
-          <p:cNvPr id="28" name="Shape 26"/>
-          <p:cNvSpPr/>
-          <p:nvPr/>
-        </p:nvSpPr>
-        <p:spPr>
-          <a:xfrm>
-            <a:off x="9978847" y="2468880"/>
-            <a:ext cx="1572768" cy="1371600"/>
-          </a:xfrm>
-          <a:prstGeom prst="roundRect">
-            <a:avLst>
-              <a:gd name="adj" fmla="val 6667"/>
-            </a:avLst>
-          </a:prstGeom>
-          <a:solidFill>
-            <a:srgbClr val="EDF6F7"/>
-          </a:solidFill>
-          <a:ln w="19050">
-            <a:solidFill>
-              <a:srgbClr val="1E8FA0"/>
-            </a:solidFill>
-            <a:prstDash val="solid"/>
-          </a:ln>
-        </p:spPr>
-      </p:sp>
-      <p:sp>
-        <p:nvSpPr>
-          <p:cNvPr id="29" name="Shape 27"/>
-          <p:cNvSpPr/>
-          <p:nvPr/>
-        </p:nvSpPr>
-        <p:spPr>
-          <a:xfrm>
-            <a:off x="10673791" y="2633472"/>
-            <a:ext cx="182880" cy="182880"/>
-          </a:xfrm>
-          <a:prstGeom prst="ellipse">
-            <a:avLst/>
-          </a:prstGeom>
-          <a:solidFill>
-            <a:srgbClr val="1E8FA0"/>
-          </a:solidFill>
-          <a:ln/>
-        </p:spPr>
-      </p:sp>
-      <p:sp>
-        <p:nvSpPr>
-          <p:cNvPr id="30" name="Text 28"/>
-          <p:cNvSpPr/>
-          <p:nvPr/>
-        </p:nvSpPr>
-        <p:spPr>
-          <a:xfrm>
-            <a:off x="9951415" y="2852928"/>
-            <a:ext cx="1627632" cy="365760"/>
-          </a:xfrm>
-          <a:prstGeom prst="rect">
-            <a:avLst/>
-          </a:prstGeom>
-          <a:noFill/>
-          <a:ln/>
-        </p:spPr>
-        <p:txBody>
-          <a:bodyPr wrap="square" lIns="0" tIns="0" rIns="0" bIns="0" rtlCol="0" anchor="ctr"/>
-          <a:lstStyle/>
-          <a:p>
-            <a:pPr algn="ctr" indent="0" marL="0">
-              <a:buNone/>
-            </a:pPr>
-            <a:r>
-              <a:rPr lang="en-US" sz="1450" b="1" dirty="0">
-                <a:solidFill>
-                  <a:srgbClr val="0F2E33"/>
-                </a:solidFill>
-                <a:latin typeface="Calibri" pitchFamily="34" charset="0"/>
-                <a:ea typeface="Calibri" pitchFamily="34" charset="-122"/>
-                <a:cs typeface="Calibri" pitchFamily="34" charset="-120"/>
-              </a:rPr>
-              <a:t>API GW + S3</a:t>
-            </a:r>
-            <a:endParaRPr lang="en-US" sz="1450" dirty="0"/>
-          </a:p>
-        </p:txBody>
-      </p:sp>
-      <p:sp>
-        <p:nvSpPr>
-          <p:cNvPr id="31" name="Text 29"/>
-          <p:cNvSpPr/>
-          <p:nvPr/>
-        </p:nvSpPr>
-        <p:spPr>
-          <a:xfrm>
-            <a:off x="9978847" y="3200400"/>
-            <a:ext cx="1572768" cy="411480"/>
-          </a:xfrm>
-          <a:prstGeom prst="rect">
-            <a:avLst/>
-          </a:prstGeom>
-          <a:noFill/>
-          <a:ln/>
-        </p:spPr>
-        <p:txBody>
-          <a:bodyPr wrap="square" lIns="0" tIns="0" rIns="0" bIns="0" rtlCol="0" anchor="t"/>
-          <a:lstStyle/>
-          <a:p>
-            <a:pPr algn="ctr" indent="0" marL="0">
-              <a:buNone/>
-            </a:pPr>
-            <a:r>
-              <a:rPr lang="en-US" sz="1050" dirty="0">
-                <a:solidFill>
-                  <a:srgbClr val="567478"/>
-                </a:solidFill>
-                <a:latin typeface="Calibri" pitchFamily="34" charset="0"/>
-                <a:ea typeface="Calibri" pitchFamily="34" charset="-122"/>
-                <a:cs typeface="Calibri" pitchFamily="34" charset="-120"/>
-              </a:rPr>
               <a:t>compliance board</a:t>
             </a:r>
-            <a:endParaRPr lang="en-US" sz="1050" dirty="0"/>
-          </a:p>
-        </p:txBody>
-      </p:sp>
-      <p:sp>
-        <p:nvSpPr>
-          <p:cNvPr id="32" name="Text 30"/>
-          <p:cNvSpPr/>
-          <p:nvPr/>
-        </p:nvSpPr>
-        <p:spPr>
-          <a:xfrm>
-            <a:off x="640080" y="3977640"/>
-            <a:ext cx="3440521" cy="274320"/>
-          </a:xfrm>
-          <a:prstGeom prst="rect">
-            <a:avLst/>
-          </a:prstGeom>
-          <a:noFill/>
-          <a:ln/>
-        </p:spPr>
-        <p:txBody>
-          <a:bodyPr wrap="square" rtlCol="0" anchor="ctr"/>
-          <a:lstStyle/>
-          <a:p>
-            <a:pPr algn="ctr" indent="0" marL="0">
-              <a:buNone/>
-            </a:pPr>
-            <a:r>
-              <a:rPr lang="en-US" sz="1100" b="1" spc="200" kern="0" dirty="0">
-                <a:solidFill>
-                  <a:srgbClr val="4FAAB6"/>
-                </a:solidFill>
-                <a:latin typeface="Calibri" pitchFamily="34" charset="0"/>
-                <a:ea typeface="Calibri" pitchFamily="34" charset="-122"/>
-                <a:cs typeface="Calibri" pitchFamily="34" charset="-120"/>
-              </a:rPr>
-              <a:t>EDGE</a:t>
-            </a:r>
-            <a:endParaRPr lang="en-US" sz="1100" dirty="0"/>
-          </a:p>
-        </p:txBody>
-      </p:sp>
-      <p:sp>
-        <p:nvSpPr>
-          <p:cNvPr id="33" name="Text 31"/>
-          <p:cNvSpPr/>
-          <p:nvPr/>
-        </p:nvSpPr>
-        <p:spPr>
-          <a:xfrm>
-            <a:off x="4375587" y="3977640"/>
-            <a:ext cx="7176028" cy="274320"/>
-          </a:xfrm>
-          <a:prstGeom prst="rect">
-            <a:avLst/>
-          </a:prstGeom>
-          <a:noFill/>
-          <a:ln/>
-        </p:spPr>
-        <p:txBody>
-          <a:bodyPr wrap="square" rtlCol="0" anchor="ctr"/>
-          <a:lstStyle/>
-          <a:p>
-            <a:pPr algn="ctr" indent="0" marL="0">
-              <a:buNone/>
-            </a:pPr>
-            <a:r>
-              <a:rPr lang="en-US" sz="1100" b="1" spc="200" kern="0" dirty="0">
-                <a:solidFill>
-                  <a:srgbClr val="0F6E7C"/>
-                </a:solidFill>
-                <a:latin typeface="Calibri" pitchFamily="34" charset="0"/>
-                <a:ea typeface="Calibri" pitchFamily="34" charset="-122"/>
-                <a:cs typeface="Calibri" pitchFamily="34" charset="-120"/>
-              </a:rPr>
-              <a:t>CLOUD</a:t>
-            </a:r>
-            <a:endParaRPr lang="en-US" sz="1100" dirty="0"/>
-          </a:p>
-        </p:txBody>
-      </p:sp>
-      <p:sp>
-        <p:nvSpPr>
-          <p:cNvPr id="34" name="Text 32"/>
-          <p:cNvSpPr/>
-          <p:nvPr/>
-        </p:nvSpPr>
-        <p:spPr>
-          <a:xfrm>
-            <a:off x="640080" y="5257800"/>
-            <a:ext cx="10972800" cy="731520"/>
-          </a:xfrm>
-          <a:prstGeom prst="rect">
-            <a:avLst/>
-          </a:prstGeom>
-          <a:noFill/>
-          <a:ln/>
-        </p:spPr>
-        <p:txBody>
-          <a:bodyPr wrap="square" rtlCol="0" anchor="ctr"/>
-          <a:lstStyle/>
-          <a:p>
-            <a:pPr algn="ctr" indent="0" marL="0">
-              <a:buNone/>
-            </a:pPr>
-            <a:r>
-              <a:rPr lang="en-US" sz="1500" i="1" dirty="0">
-                <a:solidFill>
-                  <a:srgbClr val="0F6E7C"/>
-                </a:solidFill>
-                <a:latin typeface="Calibri" pitchFamily="34" charset="0"/>
-                <a:ea typeface="Calibri" pitchFamily="34" charset="-122"/>
-                <a:cs typeface="Calibri" pitchFamily="34" charset="-120"/>
-              </a:rPr>
-              <a:t>Every ten-second window is scored as it closes, and thresholds are checked against the window minimum, never the average, so a brief dip cannot hide.</a:t>
-            </a:r>
-            <a:endParaRPr lang="en-US" sz="1500" dirty="0"/>
+            <a:endParaRPr lang="en-US" sz="900" dirty="0"/>
           </a:p>
         </p:txBody>
       </p:sp>
@@ -2560,7 +2490,7 @@
     <p:bg>
       <p:bgPr>
         <a:solidFill>
-          <a:srgbClr val="FFFFFF"/>
+          <a:srgbClr val="EEF4F9"/>
         </a:solidFill>
       </p:bgPr>
     </p:bg>
@@ -2580,23 +2510,63 @@
       </p:grpSpPr>
       <p:sp>
         <p:nvSpPr>
-          <p:cNvPr id="2" name="Text 0"/>
-          <p:cNvSpPr/>
-          <p:nvPr/>
-        </p:nvSpPr>
-        <p:spPr>
-          <a:xfrm>
-            <a:off x="640080" y="457200"/>
-            <a:ext cx="7315200" cy="640080"/>
-          </a:xfrm>
-          <a:prstGeom prst="rect">
-            <a:avLst/>
-          </a:prstGeom>
-          <a:noFill/>
-          <a:ln/>
-        </p:spPr>
-        <p:txBody>
-          <a:bodyPr wrap="square" rtlCol="0" anchor="ctr"/>
+          <p:cNvPr id="2" name="Shape 0"/>
+          <p:cNvSpPr/>
+          <p:nvPr/>
+        </p:nvSpPr>
+        <p:spPr>
+          <a:xfrm>
+            <a:off x="0" y="0"/>
+            <a:ext cx="12191695" cy="960120"/>
+          </a:xfrm>
+          <a:prstGeom prst="rect">
+            <a:avLst/>
+          </a:prstGeom>
+          <a:solidFill>
+            <a:srgbClr val="E6ECF1"/>
+          </a:solidFill>
+          <a:ln/>
+        </p:spPr>
+      </p:sp>
+      <p:sp>
+        <p:nvSpPr>
+          <p:cNvPr id="3" name="Shape 1"/>
+          <p:cNvSpPr/>
+          <p:nvPr/>
+        </p:nvSpPr>
+        <p:spPr>
+          <a:xfrm>
+            <a:off x="0" y="960120"/>
+            <a:ext cx="12191695" cy="54864"/>
+          </a:xfrm>
+          <a:prstGeom prst="rect">
+            <a:avLst/>
+          </a:prstGeom>
+          <a:solidFill>
+            <a:srgbClr val="1C6EA4"/>
+          </a:solidFill>
+          <a:ln/>
+        </p:spPr>
+      </p:sp>
+      <p:sp>
+        <p:nvSpPr>
+          <p:cNvPr id="4" name="Text 2"/>
+          <p:cNvSpPr/>
+          <p:nvPr/>
+        </p:nvSpPr>
+        <p:spPr>
+          <a:xfrm>
+            <a:off x="777240" y="1188720"/>
+            <a:ext cx="914400" cy="640080"/>
+          </a:xfrm>
+          <a:prstGeom prst="rect">
+            <a:avLst/>
+          </a:prstGeom>
+          <a:noFill/>
+          <a:ln/>
+        </p:spPr>
+        <p:txBody>
+          <a:bodyPr wrap="square" lIns="0" tIns="0" rIns="0" bIns="0" rtlCol="0" anchor="ctr"/>
           <a:lstStyle/>
           <a:p>
             <a:pPr indent="0" marL="0">
@@ -2605,13 +2575,13 @@
             <a:r>
               <a:rPr lang="en-US" sz="3000" b="1" dirty="0">
                 <a:solidFill>
-                  <a:srgbClr val="0F2E33"/>
+                  <a:srgbClr val="1C6EA4"/>
                 </a:solidFill>
                 <a:latin typeface="Century Schoolbook" pitchFamily="34" charset="0"/>
                 <a:ea typeface="Century Schoolbook" pitchFamily="34" charset="-122"/>
                 <a:cs typeface="Century Schoolbook" pitchFamily="34" charset="-120"/>
               </a:rPr>
-              <a:t>Live Demo</a:t>
+              <a:t>02</a:t>
             </a:r>
             <a:endParaRPr lang="en-US" sz="3000" dirty="0"/>
           </a:p>
@@ -2619,14 +2589,92 @@
       </p:sp>
       <p:sp>
         <p:nvSpPr>
-          <p:cNvPr id="3" name="Text 1"/>
-          <p:cNvSpPr/>
-          <p:nvPr/>
-        </p:nvSpPr>
-        <p:spPr>
-          <a:xfrm>
-            <a:off x="658368" y="1143000"/>
-            <a:ext cx="10972800" cy="365760"/>
+          <p:cNvPr id="5" name="Text 3"/>
+          <p:cNvSpPr/>
+          <p:nvPr/>
+        </p:nvSpPr>
+        <p:spPr>
+          <a:xfrm>
+            <a:off x="1645920" y="1362456"/>
+            <a:ext cx="9768535" cy="274320"/>
+          </a:xfrm>
+          <a:prstGeom prst="rect">
+            <a:avLst/>
+          </a:prstGeom>
+          <a:noFill/>
+          <a:ln/>
+        </p:spPr>
+        <p:txBody>
+          <a:bodyPr wrap="square" lIns="0" tIns="0" rIns="0" bIns="0" rtlCol="0" anchor="ctr"/>
+          <a:lstStyle/>
+          <a:p>
+            <a:pPr indent="0" marL="0">
+              <a:buNone/>
+            </a:pPr>
+            <a:r>
+              <a:rPr lang="en-US" sz="1100" b="1" spc="200" kern="0" dirty="0">
+                <a:solidFill>
+                  <a:srgbClr val="5F6B74"/>
+                </a:solidFill>
+                <a:latin typeface="Calibri" pitchFamily="34" charset="0"/>
+                <a:ea typeface="Calibri" pitchFamily="34" charset="-122"/>
+                <a:cs typeface="Calibri" pitchFamily="34" charset="-120"/>
+              </a:rPr>
+              <a:t>LIVE DEMO</a:t>
+            </a:r>
+            <a:endParaRPr lang="en-US" sz="1100" dirty="0"/>
+          </a:p>
+        </p:txBody>
+      </p:sp>
+      <p:sp>
+        <p:nvSpPr>
+          <p:cNvPr id="6" name="Text 4"/>
+          <p:cNvSpPr/>
+          <p:nvPr/>
+        </p:nvSpPr>
+        <p:spPr>
+          <a:xfrm>
+            <a:off x="777240" y="1837944"/>
+            <a:ext cx="10637215" cy="640080"/>
+          </a:xfrm>
+          <a:prstGeom prst="rect">
+            <a:avLst/>
+          </a:prstGeom>
+          <a:noFill/>
+          <a:ln/>
+        </p:spPr>
+        <p:txBody>
+          <a:bodyPr wrap="square" lIns="0" tIns="0" rIns="0" bIns="0" rtlCol="0" anchor="ctr"/>
+          <a:lstStyle/>
+          <a:p>
+            <a:pPr indent="0" marL="0">
+              <a:buNone/>
+            </a:pPr>
+            <a:r>
+              <a:rPr lang="en-US" sz="2300" b="1" dirty="0">
+                <a:solidFill>
+                  <a:srgbClr val="14304A"/>
+                </a:solidFill>
+                <a:latin typeface="Century Schoolbook" pitchFamily="34" charset="0"/>
+                <a:ea typeface="Century Schoolbook" pitchFamily="34" charset="-122"/>
+                <a:cs typeface="Century Schoolbook" pitchFamily="34" charset="-120"/>
+              </a:rPr>
+              <a:t>See it running on AWS</a:t>
+            </a:r>
+            <a:endParaRPr lang="en-US" sz="2300" dirty="0"/>
+          </a:p>
+        </p:txBody>
+      </p:sp>
+      <p:sp>
+        <p:nvSpPr>
+          <p:cNvPr id="7" name="Text 5"/>
+          <p:cNvSpPr/>
+          <p:nvPr/>
+        </p:nvSpPr>
+        <p:spPr>
+          <a:xfrm>
+            <a:off x="777240" y="2359152"/>
+            <a:ext cx="10637215" cy="274320"/>
           </a:xfrm>
           <a:prstGeom prst="rect">
             <a:avLst/>
@@ -2642,9 +2690,9 @@
               <a:buNone/>
             </a:pPr>
             <a:r>
-              <a:rPr lang="en-US" sz="1400" dirty="0">
-                <a:solidFill>
-                  <a:srgbClr val="1E8FA0"/>
+              <a:rPr lang="en-US" sz="1100" dirty="0">
+                <a:solidFill>
+                  <a:srgbClr val="1C6EA4"/>
                 </a:solidFill>
                 <a:latin typeface="Consolas" pitchFamily="34" charset="0"/>
                 <a:ea typeface="Consolas" pitchFamily="34" charset="-122"/>
@@ -2652,32 +2700,32 @@
               </a:rPr>
               <a:t>wtu-frontend-824792629641.s3.us-east-1.amazonaws.com</a:t>
             </a:r>
-            <a:endParaRPr lang="en-US" sz="1400" dirty="0"/>
-          </a:p>
-        </p:txBody>
-      </p:sp>
-      <p:sp>
-        <p:nvSpPr>
-          <p:cNvPr id="4" name="Shape 2"/>
-          <p:cNvSpPr/>
-          <p:nvPr/>
-        </p:nvSpPr>
-        <p:spPr>
-          <a:xfrm>
-            <a:off x="640080" y="1828800"/>
-            <a:ext cx="10881360" cy="1371600"/>
+            <a:endParaRPr lang="en-US" sz="1100" dirty="0"/>
+          </a:p>
+        </p:txBody>
+      </p:sp>
+      <p:sp>
+        <p:nvSpPr>
+          <p:cNvPr id="8" name="Shape 6"/>
+          <p:cNvSpPr/>
+          <p:nvPr/>
+        </p:nvSpPr>
+        <p:spPr>
+          <a:xfrm>
+            <a:off x="777240" y="2971800"/>
+            <a:ext cx="3301898" cy="3108960"/>
           </a:xfrm>
           <a:prstGeom prst="roundRect">
             <a:avLst>
-              <a:gd name="adj" fmla="val 6667"/>
+              <a:gd name="adj" fmla="val 1765"/>
             </a:avLst>
           </a:prstGeom>
           <a:solidFill>
-            <a:srgbClr val="EDF6F7"/>
-          </a:solidFill>
-          <a:ln w="15240">
+            <a:srgbClr val="FFFFFF"/>
+          </a:solidFill>
+          <a:ln w="12700">
             <a:solidFill>
-              <a:srgbClr val="1E8FA0"/>
+              <a:srgbClr val="E4E6E9"/>
             </a:solidFill>
             <a:prstDash val="solid"/>
           </a:ln>
@@ -2685,34 +2733,14 @@
       </p:sp>
       <p:sp>
         <p:nvSpPr>
-          <p:cNvPr id="5" name="Shape 3"/>
-          <p:cNvSpPr/>
-          <p:nvPr/>
-        </p:nvSpPr>
-        <p:spPr>
-          <a:xfrm>
-            <a:off x="960120" y="2203704"/>
-            <a:ext cx="621792" cy="621792"/>
-          </a:xfrm>
-          <a:prstGeom prst="ellipse">
-            <a:avLst/>
-          </a:prstGeom>
-          <a:solidFill>
-            <a:srgbClr val="0F6E7C"/>
-          </a:solidFill>
-          <a:ln/>
-        </p:spPr>
-      </p:sp>
-      <p:sp>
-        <p:nvSpPr>
-          <p:cNvPr id="6" name="Text 4"/>
-          <p:cNvSpPr/>
-          <p:nvPr/>
-        </p:nvSpPr>
-        <p:spPr>
-          <a:xfrm>
-            <a:off x="960120" y="2203704"/>
-            <a:ext cx="621792" cy="621792"/>
+          <p:cNvPr id="9" name="Text 7"/>
+          <p:cNvSpPr/>
+          <p:nvPr/>
+        </p:nvSpPr>
+        <p:spPr>
+          <a:xfrm>
+            <a:off x="1051560" y="3209544"/>
+            <a:ext cx="1828800" cy="777240"/>
           </a:xfrm>
           <a:prstGeom prst="rect">
             <a:avLst/>
@@ -2724,34 +2752,76 @@
           <a:bodyPr wrap="square" lIns="0" tIns="0" rIns="0" bIns="0" rtlCol="0" anchor="ctr"/>
           <a:lstStyle/>
           <a:p>
-            <a:pPr algn="ctr" indent="0" marL="0">
-              <a:buNone/>
-            </a:pPr>
-            <a:r>
-              <a:rPr lang="en-US" sz="2200" b="1" dirty="0">
-                <a:solidFill>
-                  <a:srgbClr val="FFFFFF"/>
+            <a:pPr indent="0" marL="0">
+              <a:buNone/>
+            </a:pPr>
+            <a:r>
+              <a:rPr lang="en-US" sz="3800" b="1" dirty="0">
+                <a:solidFill>
+                  <a:srgbClr val="1C6EA4"/>
                 </a:solidFill>
                 <a:latin typeface="Century Schoolbook" pitchFamily="34" charset="0"/>
                 <a:ea typeface="Century Schoolbook" pitchFamily="34" charset="-122"/>
                 <a:cs typeface="Century Schoolbook" pitchFamily="34" charset="-120"/>
               </a:rPr>
-              <a:t>1</a:t>
-            </a:r>
-            <a:endParaRPr lang="en-US" sz="2200" dirty="0"/>
-          </a:p>
-        </p:txBody>
-      </p:sp>
-      <p:sp>
-        <p:nvSpPr>
-          <p:cNvPr id="7" name="Text 5"/>
-          <p:cNvSpPr/>
-          <p:nvPr/>
-        </p:nvSpPr>
-        <p:spPr>
-          <a:xfrm>
-            <a:off x="1828800" y="2029968"/>
-            <a:ext cx="9418320" cy="411480"/>
+              <a:t>01</a:t>
+            </a:r>
+            <a:endParaRPr lang="en-US" sz="3800" dirty="0"/>
+          </a:p>
+        </p:txBody>
+      </p:sp>
+      <p:sp>
+        <p:nvSpPr>
+          <p:cNvPr id="10" name="Text 8"/>
+          <p:cNvSpPr/>
+          <p:nvPr/>
+        </p:nvSpPr>
+        <p:spPr>
+          <a:xfrm>
+            <a:off x="1069848" y="4023360"/>
+            <a:ext cx="2753258" cy="868680"/>
+          </a:xfrm>
+          <a:prstGeom prst="rect">
+            <a:avLst/>
+          </a:prstGeom>
+          <a:noFill/>
+          <a:ln/>
+        </p:spPr>
+        <p:txBody>
+          <a:bodyPr wrap="square" lIns="0" tIns="0" rIns="0" bIns="0" rtlCol="0" anchor="t"/>
+          <a:lstStyle/>
+          <a:p>
+            <a:pPr indent="0" marL="0">
+              <a:lnSpc>
+                <a:spcPct val="100000"/>
+              </a:lnSpc>
+              <a:buNone/>
+            </a:pPr>
+            <a:r>
+              <a:rPr lang="en-US" sz="1550" b="1" dirty="0">
+                <a:solidFill>
+                  <a:srgbClr val="14304A"/>
+                </a:solidFill>
+                <a:latin typeface="Century Schoolbook" pitchFamily="34" charset="0"/>
+                <a:ea typeface="Century Schoolbook" pitchFamily="34" charset="-122"/>
+                <a:cs typeface="Century Schoolbook" pitchFamily="34" charset="-120"/>
+              </a:rPr>
+              <a:t>A reading-by-plant matrix</a:t>
+            </a:r>
+            <a:endParaRPr lang="en-US" sz="1550" dirty="0"/>
+          </a:p>
+        </p:txBody>
+      </p:sp>
+      <p:sp>
+        <p:nvSpPr>
+          <p:cNvPr id="11" name="Text 9"/>
+          <p:cNvSpPr/>
+          <p:nvPr/>
+        </p:nvSpPr>
+        <p:spPr>
+          <a:xfrm>
+            <a:off x="1069848" y="4892040"/>
+            <a:ext cx="2753258" cy="1005840"/>
           </a:xfrm>
           <a:prstGeom prst="rect">
             <a:avLst/>
@@ -2764,33 +2834,63 @@
           <a:lstStyle/>
           <a:p>
             <a:pPr indent="0" marL="0">
-              <a:buNone/>
-            </a:pPr>
-            <a:r>
-              <a:rPr lang="en-US" sz="1700" b="1" dirty="0">
-                <a:solidFill>
-                  <a:srgbClr val="0F2E33"/>
+              <a:lnSpc>
+                <a:spcPct val="120000"/>
+              </a:lnSpc>
+              <a:buNone/>
+            </a:pPr>
+            <a:r>
+              <a:rPr lang="en-US" sz="1200" dirty="0">
+                <a:solidFill>
+                  <a:srgbClr val="5F6B74"/>
                 </a:solidFill>
                 <a:latin typeface="Calibri" pitchFamily="34" charset="0"/>
                 <a:ea typeface="Calibri" pitchFamily="34" charset="-122"/>
                 <a:cs typeface="Calibri" pitchFamily="34" charset="-120"/>
               </a:rPr>
-              <a:t>A reading-by-plant matrix</a:t>
-            </a:r>
-            <a:endParaRPr lang="en-US" sz="1700" dirty="0"/>
-          </a:p>
-        </p:txBody>
-      </p:sp>
-      <p:sp>
-        <p:nvSpPr>
-          <p:cNvPr id="8" name="Text 6"/>
-          <p:cNvSpPr/>
-          <p:nvPr/>
-        </p:nvSpPr>
-        <p:spPr>
-          <a:xfrm>
-            <a:off x="1828800" y="2450592"/>
-            <a:ext cx="9418320" cy="594360"/>
+              <a:t>Turbidity, pH, chlorine, flow and pressure for both plants, with compliance strips showing each against its drinking-water limit.</a:t>
+            </a:r>
+            <a:endParaRPr lang="en-US" sz="1200" dirty="0"/>
+          </a:p>
+        </p:txBody>
+      </p:sp>
+      <p:sp>
+        <p:nvSpPr>
+          <p:cNvPr id="12" name="Shape 10"/>
+          <p:cNvSpPr/>
+          <p:nvPr/>
+        </p:nvSpPr>
+        <p:spPr>
+          <a:xfrm>
+            <a:off x="4444898" y="2971800"/>
+            <a:ext cx="3301898" cy="3108960"/>
+          </a:xfrm>
+          <a:prstGeom prst="roundRect">
+            <a:avLst>
+              <a:gd name="adj" fmla="val 1765"/>
+            </a:avLst>
+          </a:prstGeom>
+          <a:solidFill>
+            <a:srgbClr val="FFFFFF"/>
+          </a:solidFill>
+          <a:ln w="12700">
+            <a:solidFill>
+              <a:srgbClr val="E4E6E9"/>
+            </a:solidFill>
+            <a:prstDash val="solid"/>
+          </a:ln>
+        </p:spPr>
+      </p:sp>
+      <p:sp>
+        <p:nvSpPr>
+          <p:cNvPr id="13" name="Text 11"/>
+          <p:cNvSpPr/>
+          <p:nvPr/>
+        </p:nvSpPr>
+        <p:spPr>
+          <a:xfrm>
+            <a:off x="4719218" y="3209544"/>
+            <a:ext cx="1828800" cy="777240"/>
           </a:xfrm>
           <a:prstGeom prst="rect">
             <a:avLst/>
@@ -2803,48 +2903,129 @@
           <a:lstStyle/>
           <a:p>
             <a:pPr indent="0" marL="0">
+              <a:buNone/>
+            </a:pPr>
+            <a:r>
+              <a:rPr lang="en-US" sz="3800" b="1" dirty="0">
+                <a:solidFill>
+                  <a:srgbClr val="1C6EA4"/>
+                </a:solidFill>
+                <a:latin typeface="Century Schoolbook" pitchFamily="34" charset="0"/>
+                <a:ea typeface="Century Schoolbook" pitchFamily="34" charset="-122"/>
+                <a:cs typeface="Century Schoolbook" pitchFamily="34" charset="-120"/>
+              </a:rPr>
+              <a:t>02</a:t>
+            </a:r>
+            <a:endParaRPr lang="en-US" sz="3800" dirty="0"/>
+          </a:p>
+        </p:txBody>
+      </p:sp>
+      <p:sp>
+        <p:nvSpPr>
+          <p:cNvPr id="14" name="Text 12"/>
+          <p:cNvSpPr/>
+          <p:nvPr/>
+        </p:nvSpPr>
+        <p:spPr>
+          <a:xfrm>
+            <a:off x="4737506" y="4023360"/>
+            <a:ext cx="2753258" cy="868680"/>
+          </a:xfrm>
+          <a:prstGeom prst="rect">
+            <a:avLst/>
+          </a:prstGeom>
+          <a:noFill/>
+          <a:ln/>
+        </p:spPr>
+        <p:txBody>
+          <a:bodyPr wrap="square" lIns="0" tIns="0" rIns="0" bIns="0" rtlCol="0" anchor="t"/>
+          <a:lstStyle/>
+          <a:p>
+            <a:pPr indent="0" marL="0">
               <a:lnSpc>
-                <a:spcPct val="105000"/>
+                <a:spcPct val="100000"/>
               </a:lnSpc>
               <a:buNone/>
             </a:pPr>
             <a:r>
-              <a:rPr lang="en-US" sz="1300" dirty="0">
-                <a:solidFill>
-                  <a:srgbClr val="567478"/>
+              <a:rPr lang="en-US" sz="1550" b="1" dirty="0">
+                <a:solidFill>
+                  <a:srgbClr val="14304A"/>
+                </a:solidFill>
+                <a:latin typeface="Century Schoolbook" pitchFamily="34" charset="0"/>
+                <a:ea typeface="Century Schoolbook" pitchFamily="34" charset="-122"/>
+                <a:cs typeface="Century Schoolbook" pitchFamily="34" charset="-120"/>
+              </a:rPr>
+              <a:t>A brief pressure dip cannot hide</a:t>
+            </a:r>
+            <a:endParaRPr lang="en-US" sz="1550" dirty="0"/>
+          </a:p>
+        </p:txBody>
+      </p:sp>
+      <p:sp>
+        <p:nvSpPr>
+          <p:cNvPr id="15" name="Text 13"/>
+          <p:cNvSpPr/>
+          <p:nvPr/>
+        </p:nvSpPr>
+        <p:spPr>
+          <a:xfrm>
+            <a:off x="4737506" y="4892040"/>
+            <a:ext cx="2753258" cy="1005840"/>
+          </a:xfrm>
+          <a:prstGeom prst="rect">
+            <a:avLst/>
+          </a:prstGeom>
+          <a:noFill/>
+          <a:ln/>
+        </p:spPr>
+        <p:txBody>
+          <a:bodyPr wrap="square" lIns="0" tIns="0" rIns="0" bIns="0" rtlCol="0" anchor="ctr"/>
+          <a:lstStyle/>
+          <a:p>
+            <a:pPr indent="0" marL="0">
+              <a:lnSpc>
+                <a:spcPct val="120000"/>
+              </a:lnSpc>
+              <a:buNone/>
+            </a:pPr>
+            <a:r>
+              <a:rPr lang="en-US" sz="1200" dirty="0">
+                <a:solidFill>
+                  <a:srgbClr val="5F6B74"/>
                 </a:solidFill>
                 <a:latin typeface="Calibri" pitchFamily="34" charset="0"/>
                 <a:ea typeface="Calibri" pitchFamily="34" charset="-122"/>
                 <a:cs typeface="Calibri" pitchFamily="34" charset="-120"/>
               </a:rPr>
-              <a:t>Turbidity, pH, chlorine, flow and pressure for both plants, with compliance strips showing each against its drinking-water limit.</a:t>
-            </a:r>
-            <a:endParaRPr lang="en-US" sz="1300" dirty="0"/>
-          </a:p>
-        </p:txBody>
-      </p:sp>
-      <p:sp>
-        <p:nvSpPr>
-          <p:cNvPr id="9" name="Shape 7"/>
-          <p:cNvSpPr/>
-          <p:nvPr/>
-        </p:nvSpPr>
-        <p:spPr>
-          <a:xfrm>
-            <a:off x="640080" y="3346704"/>
-            <a:ext cx="10881360" cy="1371600"/>
+              <a:t>The low-pressure rule reads the window minimum, not the average, so a momentary drop below 2 bar is flagged even when the mean looks healthy.</a:t>
+            </a:r>
+            <a:endParaRPr lang="en-US" sz="1200" dirty="0"/>
+          </a:p>
+        </p:txBody>
+      </p:sp>
+      <p:sp>
+        <p:nvSpPr>
+          <p:cNvPr id="16" name="Shape 14"/>
+          <p:cNvSpPr/>
+          <p:nvPr/>
+        </p:nvSpPr>
+        <p:spPr>
+          <a:xfrm>
+            <a:off x="8112557" y="2971800"/>
+            <a:ext cx="3301898" cy="3108960"/>
           </a:xfrm>
           <a:prstGeom prst="roundRect">
             <a:avLst>
-              <a:gd name="adj" fmla="val 6667"/>
+              <a:gd name="adj" fmla="val 1765"/>
             </a:avLst>
           </a:prstGeom>
           <a:solidFill>
-            <a:srgbClr val="EDF6F7"/>
-          </a:solidFill>
-          <a:ln w="15240">
+            <a:srgbClr val="FFFFFF"/>
+          </a:solidFill>
+          <a:ln w="12700">
             <a:solidFill>
-              <a:srgbClr val="1E8FA0"/>
+              <a:srgbClr val="E4E6E9"/>
             </a:solidFill>
             <a:prstDash val="solid"/>
           </a:ln>
@@ -2852,34 +3033,14 @@
       </p:sp>
       <p:sp>
         <p:nvSpPr>
-          <p:cNvPr id="10" name="Shape 8"/>
-          <p:cNvSpPr/>
-          <p:nvPr/>
-        </p:nvSpPr>
-        <p:spPr>
-          <a:xfrm>
-            <a:off x="960120" y="3721608"/>
-            <a:ext cx="621792" cy="621792"/>
-          </a:xfrm>
-          <a:prstGeom prst="ellipse">
-            <a:avLst/>
-          </a:prstGeom>
-          <a:solidFill>
-            <a:srgbClr val="0F6E7C"/>
-          </a:solidFill>
-          <a:ln/>
-        </p:spPr>
-      </p:sp>
-      <p:sp>
-        <p:nvSpPr>
-          <p:cNvPr id="11" name="Text 9"/>
-          <p:cNvSpPr/>
-          <p:nvPr/>
-        </p:nvSpPr>
-        <p:spPr>
-          <a:xfrm>
-            <a:off x="960120" y="3721608"/>
-            <a:ext cx="621792" cy="621792"/>
+          <p:cNvPr id="17" name="Text 15"/>
+          <p:cNvSpPr/>
+          <p:nvPr/>
+        </p:nvSpPr>
+        <p:spPr>
+          <a:xfrm>
+            <a:off x="8386877" y="3209544"/>
+            <a:ext cx="1828800" cy="777240"/>
           </a:xfrm>
           <a:prstGeom prst="rect">
             <a:avLst/>
@@ -2891,34 +3052,76 @@
           <a:bodyPr wrap="square" lIns="0" tIns="0" rIns="0" bIns="0" rtlCol="0" anchor="ctr"/>
           <a:lstStyle/>
           <a:p>
-            <a:pPr algn="ctr" indent="0" marL="0">
-              <a:buNone/>
-            </a:pPr>
-            <a:r>
-              <a:rPr lang="en-US" sz="2200" b="1" dirty="0">
-                <a:solidFill>
-                  <a:srgbClr val="FFFFFF"/>
+            <a:pPr indent="0" marL="0">
+              <a:buNone/>
+            </a:pPr>
+            <a:r>
+              <a:rPr lang="en-US" sz="3800" b="1" dirty="0">
+                <a:solidFill>
+                  <a:srgbClr val="1C6EA4"/>
                 </a:solidFill>
                 <a:latin typeface="Century Schoolbook" pitchFamily="34" charset="0"/>
                 <a:ea typeface="Century Schoolbook" pitchFamily="34" charset="-122"/>
                 <a:cs typeface="Century Schoolbook" pitchFamily="34" charset="-120"/>
               </a:rPr>
-              <a:t>2</a:t>
-            </a:r>
-            <a:endParaRPr lang="en-US" sz="2200" dirty="0"/>
-          </a:p>
-        </p:txBody>
-      </p:sp>
-      <p:sp>
-        <p:nvSpPr>
-          <p:cNvPr id="12" name="Text 10"/>
-          <p:cNvSpPr/>
-          <p:nvPr/>
-        </p:nvSpPr>
-        <p:spPr>
-          <a:xfrm>
-            <a:off x="1828800" y="3547872"/>
-            <a:ext cx="9418320" cy="411480"/>
+              <a:t>03</a:t>
+            </a:r>
+            <a:endParaRPr lang="en-US" sz="3800" dirty="0"/>
+          </a:p>
+        </p:txBody>
+      </p:sp>
+      <p:sp>
+        <p:nvSpPr>
+          <p:cNvPr id="18" name="Text 16"/>
+          <p:cNvSpPr/>
+          <p:nvPr/>
+        </p:nvSpPr>
+        <p:spPr>
+          <a:xfrm>
+            <a:off x="8405165" y="4023360"/>
+            <a:ext cx="2753258" cy="868680"/>
+          </a:xfrm>
+          <a:prstGeom prst="rect">
+            <a:avLst/>
+          </a:prstGeom>
+          <a:noFill/>
+          <a:ln/>
+        </p:spPr>
+        <p:txBody>
+          <a:bodyPr wrap="square" lIns="0" tIns="0" rIns="0" bIns="0" rtlCol="0" anchor="t"/>
+          <a:lstStyle/>
+          <a:p>
+            <a:pPr indent="0" marL="0">
+              <a:lnSpc>
+                <a:spcPct val="100000"/>
+              </a:lnSpc>
+              <a:buNone/>
+            </a:pPr>
+            <a:r>
+              <a:rPr lang="en-US" sz="1550" b="1" dirty="0">
+                <a:solidFill>
+                  <a:srgbClr val="14304A"/>
+                </a:solidFill>
+                <a:latin typeface="Century Schoolbook" pitchFamily="34" charset="0"/>
+                <a:ea typeface="Century Schoolbook" pitchFamily="34" charset="-122"/>
+                <a:cs typeface="Century Schoolbook" pitchFamily="34" charset="-120"/>
+              </a:rPr>
+              <a:t>Cross-plant trends, live</a:t>
+            </a:r>
+            <a:endParaRPr lang="en-US" sz="1550" dirty="0"/>
+          </a:p>
+        </p:txBody>
+      </p:sp>
+      <p:sp>
+        <p:nvSpPr>
+          <p:cNvPr id="19" name="Text 17"/>
+          <p:cNvSpPr/>
+          <p:nvPr/>
+        </p:nvSpPr>
+        <p:spPr>
+          <a:xfrm>
+            <a:off x="8405165" y="4892040"/>
+            <a:ext cx="2753258" cy="1005840"/>
           </a:xfrm>
           <a:prstGeom prst="rect">
             <a:avLst/>
@@ -2931,229 +3134,23 @@
           <a:lstStyle/>
           <a:p>
             <a:pPr indent="0" marL="0">
-              <a:buNone/>
-            </a:pPr>
-            <a:r>
-              <a:rPr lang="en-US" sz="1700" b="1" dirty="0">
-                <a:solidFill>
-                  <a:srgbClr val="0F2E33"/>
+              <a:lnSpc>
+                <a:spcPct val="120000"/>
+              </a:lnSpc>
+              <a:buNone/>
+            </a:pPr>
+            <a:r>
+              <a:rPr lang="en-US" sz="1200" dirty="0">
+                <a:solidFill>
+                  <a:srgbClr val="5F6B74"/>
                 </a:solidFill>
                 <a:latin typeface="Calibri" pitchFamily="34" charset="0"/>
                 <a:ea typeface="Calibri" pitchFamily="34" charset="-122"/>
                 <a:cs typeface="Calibri" pitchFamily="34" charset="-120"/>
               </a:rPr>
-              <a:t>A brief pressure dip cannot hide</a:t>
-            </a:r>
-            <a:endParaRPr lang="en-US" sz="1700" dirty="0"/>
-          </a:p>
-        </p:txBody>
-      </p:sp>
-      <p:sp>
-        <p:nvSpPr>
-          <p:cNvPr id="13" name="Text 11"/>
-          <p:cNvSpPr/>
-          <p:nvPr/>
-        </p:nvSpPr>
-        <p:spPr>
-          <a:xfrm>
-            <a:off x="1828800" y="3968496"/>
-            <a:ext cx="9418320" cy="594360"/>
-          </a:xfrm>
-          <a:prstGeom prst="rect">
-            <a:avLst/>
-          </a:prstGeom>
-          <a:noFill/>
-          <a:ln/>
-        </p:spPr>
-        <p:txBody>
-          <a:bodyPr wrap="square" lIns="0" tIns="0" rIns="0" bIns="0" rtlCol="0" anchor="ctr"/>
-          <a:lstStyle/>
-          <a:p>
-            <a:pPr indent="0" marL="0">
-              <a:lnSpc>
-                <a:spcPct val="105000"/>
-              </a:lnSpc>
-              <a:buNone/>
-            </a:pPr>
-            <a:r>
-              <a:rPr lang="en-US" sz="1300" dirty="0">
-                <a:solidFill>
-                  <a:srgbClr val="567478"/>
-                </a:solidFill>
-                <a:latin typeface="Calibri" pitchFamily="34" charset="0"/>
-                <a:ea typeface="Calibri" pitchFamily="34" charset="-122"/>
-                <a:cs typeface="Calibri" pitchFamily="34" charset="-120"/>
-              </a:rPr>
-              <a:t>The low-pressure rule reads the window minimum, not the average, so a momentary drop below 2 bar is flagged even when the mean looks healthy.</a:t>
-            </a:r>
-            <a:endParaRPr lang="en-US" sz="1300" dirty="0"/>
-          </a:p>
-        </p:txBody>
-      </p:sp>
-      <p:sp>
-        <p:nvSpPr>
-          <p:cNvPr id="14" name="Shape 12"/>
-          <p:cNvSpPr/>
-          <p:nvPr/>
-        </p:nvSpPr>
-        <p:spPr>
-          <a:xfrm>
-            <a:off x="640080" y="4864608"/>
-            <a:ext cx="10881360" cy="1371600"/>
-          </a:xfrm>
-          <a:prstGeom prst="roundRect">
-            <a:avLst>
-              <a:gd name="adj" fmla="val 6667"/>
-            </a:avLst>
-          </a:prstGeom>
-          <a:solidFill>
-            <a:srgbClr val="EDF6F7"/>
-          </a:solidFill>
-          <a:ln w="15240">
-            <a:solidFill>
-              <a:srgbClr val="1E8FA0"/>
-            </a:solidFill>
-            <a:prstDash val="solid"/>
-          </a:ln>
-        </p:spPr>
-      </p:sp>
-      <p:sp>
-        <p:nvSpPr>
-          <p:cNvPr id="15" name="Shape 13"/>
-          <p:cNvSpPr/>
-          <p:nvPr/>
-        </p:nvSpPr>
-        <p:spPr>
-          <a:xfrm>
-            <a:off x="960120" y="5239512"/>
-            <a:ext cx="621792" cy="621792"/>
-          </a:xfrm>
-          <a:prstGeom prst="ellipse">
-            <a:avLst/>
-          </a:prstGeom>
-          <a:solidFill>
-            <a:srgbClr val="0F6E7C"/>
-          </a:solidFill>
-          <a:ln/>
-        </p:spPr>
-      </p:sp>
-      <p:sp>
-        <p:nvSpPr>
-          <p:cNvPr id="16" name="Text 14"/>
-          <p:cNvSpPr/>
-          <p:nvPr/>
-        </p:nvSpPr>
-        <p:spPr>
-          <a:xfrm>
-            <a:off x="960120" y="5239512"/>
-            <a:ext cx="621792" cy="621792"/>
-          </a:xfrm>
-          <a:prstGeom prst="rect">
-            <a:avLst/>
-          </a:prstGeom>
-          <a:noFill/>
-          <a:ln/>
-        </p:spPr>
-        <p:txBody>
-          <a:bodyPr wrap="square" lIns="0" tIns="0" rIns="0" bIns="0" rtlCol="0" anchor="ctr"/>
-          <a:lstStyle/>
-          <a:p>
-            <a:pPr algn="ctr" indent="0" marL="0">
-              <a:buNone/>
-            </a:pPr>
-            <a:r>
-              <a:rPr lang="en-US" sz="2200" b="1" dirty="0">
-                <a:solidFill>
-                  <a:srgbClr val="FFFFFF"/>
-                </a:solidFill>
-                <a:latin typeface="Century Schoolbook" pitchFamily="34" charset="0"/>
-                <a:ea typeface="Century Schoolbook" pitchFamily="34" charset="-122"/>
-                <a:cs typeface="Century Schoolbook" pitchFamily="34" charset="-120"/>
-              </a:rPr>
-              <a:t>3</a:t>
-            </a:r>
-            <a:endParaRPr lang="en-US" sz="2200" dirty="0"/>
-          </a:p>
-        </p:txBody>
-      </p:sp>
-      <p:sp>
-        <p:nvSpPr>
-          <p:cNvPr id="17" name="Text 15"/>
-          <p:cNvSpPr/>
-          <p:nvPr/>
-        </p:nvSpPr>
-        <p:spPr>
-          <a:xfrm>
-            <a:off x="1828800" y="5065776"/>
-            <a:ext cx="9418320" cy="411480"/>
-          </a:xfrm>
-          <a:prstGeom prst="rect">
-            <a:avLst/>
-          </a:prstGeom>
-          <a:noFill/>
-          <a:ln/>
-        </p:spPr>
-        <p:txBody>
-          <a:bodyPr wrap="square" lIns="0" tIns="0" rIns="0" bIns="0" rtlCol="0" anchor="ctr"/>
-          <a:lstStyle/>
-          <a:p>
-            <a:pPr indent="0" marL="0">
-              <a:buNone/>
-            </a:pPr>
-            <a:r>
-              <a:rPr lang="en-US" sz="1700" b="1" dirty="0">
-                <a:solidFill>
-                  <a:srgbClr val="0F2E33"/>
-                </a:solidFill>
-                <a:latin typeface="Calibri" pitchFamily="34" charset="0"/>
-                <a:ea typeface="Calibri" pitchFamily="34" charset="-122"/>
-                <a:cs typeface="Calibri" pitchFamily="34" charset="-120"/>
-              </a:rPr>
-              <a:t>Cross-plant trends, live</a:t>
-            </a:r>
-            <a:endParaRPr lang="en-US" sz="1700" dirty="0"/>
-          </a:p>
-        </p:txBody>
-      </p:sp>
-      <p:sp>
-        <p:nvSpPr>
-          <p:cNvPr id="18" name="Text 16"/>
-          <p:cNvSpPr/>
-          <p:nvPr/>
-        </p:nvSpPr>
-        <p:spPr>
-          <a:xfrm>
-            <a:off x="1828800" y="5486400"/>
-            <a:ext cx="9418320" cy="594360"/>
-          </a:xfrm>
-          <a:prstGeom prst="rect">
-            <a:avLst/>
-          </a:prstGeom>
-          <a:noFill/>
-          <a:ln/>
-        </p:spPr>
-        <p:txBody>
-          <a:bodyPr wrap="square" lIns="0" tIns="0" rIns="0" bIns="0" rtlCol="0" anchor="ctr"/>
-          <a:lstStyle/>
-          <a:p>
-            <a:pPr indent="0" marL="0">
-              <a:lnSpc>
-                <a:spcPct val="105000"/>
-              </a:lnSpc>
-              <a:buNone/>
-            </a:pPr>
-            <a:r>
-              <a:rPr lang="en-US" sz="1300" dirty="0">
-                <a:solidFill>
-                  <a:srgbClr val="567478"/>
-                </a:solidFill>
-                <a:latin typeface="Calibri" pitchFamily="34" charset="0"/>
-                <a:ea typeface="Calibri" pitchFamily="34" charset="-122"/>
-                <a:cs typeface="Calibri" pitchFamily="34" charset="-120"/>
-              </a:rPr>
               <a:t>The trend charts run both plants side by side, so an under-chlorination drift is visible as it develops.</a:t>
             </a:r>
-            <a:endParaRPr lang="en-US" sz="1300" dirty="0"/>
+            <a:endParaRPr lang="en-US" sz="1200" dirty="0"/>
           </a:p>
         </p:txBody>
       </p:sp>
@@ -3171,7 +3168,7 @@
     <p:bg>
       <p:bgPr>
         <a:solidFill>
-          <a:srgbClr val="FFFFFF"/>
+          <a:srgbClr val="EEF4F9"/>
         </a:solidFill>
       </p:bgPr>
     </p:bg>
@@ -3191,65 +3188,183 @@
       </p:grpSpPr>
       <p:sp>
         <p:nvSpPr>
-          <p:cNvPr id="2" name="Text 0"/>
-          <p:cNvSpPr/>
-          <p:nvPr/>
-        </p:nvSpPr>
-        <p:spPr>
-          <a:xfrm>
-            <a:off x="640080" y="502920"/>
-            <a:ext cx="10972800" cy="822960"/>
-          </a:xfrm>
-          <a:prstGeom prst="rect">
-            <a:avLst/>
-          </a:prstGeom>
-          <a:noFill/>
-          <a:ln/>
-        </p:spPr>
-        <p:txBody>
-          <a:bodyPr wrap="square" rtlCol="0" anchor="t"/>
-          <a:lstStyle/>
-          <a:p>
-            <a:pPr indent="0" marL="0">
-              <a:buNone/>
-            </a:pPr>
-            <a:r>
-              <a:rPr lang="en-US" sz="2800" b="1" dirty="0">
-                <a:solidFill>
-                  <a:srgbClr val="0F2E33"/>
+          <p:cNvPr id="2" name="Shape 0"/>
+          <p:cNvSpPr/>
+          <p:nvPr/>
+        </p:nvSpPr>
+        <p:spPr>
+          <a:xfrm>
+            <a:off x="0" y="0"/>
+            <a:ext cx="12191695" cy="960120"/>
+          </a:xfrm>
+          <a:prstGeom prst="rect">
+            <a:avLst/>
+          </a:prstGeom>
+          <a:solidFill>
+            <a:srgbClr val="E6ECF1"/>
+          </a:solidFill>
+          <a:ln/>
+        </p:spPr>
+      </p:sp>
+      <p:sp>
+        <p:nvSpPr>
+          <p:cNvPr id="3" name="Shape 1"/>
+          <p:cNvSpPr/>
+          <p:nvPr/>
+        </p:nvSpPr>
+        <p:spPr>
+          <a:xfrm>
+            <a:off x="0" y="960120"/>
+            <a:ext cx="12191695" cy="54864"/>
+          </a:xfrm>
+          <a:prstGeom prst="rect">
+            <a:avLst/>
+          </a:prstGeom>
+          <a:solidFill>
+            <a:srgbClr val="1C6EA4"/>
+          </a:solidFill>
+          <a:ln/>
+        </p:spPr>
+      </p:sp>
+      <p:sp>
+        <p:nvSpPr>
+          <p:cNvPr id="4" name="Text 2"/>
+          <p:cNvSpPr/>
+          <p:nvPr/>
+        </p:nvSpPr>
+        <p:spPr>
+          <a:xfrm>
+            <a:off x="777240" y="1188720"/>
+            <a:ext cx="914400" cy="640080"/>
+          </a:xfrm>
+          <a:prstGeom prst="rect">
+            <a:avLst/>
+          </a:prstGeom>
+          <a:noFill/>
+          <a:ln/>
+        </p:spPr>
+        <p:txBody>
+          <a:bodyPr wrap="square" lIns="0" tIns="0" rIns="0" bIns="0" rtlCol="0" anchor="ctr"/>
+          <a:lstStyle/>
+          <a:p>
+            <a:pPr indent="0" marL="0">
+              <a:buNone/>
+            </a:pPr>
+            <a:r>
+              <a:rPr lang="en-US" sz="3000" b="1" dirty="0">
+                <a:solidFill>
+                  <a:srgbClr val="1C6EA4"/>
                 </a:solidFill>
                 <a:latin typeface="Century Schoolbook" pitchFamily="34" charset="0"/>
                 <a:ea typeface="Century Schoolbook" pitchFamily="34" charset="-122"/>
                 <a:cs typeface="Century Schoolbook" pitchFamily="34" charset="-120"/>
               </a:rPr>
-              <a:t>Hardest Part — proving the queue drains under a burst</a:t>
-            </a:r>
-            <a:endParaRPr lang="en-US" sz="2800" dirty="0"/>
-          </a:p>
-        </p:txBody>
-      </p:sp>
-      <p:sp>
-        <p:nvSpPr>
-          <p:cNvPr id="3" name="Shape 1"/>
-          <p:cNvSpPr/>
-          <p:nvPr/>
-        </p:nvSpPr>
-        <p:spPr>
-          <a:xfrm>
-            <a:off x="731520" y="1920240"/>
-            <a:ext cx="10698480" cy="1965960"/>
+              <a:t>03</a:t>
+            </a:r>
+            <a:endParaRPr lang="en-US" sz="3000" dirty="0"/>
+          </a:p>
+        </p:txBody>
+      </p:sp>
+      <p:sp>
+        <p:nvSpPr>
+          <p:cNvPr id="5" name="Text 3"/>
+          <p:cNvSpPr/>
+          <p:nvPr/>
+        </p:nvSpPr>
+        <p:spPr>
+          <a:xfrm>
+            <a:off x="1645920" y="1362456"/>
+            <a:ext cx="9768535" cy="274320"/>
+          </a:xfrm>
+          <a:prstGeom prst="rect">
+            <a:avLst/>
+          </a:prstGeom>
+          <a:noFill/>
+          <a:ln/>
+        </p:spPr>
+        <p:txBody>
+          <a:bodyPr wrap="square" lIns="0" tIns="0" rIns="0" bIns="0" rtlCol="0" anchor="ctr"/>
+          <a:lstStyle/>
+          <a:p>
+            <a:pPr indent="0" marL="0">
+              <a:buNone/>
+            </a:pPr>
+            <a:r>
+              <a:rPr lang="en-US" sz="1100" b="1" spc="200" kern="0" dirty="0">
+                <a:solidFill>
+                  <a:srgbClr val="5F6B74"/>
+                </a:solidFill>
+                <a:latin typeface="Calibri" pitchFamily="34" charset="0"/>
+                <a:ea typeface="Calibri" pitchFamily="34" charset="-122"/>
+                <a:cs typeface="Calibri" pitchFamily="34" charset="-120"/>
+              </a:rPr>
+              <a:t>CHALLENGE</a:t>
+            </a:r>
+            <a:endParaRPr lang="en-US" sz="1100" dirty="0"/>
+          </a:p>
+        </p:txBody>
+      </p:sp>
+      <p:sp>
+        <p:nvSpPr>
+          <p:cNvPr id="6" name="Text 4"/>
+          <p:cNvSpPr/>
+          <p:nvPr/>
+        </p:nvSpPr>
+        <p:spPr>
+          <a:xfrm>
+            <a:off x="777240" y="1837944"/>
+            <a:ext cx="10637215" cy="640080"/>
+          </a:xfrm>
+          <a:prstGeom prst="rect">
+            <a:avLst/>
+          </a:prstGeom>
+          <a:noFill/>
+          <a:ln/>
+        </p:spPr>
+        <p:txBody>
+          <a:bodyPr wrap="square" lIns="0" tIns="0" rIns="0" bIns="0" rtlCol="0" anchor="ctr"/>
+          <a:lstStyle/>
+          <a:p>
+            <a:pPr indent="0" marL="0">
+              <a:buNone/>
+            </a:pPr>
+            <a:r>
+              <a:rPr lang="en-US" sz="2300" b="1" dirty="0">
+                <a:solidFill>
+                  <a:srgbClr val="14304A"/>
+                </a:solidFill>
+                <a:latin typeface="Century Schoolbook" pitchFamily="34" charset="0"/>
+                <a:ea typeface="Century Schoolbook" pitchFamily="34" charset="-122"/>
+                <a:cs typeface="Century Schoolbook" pitchFamily="34" charset="-120"/>
+              </a:rPr>
+              <a:t>when the danger is too little, not too much</a:t>
+            </a:r>
+            <a:endParaRPr lang="en-US" sz="2300" dirty="0"/>
+          </a:p>
+        </p:txBody>
+      </p:sp>
+      <p:sp>
+        <p:nvSpPr>
+          <p:cNvPr id="7" name="Shape 5"/>
+          <p:cNvSpPr/>
+          <p:nvPr/>
+        </p:nvSpPr>
+        <p:spPr>
+          <a:xfrm>
+            <a:off x="777240" y="2880360"/>
+            <a:ext cx="5090008" cy="3200400"/>
           </a:xfrm>
           <a:prstGeom prst="roundRect">
             <a:avLst>
-              <a:gd name="adj" fmla="val 4651"/>
+              <a:gd name="adj" fmla="val 1714"/>
             </a:avLst>
           </a:prstGeom>
           <a:solidFill>
-            <a:srgbClr val="EDF6F7"/>
-          </a:solidFill>
-          <a:ln w="19050">
+            <a:srgbClr val="FFFFFF"/>
+          </a:solidFill>
+          <a:ln w="12700">
             <a:solidFill>
-              <a:srgbClr val="E4A63C"/>
+              <a:srgbClr val="E4E6E9"/>
             </a:solidFill>
             <a:prstDash val="solid"/>
           </a:ln>
@@ -3257,14 +3372,14 @@
       </p:sp>
       <p:sp>
         <p:nvSpPr>
-          <p:cNvPr id="4" name="Text 2"/>
-          <p:cNvSpPr/>
-          <p:nvPr/>
-        </p:nvSpPr>
-        <p:spPr>
-          <a:xfrm>
-            <a:off x="1005840" y="2103120"/>
-            <a:ext cx="3657600" cy="457200"/>
+          <p:cNvPr id="8" name="Text 6"/>
+          <p:cNvSpPr/>
+          <p:nvPr/>
+        </p:nvSpPr>
+        <p:spPr>
+          <a:xfrm>
+            <a:off x="1097280" y="3154680"/>
+            <a:ext cx="4449928" cy="320040"/>
           </a:xfrm>
           <a:prstGeom prst="rect">
             <a:avLst/>
@@ -3280,84 +3395,38 @@
               <a:buNone/>
             </a:pPr>
             <a:r>
-              <a:rPr lang="en-US" sz="1900" b="1" dirty="0">
-                <a:solidFill>
-                  <a:srgbClr val="E4A63C"/>
-                </a:solidFill>
-                <a:latin typeface="Century Schoolbook" pitchFamily="34" charset="0"/>
-                <a:ea typeface="Century Schoolbook" pitchFamily="34" charset="-122"/>
-                <a:cs typeface="Century Schoolbook" pitchFamily="34" charset="-120"/>
-              </a:rPr>
-              <a:t>Problem</a:t>
-            </a:r>
-            <a:endParaRPr lang="en-US" sz="1900" dirty="0"/>
-          </a:p>
-        </p:txBody>
-      </p:sp>
-      <p:sp>
-        <p:nvSpPr>
-          <p:cNvPr id="5" name="Text 3"/>
-          <p:cNvSpPr/>
-          <p:nvPr/>
-        </p:nvSpPr>
-        <p:spPr>
-          <a:xfrm>
-            <a:off x="1005840" y="2578608"/>
-            <a:ext cx="9966960" cy="1188720"/>
-          </a:xfrm>
-          <a:prstGeom prst="rect">
-            <a:avLst/>
-          </a:prstGeom>
-          <a:noFill/>
-          <a:ln/>
-        </p:spPr>
-        <p:txBody>
-          <a:bodyPr wrap="square" lIns="0" tIns="0" rIns="0" bIns="0" rtlCol="0" anchor="ctr"/>
-          <a:lstStyle/>
-          <a:p>
-            <a:pPr indent="0" marL="0">
-              <a:lnSpc>
-                <a:spcPct val="105000"/>
-              </a:lnSpc>
-              <a:buNone/>
-            </a:pPr>
-            <a:r>
-              <a:rPr lang="en-US" sz="1300" dirty="0">
-                <a:solidFill>
-                  <a:srgbClr val="0F2E33"/>
+              <a:rPr lang="en-US" sz="1200" b="1" spc="200" kern="0" dirty="0">
+                <a:solidFill>
+                  <a:srgbClr val="D1584E"/>
                 </a:solidFill>
                 <a:latin typeface="Calibri" pitchFamily="34" charset="0"/>
                 <a:ea typeface="Calibri" pitchFamily="34" charset="-122"/>
                 <a:cs typeface="Calibri" pitchFamily="34" charset="-120"/>
               </a:rPr>
-              <a:t>Normal traffic is one summary every ten seconds; to claim scalability I fired 2,000 messages at the queue from 32 parallel workers. But from outside, a non-empty queue is ambiguous — a slow consumer and a dead one look identical — and the emulator runs the Lambda in a single container, so drain time swings wildly and a naive pass/fail test either flakes or lies.</a:t>
-            </a:r>
-            <a:endParaRPr lang="en-US" sz="1300" dirty="0"/>
-          </a:p>
-        </p:txBody>
-      </p:sp>
-      <p:sp>
-        <p:nvSpPr>
-          <p:cNvPr id="6" name="Shape 4"/>
-          <p:cNvSpPr/>
-          <p:nvPr/>
-        </p:nvSpPr>
-        <p:spPr>
-          <a:xfrm>
-            <a:off x="731520" y="4041648"/>
-            <a:ext cx="10698480" cy="1965960"/>
-          </a:xfrm>
-          <a:prstGeom prst="roundRect">
-            <a:avLst>
-              <a:gd name="adj" fmla="val 4651"/>
-            </a:avLst>
-          </a:prstGeom>
-          <a:solidFill>
-            <a:srgbClr val="EDF6F7"/>
-          </a:solidFill>
+              <a:t>PROBLEM</a:t>
+            </a:r>
+            <a:endParaRPr lang="en-US" sz="1200" dirty="0"/>
+          </a:p>
+        </p:txBody>
+      </p:sp>
+      <p:sp>
+        <p:nvSpPr>
+          <p:cNvPr id="9" name="Shape 7"/>
+          <p:cNvSpPr/>
+          <p:nvPr/>
+        </p:nvSpPr>
+        <p:spPr>
+          <a:xfrm>
+            <a:off x="1097280" y="3538728"/>
+            <a:ext cx="4449928" cy="0"/>
+          </a:xfrm>
+          <a:prstGeom prst="line">
+            <a:avLst/>
+          </a:prstGeom>
+          <a:noFill/>
           <a:ln w="19050">
             <a:solidFill>
-              <a:srgbClr val="1E8FA0"/>
+              <a:srgbClr val="D1584E"/>
             </a:solidFill>
             <a:prstDash val="solid"/>
           </a:ln>
@@ -3365,82 +3434,174 @@
       </p:sp>
       <p:sp>
         <p:nvSpPr>
-          <p:cNvPr id="7" name="Text 5"/>
-          <p:cNvSpPr/>
-          <p:nvPr/>
-        </p:nvSpPr>
-        <p:spPr>
-          <a:xfrm>
-            <a:off x="1005840" y="4224528"/>
-            <a:ext cx="3657600" cy="457200"/>
-          </a:xfrm>
-          <a:prstGeom prst="rect">
-            <a:avLst/>
-          </a:prstGeom>
-          <a:noFill/>
-          <a:ln/>
-        </p:spPr>
-        <p:txBody>
-          <a:bodyPr wrap="square" lIns="0" tIns="0" rIns="0" bIns="0" rtlCol="0" anchor="ctr"/>
-          <a:lstStyle/>
-          <a:p>
-            <a:pPr indent="0" marL="0">
-              <a:buNone/>
-            </a:pPr>
-            <a:r>
-              <a:rPr lang="en-US" sz="1900" b="1" dirty="0">
-                <a:solidFill>
-                  <a:srgbClr val="1E8FA0"/>
-                </a:solidFill>
-                <a:latin typeface="Century Schoolbook" pitchFamily="34" charset="0"/>
-                <a:ea typeface="Century Schoolbook" pitchFamily="34" charset="-122"/>
-                <a:cs typeface="Century Schoolbook" pitchFamily="34" charset="-120"/>
-              </a:rPr>
-              <a:t>Solution</a:t>
-            </a:r>
-            <a:endParaRPr lang="en-US" sz="1900" dirty="0"/>
-          </a:p>
-        </p:txBody>
-      </p:sp>
-      <p:sp>
-        <p:nvSpPr>
-          <p:cNvPr id="8" name="Text 6"/>
-          <p:cNvSpPr/>
-          <p:nvPr/>
-        </p:nvSpPr>
-        <p:spPr>
-          <a:xfrm>
-            <a:off x="1005840" y="4700016"/>
-            <a:ext cx="9966960" cy="1188720"/>
-          </a:xfrm>
-          <a:prstGeom prst="rect">
-            <a:avLst/>
-          </a:prstGeom>
-          <a:noFill/>
-          <a:ln/>
-        </p:spPr>
-        <p:txBody>
-          <a:bodyPr wrap="square" lIns="0" tIns="0" rIns="0" bIns="0" rtlCol="0" anchor="ctr"/>
+          <p:cNvPr id="10" name="Text 8"/>
+          <p:cNvSpPr/>
+          <p:nvPr/>
+        </p:nvSpPr>
+        <p:spPr>
+          <a:xfrm>
+            <a:off x="1097280" y="3703320"/>
+            <a:ext cx="4449928" cy="2194560"/>
+          </a:xfrm>
+          <a:prstGeom prst="rect">
+            <a:avLst/>
+          </a:prstGeom>
+          <a:noFill/>
+          <a:ln/>
+        </p:spPr>
+        <p:txBody>
+          <a:bodyPr wrap="square" lIns="0" tIns="0" rIns="0" bIns="0" rtlCol="0" anchor="t"/>
           <a:lstStyle/>
           <a:p>
             <a:pPr indent="0" marL="0">
               <a:lnSpc>
-                <a:spcPct val="105000"/>
+                <a:spcPct val="128000"/>
               </a:lnSpc>
               <a:buNone/>
             </a:pPr>
             <a:r>
-              <a:rPr lang="en-US" sz="1300" dirty="0">
-                <a:solidFill>
-                  <a:srgbClr val="0F2E33"/>
+              <a:rPr lang="en-US" sz="1350" dirty="0">
+                <a:solidFill>
+                  <a:srgbClr val="14304A"/>
                 </a:solidFill>
                 <a:latin typeface="Calibri" pitchFamily="34" charset="0"/>
                 <a:ea typeface="Calibri" pitchFamily="34" charset="-122"/>
                 <a:cs typeface="Calibri" pitchFamily="34" charset="-120"/>
               </a:rPr>
-              <a:t>A two-tier check: first assert the queue really absorbed the burst, then require either a full drain in time or a backlog strictly below the post-burst peak. A strictly decreasing backlog proves the consumer is alive and working, not stalled — real progress, not a guess.</a:t>
-            </a:r>
-            <a:endParaRPr lang="en-US" sz="1300" dirty="0"/>
+              <a:t>Most monitoring fires when a number climbs too high, but drinking-water compliance is the opposite: the breaches that matter are mostly under-treatment — chlorine too low, pH too acidic, pressure too low. A rule set built around ceilings would silently pass exactly the failures a water utility most needs to catch.</a:t>
+            </a:r>
+            <a:endParaRPr lang="en-US" sz="1350" dirty="0"/>
+          </a:p>
+        </p:txBody>
+      </p:sp>
+      <p:sp>
+        <p:nvSpPr>
+          <p:cNvPr id="11" name="Shape 9"/>
+          <p:cNvSpPr/>
+          <p:nvPr/>
+        </p:nvSpPr>
+        <p:spPr>
+          <a:xfrm>
+            <a:off x="6324448" y="2880360"/>
+            <a:ext cx="5090008" cy="3200400"/>
+          </a:xfrm>
+          <a:prstGeom prst="roundRect">
+            <a:avLst>
+              <a:gd name="adj" fmla="val 1714"/>
+            </a:avLst>
+          </a:prstGeom>
+          <a:solidFill>
+            <a:srgbClr val="FFFFFF"/>
+          </a:solidFill>
+          <a:ln w="12700">
+            <a:solidFill>
+              <a:srgbClr val="E4E6E9"/>
+            </a:solidFill>
+            <a:prstDash val="solid"/>
+          </a:ln>
+        </p:spPr>
+      </p:sp>
+      <p:sp>
+        <p:nvSpPr>
+          <p:cNvPr id="12" name="Text 10"/>
+          <p:cNvSpPr/>
+          <p:nvPr/>
+        </p:nvSpPr>
+        <p:spPr>
+          <a:xfrm>
+            <a:off x="6644488" y="3154680"/>
+            <a:ext cx="4449928" cy="320040"/>
+          </a:xfrm>
+          <a:prstGeom prst="rect">
+            <a:avLst/>
+          </a:prstGeom>
+          <a:noFill/>
+          <a:ln/>
+        </p:spPr>
+        <p:txBody>
+          <a:bodyPr wrap="square" lIns="0" tIns="0" rIns="0" bIns="0" rtlCol="0" anchor="ctr"/>
+          <a:lstStyle/>
+          <a:p>
+            <a:pPr indent="0" marL="0">
+              <a:buNone/>
+            </a:pPr>
+            <a:r>
+              <a:rPr lang="en-US" sz="1200" b="1" spc="200" kern="0" dirty="0">
+                <a:solidFill>
+                  <a:srgbClr val="2F7D55"/>
+                </a:solidFill>
+                <a:latin typeface="Calibri" pitchFamily="34" charset="0"/>
+                <a:ea typeface="Calibri" pitchFamily="34" charset="-122"/>
+                <a:cs typeface="Calibri" pitchFamily="34" charset="-120"/>
+              </a:rPr>
+              <a:t>SOLUTION</a:t>
+            </a:r>
+            <a:endParaRPr lang="en-US" sz="1200" dirty="0"/>
+          </a:p>
+        </p:txBody>
+      </p:sp>
+      <p:sp>
+        <p:nvSpPr>
+          <p:cNvPr id="13" name="Shape 11"/>
+          <p:cNvSpPr/>
+          <p:nvPr/>
+        </p:nvSpPr>
+        <p:spPr>
+          <a:xfrm>
+            <a:off x="6644488" y="3538728"/>
+            <a:ext cx="4449928" cy="0"/>
+          </a:xfrm>
+          <a:prstGeom prst="line">
+            <a:avLst/>
+          </a:prstGeom>
+          <a:noFill/>
+          <a:ln w="19050">
+            <a:solidFill>
+              <a:srgbClr val="2F7D55"/>
+            </a:solidFill>
+            <a:prstDash val="solid"/>
+          </a:ln>
+        </p:spPr>
+      </p:sp>
+      <p:sp>
+        <p:nvSpPr>
+          <p:cNvPr id="14" name="Text 12"/>
+          <p:cNvSpPr/>
+          <p:nvPr/>
+        </p:nvSpPr>
+        <p:spPr>
+          <a:xfrm>
+            <a:off x="6644488" y="3703320"/>
+            <a:ext cx="4449928" cy="2194560"/>
+          </a:xfrm>
+          <a:prstGeom prst="rect">
+            <a:avLst/>
+          </a:prstGeom>
+          <a:noFill/>
+          <a:ln/>
+        </p:spPr>
+        <p:txBody>
+          <a:bodyPr wrap="square" lIns="0" tIns="0" rIns="0" bIns="0" rtlCol="0" anchor="t"/>
+          <a:lstStyle/>
+          <a:p>
+            <a:pPr indent="0" marL="0">
+              <a:lnSpc>
+                <a:spcPct val="128000"/>
+              </a:lnSpc>
+              <a:buNone/>
+            </a:pPr>
+            <a:r>
+              <a:rPr lang="en-US" sz="1350" dirty="0">
+                <a:solidFill>
+                  <a:srgbClr val="14304A"/>
+                </a:solidFill>
+                <a:latin typeface="Calibri" pitchFamily="34" charset="0"/>
+                <a:ea typeface="Calibri" pitchFamily="34" charset="-122"/>
+                <a:cs typeface="Calibri" pitchFamily="34" charset="-120"/>
+              </a:rPr>
+              <a:t>The fog rules are written as compliance bounds, most of them lower bounds, and each window is reduced through a small ledger that accumulates then evaluates so a brief dip is not lost between windows. Breaches are raised as named compliance events, so the operator sees under-chlorination or low pressure as a first-class alert rather than the mere absence of a high-value alarm.</a:t>
+            </a:r>
+            <a:endParaRPr lang="en-US" sz="1350" dirty="0"/>
           </a:p>
         </p:txBody>
       </p:sp>
